--- a/presentacion_impacto_5a_editable.pptx
+++ b/presentacion_impacto_5a_editable.pptx
@@ -3275,7 +3275,7 @@
                 </a:solidFill>
                 <a:latin typeface="Segoe UI"/>
               </a:rPr>
-              <a:t>PROB. MÁXIMA ≤</a:t>
+              <a:t>RD MÁXIMA ≤</a:t>
             </a:r>
           </a:p>
         </p:txBody>
@@ -3314,7 +3314,7 @@
                 </a:solidFill>
                 <a:latin typeface="Segoe UI"/>
               </a:rPr>
-              <a:t>35%</a:t>
+              <a:t>9%</a:t>
             </a:r>
           </a:p>
         </p:txBody>
@@ -4153,7 +4153,7 @@
                 </a:solidFill>
                 <a:latin typeface="Segoe UI"/>
               </a:rPr>
-              <a:t>Tasa malos</a:t>
+              <a:t>RD prom</a:t>
             </a:r>
           </a:p>
         </p:txBody>
@@ -4457,13 +4457,14 @@
                 <a:tableStyleId>{5C22544A-7EE6-4342-B048-85BDC9FD1C3A}</a:tableStyleId>
               </a:tblPr>
               <a:tblGrid>
-                <a:gridCol w="856564"/>
-                <a:gridCol w="1142085"/>
-                <a:gridCol w="1998649"/>
+                <a:gridCol w="799459"/>
+                <a:gridCol w="970772"/>
+                <a:gridCol w="970772"/>
+                <a:gridCol w="1941545"/>
                 <a:gridCol w="1027877"/>
-                <a:gridCol w="2169962"/>
-                <a:gridCol w="1998649"/>
-                <a:gridCol w="2227066"/>
+                <a:gridCol w="1941545"/>
+                <a:gridCol w="1713128"/>
+                <a:gridCol w="2055754"/>
               </a:tblGrid>
               <a:tr h="237744">
                 <a:tc>
@@ -4473,7 +4474,7 @@
                     <a:p>
                       <a:pPr algn="l"/>
                       <a:r>
-                        <a:rPr sz="860" b="1">
+                        <a:rPr sz="840" b="1">
                           <a:solidFill>
                             <a:srgbClr val="FFFFFF"/>
                           </a:solidFill>
@@ -4516,7 +4517,7 @@
                     <a:p>
                       <a:pPr algn="r"/>
                       <a:r>
-                        <a:rPr sz="860" b="1">
+                        <a:rPr sz="840" b="1">
                           <a:solidFill>
                             <a:srgbClr val="FFFFFF"/>
                           </a:solidFill>
@@ -4559,12 +4560,55 @@
                     <a:p>
                       <a:pPr algn="r"/>
                       <a:r>
-                        <a:rPr sz="860" b="1">
+                        <a:rPr sz="840" b="1">
                           <a:solidFill>
                             <a:srgbClr val="FFFFFF"/>
                           </a:solidFill>
                           <a:latin typeface="Segoe UI"/>
                         </a:rPr>
+                        <a:t>RD</a:t>
+                      </a:r>
+                    </a:p>
+                  </a:txBody>
+                  <a:tcPr anchor="ctr" marL="54864" marR="54864" marT="9144" marB="9144">
+                    <a:lnL w="9525" cap="flat">
+                      <a:solidFill>
+                        <a:srgbClr val="EAF1ED"/>
+                      </a:solidFill>
+                    </a:lnL>
+                    <a:lnR w="9525" cap="flat">
+                      <a:solidFill>
+                        <a:srgbClr val="EAF1ED"/>
+                      </a:solidFill>
+                    </a:lnR>
+                    <a:lnT w="9525" cap="flat">
+                      <a:solidFill>
+                        <a:srgbClr val="EAF1ED"/>
+                      </a:solidFill>
+                    </a:lnT>
+                    <a:lnB w="9525" cap="flat">
+                      <a:solidFill>
+                        <a:srgbClr val="EAF1ED"/>
+                      </a:solidFill>
+                    </a:lnB>
+                    <a:solidFill>
+                      <a:srgbClr val="1F5130"/>
+                    </a:solidFill>
+                  </a:tcPr>
+                </a:tc>
+                <a:tc>
+                  <a:txBody>
+                    <a:bodyPr wrap="none"/>
+                    <a:lstStyle/>
+                    <a:p>
+                      <a:pPr algn="r"/>
+                      <a:r>
+                        <a:rPr sz="840" b="1">
+                          <a:solidFill>
+                            <a:srgbClr val="FFFFFF"/>
+                          </a:solidFill>
+                          <a:latin typeface="Segoe UI"/>
+                        </a:rPr>
                         <a:t>Base inicial</a:t>
                       </a:r>
                     </a:p>
@@ -4602,7 +4646,7 @@
                     <a:p>
                       <a:pPr algn="r"/>
                       <a:r>
-                        <a:rPr sz="860" b="1">
+                        <a:rPr sz="840" b="1">
                           <a:solidFill>
                             <a:srgbClr val="FFFFFF"/>
                           </a:solidFill>
@@ -4645,7 +4689,7 @@
                     <a:p>
                       <a:pPr algn="r"/>
                       <a:r>
-                        <a:rPr sz="860" b="1">
+                        <a:rPr sz="840" b="1">
                           <a:solidFill>
                             <a:srgbClr val="FFFFFF"/>
                           </a:solidFill>
@@ -4688,7 +4732,7 @@
                     <a:p>
                       <a:pPr algn="r"/>
                       <a:r>
-                        <a:rPr sz="860" b="1">
+                        <a:rPr sz="840" b="1">
                           <a:solidFill>
                             <a:srgbClr val="FFFFFF"/>
                           </a:solidFill>
@@ -4731,7 +4775,7 @@
                     <a:p>
                       <a:pPr algn="r"/>
                       <a:r>
-                        <a:rPr sz="860" b="1">
+                        <a:rPr sz="840" b="1">
                           <a:solidFill>
                             <a:srgbClr val="FFFFFF"/>
                           </a:solidFill>
@@ -4776,7 +4820,7 @@
                     <a:p>
                       <a:pPr algn="ctr"/>
                       <a:r>
-                        <a:rPr sz="860" b="1">
+                        <a:rPr sz="840" b="1">
                           <a:solidFill>
                             <a:srgbClr val="112233"/>
                           </a:solidFill>
@@ -4819,13 +4863,56 @@
                     <a:p>
                       <a:pPr algn="r"/>
                       <a:r>
-                        <a:rPr sz="860" b="1">
+                        <a:rPr sz="840" b="0">
+                          <a:solidFill>
+                            <a:srgbClr val="14271D"/>
+                          </a:solidFill>
+                          <a:latin typeface="Segoe UI"/>
+                        </a:rPr>
+                        <a:t>28.2%</a:t>
+                      </a:r>
+                    </a:p>
+                  </a:txBody>
+                  <a:tcPr anchor="ctr" marL="54864" marR="54864" marT="9144" marB="9144">
+                    <a:lnL w="9525" cap="flat">
+                      <a:solidFill>
+                        <a:srgbClr val="EAF1ED"/>
+                      </a:solidFill>
+                    </a:lnL>
+                    <a:lnR w="9525" cap="flat">
+                      <a:solidFill>
+                        <a:srgbClr val="EAF1ED"/>
+                      </a:solidFill>
+                    </a:lnR>
+                    <a:lnT w="9525" cap="flat">
+                      <a:solidFill>
+                        <a:srgbClr val="EAF1ED"/>
+                      </a:solidFill>
+                    </a:lnT>
+                    <a:lnB w="9525" cap="flat">
+                      <a:solidFill>
+                        <a:srgbClr val="EAF1ED"/>
+                      </a:solidFill>
+                    </a:lnB>
+                    <a:solidFill>
+                      <a:srgbClr val="EAFAEF"/>
+                    </a:solidFill>
+                  </a:tcPr>
+                </a:tc>
+                <a:tc>
+                  <a:txBody>
+                    <a:bodyPr wrap="none"/>
+                    <a:lstStyle/>
+                    <a:p>
+                      <a:pPr algn="r"/>
+                      <a:r>
+                        <a:rPr sz="840" b="1">
                           <a:solidFill>
                             <a:srgbClr val="1F5130"/>
                           </a:solidFill>
                           <a:latin typeface="Segoe UI"/>
                         </a:rPr>
-                        <a:t>28.2%</a:t>
+                        <a:t>7.2%</a:t>
                       </a:r>
                     </a:p>
                   </a:txBody>
@@ -4862,7 +4949,7 @@
                     <a:p>
                       <a:pPr algn="r"/>
                       <a:r>
-                        <a:rPr sz="860" b="1">
+                        <a:rPr sz="840" b="1">
                           <a:solidFill>
                             <a:srgbClr val="1F5130"/>
                           </a:solidFill>
@@ -4905,7 +4992,7 @@
                     <a:p>
                       <a:pPr algn="r"/>
                       <a:r>
-                        <a:rPr sz="860" b="0">
+                        <a:rPr sz="840" b="0">
                           <a:solidFill>
                             <a:srgbClr val="14271D"/>
                           </a:solidFill>
@@ -4948,7 +5035,7 @@
                     <a:p>
                       <a:pPr algn="r"/>
                       <a:r>
-                        <a:rPr sz="860" b="0">
+                        <a:rPr sz="840" b="0">
                           <a:solidFill>
                             <a:srgbClr val="14271D"/>
                           </a:solidFill>
@@ -4991,7 +5078,7 @@
                     <a:p>
                       <a:pPr algn="r"/>
                       <a:r>
-                        <a:rPr sz="860" b="0">
+                        <a:rPr sz="840" b="0">
                           <a:solidFill>
                             <a:srgbClr val="14271D"/>
                           </a:solidFill>
@@ -5034,7 +5121,7 @@
                     <a:p>
                       <a:pPr algn="r"/>
                       <a:r>
-                        <a:rPr sz="860" b="0">
+                        <a:rPr sz="840" b="0">
                           <a:solidFill>
                             <a:srgbClr val="14271D"/>
                           </a:solidFill>
@@ -5079,7 +5166,7 @@
                     <a:p>
                       <a:pPr algn="ctr"/>
                       <a:r>
-                        <a:rPr sz="860" b="1">
+                        <a:rPr sz="840" b="1">
                           <a:solidFill>
                             <a:srgbClr val="112233"/>
                           </a:solidFill>
@@ -5122,13 +5209,56 @@
                     <a:p>
                       <a:pPr algn="r"/>
                       <a:r>
-                        <a:rPr sz="860" b="1">
+                        <a:rPr sz="840" b="0">
+                          <a:solidFill>
+                            <a:srgbClr val="14271D"/>
+                          </a:solidFill>
+                          <a:latin typeface="Segoe UI"/>
+                        </a:rPr>
+                        <a:t>31.5%</a:t>
+                      </a:r>
+                    </a:p>
+                  </a:txBody>
+                  <a:tcPr anchor="ctr" marL="54864" marR="54864" marT="9144" marB="9144">
+                    <a:lnL w="9525" cap="flat">
+                      <a:solidFill>
+                        <a:srgbClr val="EAF1ED"/>
+                      </a:solidFill>
+                    </a:lnL>
+                    <a:lnR w="9525" cap="flat">
+                      <a:solidFill>
+                        <a:srgbClr val="EAF1ED"/>
+                      </a:solidFill>
+                    </a:lnR>
+                    <a:lnT w="9525" cap="flat">
+                      <a:solidFill>
+                        <a:srgbClr val="EAF1ED"/>
+                      </a:solidFill>
+                    </a:lnT>
+                    <a:lnB w="9525" cap="flat">
+                      <a:solidFill>
+                        <a:srgbClr val="EAF1ED"/>
+                      </a:solidFill>
+                    </a:lnB>
+                    <a:solidFill>
+                      <a:srgbClr val="EAFAEF"/>
+                    </a:solidFill>
+                  </a:tcPr>
+                </a:tc>
+                <a:tc>
+                  <a:txBody>
+                    <a:bodyPr wrap="none"/>
+                    <a:lstStyle/>
+                    <a:p>
+                      <a:pPr algn="r"/>
+                      <a:r>
+                        <a:rPr sz="840" b="1">
                           <a:solidFill>
                             <a:srgbClr val="1F5130"/>
                           </a:solidFill>
                           <a:latin typeface="Segoe UI"/>
                         </a:rPr>
-                        <a:t>31.5%</a:t>
+                        <a:t>8.1%</a:t>
                       </a:r>
                     </a:p>
                   </a:txBody>
@@ -5165,7 +5295,7 @@
                     <a:p>
                       <a:pPr algn="r"/>
                       <a:r>
-                        <a:rPr sz="860" b="1">
+                        <a:rPr sz="840" b="1">
                           <a:solidFill>
                             <a:srgbClr val="1F5130"/>
                           </a:solidFill>
@@ -5208,7 +5338,7 @@
                     <a:p>
                       <a:pPr algn="r"/>
                       <a:r>
-                        <a:rPr sz="860" b="0">
+                        <a:rPr sz="840" b="0">
                           <a:solidFill>
                             <a:srgbClr val="14271D"/>
                           </a:solidFill>
@@ -5251,7 +5381,7 @@
                     <a:p>
                       <a:pPr algn="r"/>
                       <a:r>
-                        <a:rPr sz="860" b="0">
+                        <a:rPr sz="840" b="0">
                           <a:solidFill>
                             <a:srgbClr val="14271D"/>
                           </a:solidFill>
@@ -5294,7 +5424,7 @@
                     <a:p>
                       <a:pPr algn="r"/>
                       <a:r>
-                        <a:rPr sz="860" b="0">
+                        <a:rPr sz="840" b="0">
                           <a:solidFill>
                             <a:srgbClr val="14271D"/>
                           </a:solidFill>
@@ -5337,7 +5467,7 @@
                     <a:p>
                       <a:pPr algn="r"/>
                       <a:r>
-                        <a:rPr sz="860" b="0">
+                        <a:rPr sz="840" b="0">
                           <a:solidFill>
                             <a:srgbClr val="14271D"/>
                           </a:solidFill>
@@ -5382,7 +5512,7 @@
                     <a:p>
                       <a:pPr algn="ctr"/>
                       <a:r>
-                        <a:rPr sz="860" b="1">
+                        <a:rPr sz="840" b="1">
                           <a:solidFill>
                             <a:srgbClr val="112233"/>
                           </a:solidFill>
@@ -5425,13 +5555,56 @@
                     <a:p>
                       <a:pPr algn="r"/>
                       <a:r>
-                        <a:rPr sz="860" b="1">
+                        <a:rPr sz="840" b="0">
+                          <a:solidFill>
+                            <a:srgbClr val="14271D"/>
+                          </a:solidFill>
+                          <a:latin typeface="Segoe UI"/>
+                        </a:rPr>
+                        <a:t>33.5%</a:t>
+                      </a:r>
+                    </a:p>
+                  </a:txBody>
+                  <a:tcPr anchor="ctr" marL="54864" marR="54864" marT="9144" marB="9144">
+                    <a:lnL w="9525" cap="flat">
+                      <a:solidFill>
+                        <a:srgbClr val="EAF1ED"/>
+                      </a:solidFill>
+                    </a:lnL>
+                    <a:lnR w="9525" cap="flat">
+                      <a:solidFill>
+                        <a:srgbClr val="EAF1ED"/>
+                      </a:solidFill>
+                    </a:lnR>
+                    <a:lnT w="9525" cap="flat">
+                      <a:solidFill>
+                        <a:srgbClr val="EAF1ED"/>
+                      </a:solidFill>
+                    </a:lnT>
+                    <a:lnB w="9525" cap="flat">
+                      <a:solidFill>
+                        <a:srgbClr val="EAF1ED"/>
+                      </a:solidFill>
+                    </a:lnB>
+                    <a:solidFill>
+                      <a:srgbClr val="EAFAEF"/>
+                    </a:solidFill>
+                  </a:tcPr>
+                </a:tc>
+                <a:tc>
+                  <a:txBody>
+                    <a:bodyPr wrap="none"/>
+                    <a:lstStyle/>
+                    <a:p>
+                      <a:pPr algn="r"/>
+                      <a:r>
+                        <a:rPr sz="840" b="1">
                           <a:solidFill>
                             <a:srgbClr val="1F5130"/>
                           </a:solidFill>
                           <a:latin typeface="Segoe UI"/>
                         </a:rPr>
-                        <a:t>33.5%</a:t>
+                        <a:t>8.7%</a:t>
                       </a:r>
                     </a:p>
                   </a:txBody>
@@ -5468,7 +5641,7 @@
                     <a:p>
                       <a:pPr algn="r"/>
                       <a:r>
-                        <a:rPr sz="860" b="1">
+                        <a:rPr sz="840" b="1">
                           <a:solidFill>
                             <a:srgbClr val="1F5130"/>
                           </a:solidFill>
@@ -5511,7 +5684,7 @@
                     <a:p>
                       <a:pPr algn="r"/>
                       <a:r>
-                        <a:rPr sz="860" b="0">
+                        <a:rPr sz="840" b="0">
                           <a:solidFill>
                             <a:srgbClr val="14271D"/>
                           </a:solidFill>
@@ -5554,7 +5727,7 @@
                     <a:p>
                       <a:pPr algn="r"/>
                       <a:r>
-                        <a:rPr sz="860" b="0">
+                        <a:rPr sz="840" b="0">
                           <a:solidFill>
                             <a:srgbClr val="14271D"/>
                           </a:solidFill>
@@ -5597,7 +5770,7 @@
                     <a:p>
                       <a:pPr algn="r"/>
                       <a:r>
-                        <a:rPr sz="860" b="0">
+                        <a:rPr sz="840" b="0">
                           <a:solidFill>
                             <a:srgbClr val="14271D"/>
                           </a:solidFill>
@@ -5640,7 +5813,7 @@
                     <a:p>
                       <a:pPr algn="r"/>
                       <a:r>
-                        <a:rPr sz="860" b="0">
+                        <a:rPr sz="840" b="0">
                           <a:solidFill>
                             <a:srgbClr val="14271D"/>
                           </a:solidFill>
@@ -5685,7 +5858,7 @@
                     <a:p>
                       <a:pPr algn="ctr"/>
                       <a:r>
-                        <a:rPr sz="860" b="1">
+                        <a:rPr sz="840" b="1">
                           <a:solidFill>
                             <a:srgbClr val="112233"/>
                           </a:solidFill>
@@ -5728,7 +5901,7 @@
                     <a:p>
                       <a:pPr algn="r"/>
                       <a:r>
-                        <a:rPr sz="860" b="0">
+                        <a:rPr sz="840" b="0">
                           <a:solidFill>
                             <a:srgbClr val="9FB0A8"/>
                           </a:solidFill>
@@ -5771,12 +5944,55 @@
                     <a:p>
                       <a:pPr algn="r"/>
                       <a:r>
-                        <a:rPr sz="860" b="0">
+                        <a:rPr sz="840" b="0">
                           <a:solidFill>
                             <a:srgbClr val="9FB0A8"/>
                           </a:solidFill>
                           <a:latin typeface="Segoe UI"/>
                         </a:rPr>
+                        <a:t>9.4%</a:t>
+                      </a:r>
+                    </a:p>
+                  </a:txBody>
+                  <a:tcPr anchor="ctr" marL="54864" marR="54864" marT="9144" marB="9144">
+                    <a:lnL w="9525" cap="flat">
+                      <a:solidFill>
+                        <a:srgbClr val="EAF1ED"/>
+                      </a:solidFill>
+                    </a:lnL>
+                    <a:lnR w="9525" cap="flat">
+                      <a:solidFill>
+                        <a:srgbClr val="EAF1ED"/>
+                      </a:solidFill>
+                    </a:lnR>
+                    <a:lnT w="9525" cap="flat">
+                      <a:solidFill>
+                        <a:srgbClr val="EAF1ED"/>
+                      </a:solidFill>
+                    </a:lnT>
+                    <a:lnB w="9525" cap="flat">
+                      <a:solidFill>
+                        <a:srgbClr val="EAF1ED"/>
+                      </a:solidFill>
+                    </a:lnB>
+                    <a:solidFill>
+                      <a:srgbClr val="FFFFFF"/>
+                    </a:solidFill>
+                  </a:tcPr>
+                </a:tc>
+                <a:tc>
+                  <a:txBody>
+                    <a:bodyPr wrap="none"/>
+                    <a:lstStyle/>
+                    <a:p>
+                      <a:pPr algn="r"/>
+                      <a:r>
+                        <a:rPr sz="840" b="0">
+                          <a:solidFill>
+                            <a:srgbClr val="9FB0A8"/>
+                          </a:solidFill>
+                          <a:latin typeface="Segoe UI"/>
+                        </a:rPr>
                         <a:t>187,958</a:t>
                       </a:r>
                     </a:p>
@@ -5814,7 +6030,7 @@
                     <a:p>
                       <a:pPr algn="r"/>
                       <a:r>
-                        <a:rPr sz="860" b="0">
+                        <a:rPr sz="840" b="0">
                           <a:solidFill>
                             <a:srgbClr val="9FB0A8"/>
                           </a:solidFill>
@@ -5857,7 +6073,7 @@
                     <a:p>
                       <a:pPr algn="r"/>
                       <a:r>
-                        <a:rPr sz="860" b="0">
+                        <a:rPr sz="840" b="0">
                           <a:solidFill>
                             <a:srgbClr val="9FB0A8"/>
                           </a:solidFill>
@@ -5900,7 +6116,7 @@
                     <a:p>
                       <a:pPr algn="r"/>
                       <a:r>
-                        <a:rPr sz="860" b="0">
+                        <a:rPr sz="840" b="0">
                           <a:solidFill>
                             <a:srgbClr val="9FB0A8"/>
                           </a:solidFill>
@@ -5943,7 +6159,7 @@
                     <a:p>
                       <a:pPr algn="r"/>
                       <a:r>
-                        <a:rPr sz="860" b="0">
+                        <a:rPr sz="840" b="0">
                           <a:solidFill>
                             <a:srgbClr val="9FB0A8"/>
                           </a:solidFill>
@@ -5988,7 +6204,7 @@
                     <a:p>
                       <a:pPr algn="ctr"/>
                       <a:r>
-                        <a:rPr sz="860" b="1">
+                        <a:rPr sz="840" b="1">
                           <a:solidFill>
                             <a:srgbClr val="112233"/>
                           </a:solidFill>
@@ -6031,7 +6247,7 @@
                     <a:p>
                       <a:pPr algn="r"/>
                       <a:r>
-                        <a:rPr sz="860" b="0">
+                        <a:rPr sz="840" b="0">
                           <a:solidFill>
                             <a:srgbClr val="9FB0A8"/>
                           </a:solidFill>
@@ -6074,12 +6290,55 @@
                     <a:p>
                       <a:pPr algn="r"/>
                       <a:r>
-                        <a:rPr sz="860" b="0">
+                        <a:rPr sz="840" b="0">
                           <a:solidFill>
                             <a:srgbClr val="9FB0A8"/>
                           </a:solidFill>
                           <a:latin typeface="Segoe UI"/>
                         </a:rPr>
+                        <a:t>13.4%</a:t>
+                      </a:r>
+                    </a:p>
+                  </a:txBody>
+                  <a:tcPr anchor="ctr" marL="54864" marR="54864" marT="9144" marB="9144">
+                    <a:lnL w="9525" cap="flat">
+                      <a:solidFill>
+                        <a:srgbClr val="EAF1ED"/>
+                      </a:solidFill>
+                    </a:lnL>
+                    <a:lnR w="9525" cap="flat">
+                      <a:solidFill>
+                        <a:srgbClr val="EAF1ED"/>
+                      </a:solidFill>
+                    </a:lnR>
+                    <a:lnT w="9525" cap="flat">
+                      <a:solidFill>
+                        <a:srgbClr val="EAF1ED"/>
+                      </a:solidFill>
+                    </a:lnT>
+                    <a:lnB w="9525" cap="flat">
+                      <a:solidFill>
+                        <a:srgbClr val="EAF1ED"/>
+                      </a:solidFill>
+                    </a:lnB>
+                    <a:solidFill>
+                      <a:srgbClr val="FFFFFF"/>
+                    </a:solidFill>
+                  </a:tcPr>
+                </a:tc>
+                <a:tc>
+                  <a:txBody>
+                    <a:bodyPr wrap="none"/>
+                    <a:lstStyle/>
+                    <a:p>
+                      <a:pPr algn="r"/>
+                      <a:r>
+                        <a:rPr sz="840" b="0">
+                          <a:solidFill>
+                            <a:srgbClr val="9FB0A8"/>
+                          </a:solidFill>
+                          <a:latin typeface="Segoe UI"/>
+                        </a:rPr>
                         <a:t>114,041</a:t>
                       </a:r>
                     </a:p>
@@ -6117,7 +6376,7 @@
                     <a:p>
                       <a:pPr algn="r"/>
                       <a:r>
-                        <a:rPr sz="860" b="0">
+                        <a:rPr sz="840" b="0">
                           <a:solidFill>
                             <a:srgbClr val="9FB0A8"/>
                           </a:solidFill>
@@ -6160,7 +6419,7 @@
                     <a:p>
                       <a:pPr algn="r"/>
                       <a:r>
-                        <a:rPr sz="860" b="0">
+                        <a:rPr sz="840" b="0">
                           <a:solidFill>
                             <a:srgbClr val="9FB0A8"/>
                           </a:solidFill>
@@ -6203,7 +6462,7 @@
                     <a:p>
                       <a:pPr algn="r"/>
                       <a:r>
-                        <a:rPr sz="860" b="0">
+                        <a:rPr sz="840" b="0">
                           <a:solidFill>
                             <a:srgbClr val="9FB0A8"/>
                           </a:solidFill>
@@ -6246,7 +6505,7 @@
                     <a:p>
                       <a:pPr algn="r"/>
                       <a:r>
-                        <a:rPr sz="860" b="0">
+                        <a:rPr sz="840" b="0">
                           <a:solidFill>
                             <a:srgbClr val="9FB0A8"/>
                           </a:solidFill>
@@ -6291,7 +6550,7 @@
                     <a:p>
                       <a:pPr algn="ctr"/>
                       <a:r>
-                        <a:rPr sz="860" b="1">
+                        <a:rPr sz="840" b="1">
                           <a:solidFill>
                             <a:srgbClr val="112233"/>
                           </a:solidFill>
@@ -6334,7 +6593,7 @@
                     <a:p>
                       <a:pPr algn="r"/>
                       <a:r>
-                        <a:rPr sz="860" b="0">
+                        <a:rPr sz="840" b="0">
                           <a:solidFill>
                             <a:srgbClr val="9FB0A8"/>
                           </a:solidFill>
@@ -6377,12 +6636,55 @@
                     <a:p>
                       <a:pPr algn="r"/>
                       <a:r>
-                        <a:rPr sz="860" b="0">
+                        <a:rPr sz="840" b="0">
                           <a:solidFill>
                             <a:srgbClr val="9FB0A8"/>
                           </a:solidFill>
                           <a:latin typeface="Segoe UI"/>
                         </a:rPr>
+                        <a:t>13.5%</a:t>
+                      </a:r>
+                    </a:p>
+                  </a:txBody>
+                  <a:tcPr anchor="ctr" marL="54864" marR="54864" marT="9144" marB="9144">
+                    <a:lnL w="9525" cap="flat">
+                      <a:solidFill>
+                        <a:srgbClr val="EAF1ED"/>
+                      </a:solidFill>
+                    </a:lnL>
+                    <a:lnR w="9525" cap="flat">
+                      <a:solidFill>
+                        <a:srgbClr val="EAF1ED"/>
+                      </a:solidFill>
+                    </a:lnR>
+                    <a:lnT w="9525" cap="flat">
+                      <a:solidFill>
+                        <a:srgbClr val="EAF1ED"/>
+                      </a:solidFill>
+                    </a:lnT>
+                    <a:lnB w="9525" cap="flat">
+                      <a:solidFill>
+                        <a:srgbClr val="EAF1ED"/>
+                      </a:solidFill>
+                    </a:lnB>
+                    <a:solidFill>
+                      <a:srgbClr val="FFFFFF"/>
+                    </a:solidFill>
+                  </a:tcPr>
+                </a:tc>
+                <a:tc>
+                  <a:txBody>
+                    <a:bodyPr wrap="none"/>
+                    <a:lstStyle/>
+                    <a:p>
+                      <a:pPr algn="r"/>
+                      <a:r>
+                        <a:rPr sz="840" b="0">
+                          <a:solidFill>
+                            <a:srgbClr val="9FB0A8"/>
+                          </a:solidFill>
+                          <a:latin typeface="Segoe UI"/>
+                        </a:rPr>
                         <a:t>289,713</a:t>
                       </a:r>
                     </a:p>
@@ -6420,7 +6722,7 @@
                     <a:p>
                       <a:pPr algn="r"/>
                       <a:r>
-                        <a:rPr sz="860" b="0">
+                        <a:rPr sz="840" b="0">
                           <a:solidFill>
                             <a:srgbClr val="9FB0A8"/>
                           </a:solidFill>
@@ -6463,7 +6765,7 @@
                     <a:p>
                       <a:pPr algn="r"/>
                       <a:r>
-                        <a:rPr sz="860" b="0">
+                        <a:rPr sz="840" b="0">
                           <a:solidFill>
                             <a:srgbClr val="9FB0A8"/>
                           </a:solidFill>
@@ -6506,7 +6808,7 @@
                     <a:p>
                       <a:pPr algn="r"/>
                       <a:r>
-                        <a:rPr sz="860" b="0">
+                        <a:rPr sz="840" b="0">
                           <a:solidFill>
                             <a:srgbClr val="9FB0A8"/>
                           </a:solidFill>
@@ -6549,7 +6851,7 @@
                     <a:p>
                       <a:pPr algn="r"/>
                       <a:r>
-                        <a:rPr sz="860" b="0">
+                        <a:rPr sz="840" b="0">
                           <a:solidFill>
                             <a:srgbClr val="9FB0A8"/>
                           </a:solidFill>
@@ -6594,7 +6896,7 @@
                     <a:p>
                       <a:pPr algn="ctr"/>
                       <a:r>
-                        <a:rPr sz="860" b="1">
+                        <a:rPr sz="840" b="1">
                           <a:solidFill>
                             <a:srgbClr val="112233"/>
                           </a:solidFill>
@@ -6637,7 +6939,7 @@
                     <a:p>
                       <a:pPr algn="r"/>
                       <a:r>
-                        <a:rPr sz="860" b="0">
+                        <a:rPr sz="840" b="0">
                           <a:solidFill>
                             <a:srgbClr val="9FB0A8"/>
                           </a:solidFill>
@@ -6680,12 +6982,55 @@
                     <a:p>
                       <a:pPr algn="r"/>
                       <a:r>
-                        <a:rPr sz="860" b="0">
+                        <a:rPr sz="840" b="0">
                           <a:solidFill>
                             <a:srgbClr val="9FB0A8"/>
                           </a:solidFill>
                           <a:latin typeface="Segoe UI"/>
                         </a:rPr>
+                        <a:t>13.2%</a:t>
+                      </a:r>
+                    </a:p>
+                  </a:txBody>
+                  <a:tcPr anchor="ctr" marL="54864" marR="54864" marT="9144" marB="9144">
+                    <a:lnL w="9525" cap="flat">
+                      <a:solidFill>
+                        <a:srgbClr val="EAF1ED"/>
+                      </a:solidFill>
+                    </a:lnL>
+                    <a:lnR w="9525" cap="flat">
+                      <a:solidFill>
+                        <a:srgbClr val="EAF1ED"/>
+                      </a:solidFill>
+                    </a:lnR>
+                    <a:lnT w="9525" cap="flat">
+                      <a:solidFill>
+                        <a:srgbClr val="EAF1ED"/>
+                      </a:solidFill>
+                    </a:lnT>
+                    <a:lnB w="9525" cap="flat">
+                      <a:solidFill>
+                        <a:srgbClr val="EAF1ED"/>
+                      </a:solidFill>
+                    </a:lnB>
+                    <a:solidFill>
+                      <a:srgbClr val="FFFFFF"/>
+                    </a:solidFill>
+                  </a:tcPr>
+                </a:tc>
+                <a:tc>
+                  <a:txBody>
+                    <a:bodyPr wrap="none"/>
+                    <a:lstStyle/>
+                    <a:p>
+                      <a:pPr algn="r"/>
+                      <a:r>
+                        <a:rPr sz="840" b="0">
+                          <a:solidFill>
+                            <a:srgbClr val="9FB0A8"/>
+                          </a:solidFill>
+                          <a:latin typeface="Segoe UI"/>
+                        </a:rPr>
                         <a:t>278,690</a:t>
                       </a:r>
                     </a:p>
@@ -6723,7 +7068,7 @@
                     <a:p>
                       <a:pPr algn="r"/>
                       <a:r>
-                        <a:rPr sz="860" b="0">
+                        <a:rPr sz="840" b="0">
                           <a:solidFill>
                             <a:srgbClr val="9FB0A8"/>
                           </a:solidFill>
@@ -6766,7 +7111,7 @@
                     <a:p>
                       <a:pPr algn="r"/>
                       <a:r>
-                        <a:rPr sz="860" b="0">
+                        <a:rPr sz="840" b="0">
                           <a:solidFill>
                             <a:srgbClr val="9FB0A8"/>
                           </a:solidFill>
@@ -6809,7 +7154,7 @@
                     <a:p>
                       <a:pPr algn="r"/>
                       <a:r>
-                        <a:rPr sz="860" b="0">
+                        <a:rPr sz="840" b="0">
                           <a:solidFill>
                             <a:srgbClr val="9FB0A8"/>
                           </a:solidFill>
@@ -6852,7 +7197,7 @@
                     <a:p>
                       <a:pPr algn="r"/>
                       <a:r>
-                        <a:rPr sz="860" b="0">
+                        <a:rPr sz="840" b="0">
                           <a:solidFill>
                             <a:srgbClr val="9FB0A8"/>
                           </a:solidFill>
@@ -6897,7 +7242,7 @@
                     <a:p>
                       <a:pPr algn="ctr"/>
                       <a:r>
-                        <a:rPr sz="860" b="1">
+                        <a:rPr sz="840" b="1">
                           <a:solidFill>
                             <a:srgbClr val="112233"/>
                           </a:solidFill>
@@ -6940,7 +7285,7 @@
                     <a:p>
                       <a:pPr algn="r"/>
                       <a:r>
-                        <a:rPr sz="860" b="0">
+                        <a:rPr sz="840" b="0">
                           <a:solidFill>
                             <a:srgbClr val="9FB0A8"/>
                           </a:solidFill>
@@ -6983,12 +7328,55 @@
                     <a:p>
                       <a:pPr algn="r"/>
                       <a:r>
-                        <a:rPr sz="860" b="0">
+                        <a:rPr sz="840" b="0">
                           <a:solidFill>
                             <a:srgbClr val="9FB0A8"/>
                           </a:solidFill>
                           <a:latin typeface="Segoe UI"/>
                         </a:rPr>
+                        <a:t>17.1%</a:t>
+                      </a:r>
+                    </a:p>
+                  </a:txBody>
+                  <a:tcPr anchor="ctr" marL="54864" marR="54864" marT="9144" marB="9144">
+                    <a:lnL w="9525" cap="flat">
+                      <a:solidFill>
+                        <a:srgbClr val="EAF1ED"/>
+                      </a:solidFill>
+                    </a:lnL>
+                    <a:lnR w="9525" cap="flat">
+                      <a:solidFill>
+                        <a:srgbClr val="EAF1ED"/>
+                      </a:solidFill>
+                    </a:lnR>
+                    <a:lnT w="9525" cap="flat">
+                      <a:solidFill>
+                        <a:srgbClr val="EAF1ED"/>
+                      </a:solidFill>
+                    </a:lnT>
+                    <a:lnB w="9525" cap="flat">
+                      <a:solidFill>
+                        <a:srgbClr val="EAF1ED"/>
+                      </a:solidFill>
+                    </a:lnB>
+                    <a:solidFill>
+                      <a:srgbClr val="FFFFFF"/>
+                    </a:solidFill>
+                  </a:tcPr>
+                </a:tc>
+                <a:tc>
+                  <a:txBody>
+                    <a:bodyPr wrap="none"/>
+                    <a:lstStyle/>
+                    <a:p>
+                      <a:pPr algn="r"/>
+                      <a:r>
+                        <a:rPr sz="840" b="0">
+                          <a:solidFill>
+                            <a:srgbClr val="9FB0A8"/>
+                          </a:solidFill>
+                          <a:latin typeface="Segoe UI"/>
+                        </a:rPr>
                         <a:t>86,512</a:t>
                       </a:r>
                     </a:p>
@@ -7026,7 +7414,7 @@
                     <a:p>
                       <a:pPr algn="r"/>
                       <a:r>
-                        <a:rPr sz="860" b="0">
+                        <a:rPr sz="840" b="0">
                           <a:solidFill>
                             <a:srgbClr val="9FB0A8"/>
                           </a:solidFill>
@@ -7069,7 +7457,7 @@
                     <a:p>
                       <a:pPr algn="r"/>
                       <a:r>
-                        <a:rPr sz="860" b="0">
+                        <a:rPr sz="840" b="0">
                           <a:solidFill>
                             <a:srgbClr val="9FB0A8"/>
                           </a:solidFill>
@@ -7112,7 +7500,7 @@
                     <a:p>
                       <a:pPr algn="r"/>
                       <a:r>
-                        <a:rPr sz="860" b="0">
+                        <a:rPr sz="840" b="0">
                           <a:solidFill>
                             <a:srgbClr val="9FB0A8"/>
                           </a:solidFill>
@@ -7155,7 +7543,7 @@
                     <a:p>
                       <a:pPr algn="r"/>
                       <a:r>
-                        <a:rPr sz="860" b="0">
+                        <a:rPr sz="840" b="0">
                           <a:solidFill>
                             <a:srgbClr val="9FB0A8"/>
                           </a:solidFill>
@@ -7200,7 +7588,7 @@
                     <a:p>
                       <a:pPr algn="ctr"/>
                       <a:r>
-                        <a:rPr sz="860" b="1">
+                        <a:rPr sz="840" b="1">
                           <a:solidFill>
                             <a:srgbClr val="112233"/>
                           </a:solidFill>
@@ -7243,7 +7631,7 @@
                     <a:p>
                       <a:pPr algn="r"/>
                       <a:r>
-                        <a:rPr sz="860" b="0">
+                        <a:rPr sz="840" b="0">
                           <a:solidFill>
                             <a:srgbClr val="9FB0A8"/>
                           </a:solidFill>
@@ -7286,12 +7674,55 @@
                     <a:p>
                       <a:pPr algn="r"/>
                       <a:r>
-                        <a:rPr sz="860" b="0">
+                        <a:rPr sz="840" b="0">
                           <a:solidFill>
                             <a:srgbClr val="9FB0A8"/>
                           </a:solidFill>
                           <a:latin typeface="Segoe UI"/>
                         </a:rPr>
+                        <a:t>18.1%</a:t>
+                      </a:r>
+                    </a:p>
+                  </a:txBody>
+                  <a:tcPr anchor="ctr" marL="54864" marR="54864" marT="9144" marB="9144">
+                    <a:lnL w="9525" cap="flat">
+                      <a:solidFill>
+                        <a:srgbClr val="EAF1ED"/>
+                      </a:solidFill>
+                    </a:lnL>
+                    <a:lnR w="9525" cap="flat">
+                      <a:solidFill>
+                        <a:srgbClr val="EAF1ED"/>
+                      </a:solidFill>
+                    </a:lnR>
+                    <a:lnT w="9525" cap="flat">
+                      <a:solidFill>
+                        <a:srgbClr val="EAF1ED"/>
+                      </a:solidFill>
+                    </a:lnT>
+                    <a:lnB w="9525" cap="flat">
+                      <a:solidFill>
+                        <a:srgbClr val="EAF1ED"/>
+                      </a:solidFill>
+                    </a:lnB>
+                    <a:solidFill>
+                      <a:srgbClr val="FFFFFF"/>
+                    </a:solidFill>
+                  </a:tcPr>
+                </a:tc>
+                <a:tc>
+                  <a:txBody>
+                    <a:bodyPr wrap="none"/>
+                    <a:lstStyle/>
+                    <a:p>
+                      <a:pPr algn="r"/>
+                      <a:r>
+                        <a:rPr sz="840" b="0">
+                          <a:solidFill>
+                            <a:srgbClr val="9FB0A8"/>
+                          </a:solidFill>
+                          <a:latin typeface="Segoe UI"/>
+                        </a:rPr>
                         <a:t>111,032</a:t>
                       </a:r>
                     </a:p>
@@ -7329,7 +7760,7 @@
                     <a:p>
                       <a:pPr algn="r"/>
                       <a:r>
-                        <a:rPr sz="860" b="0">
+                        <a:rPr sz="840" b="0">
                           <a:solidFill>
                             <a:srgbClr val="9FB0A8"/>
                           </a:solidFill>
@@ -7372,7 +7803,7 @@
                     <a:p>
                       <a:pPr algn="r"/>
                       <a:r>
-                        <a:rPr sz="860" b="0">
+                        <a:rPr sz="840" b="0">
                           <a:solidFill>
                             <a:srgbClr val="9FB0A8"/>
                           </a:solidFill>
@@ -7415,7 +7846,7 @@
                     <a:p>
                       <a:pPr algn="r"/>
                       <a:r>
-                        <a:rPr sz="860" b="0">
+                        <a:rPr sz="840" b="0">
                           <a:solidFill>
                             <a:srgbClr val="9FB0A8"/>
                           </a:solidFill>
@@ -7458,7 +7889,7 @@
                     <a:p>
                       <a:pPr algn="r"/>
                       <a:r>
-                        <a:rPr sz="860" b="0">
+                        <a:rPr sz="840" b="0">
                           <a:solidFill>
                             <a:srgbClr val="9FB0A8"/>
                           </a:solidFill>
@@ -7503,7 +7934,7 @@
                     <a:p>
                       <a:pPr algn="ctr"/>
                       <a:r>
-                        <a:rPr sz="860" b="1">
+                        <a:rPr sz="840" b="1">
                           <a:solidFill>
                             <a:srgbClr val="112233"/>
                           </a:solidFill>
@@ -7546,7 +7977,7 @@
                     <a:p>
                       <a:pPr algn="r"/>
                       <a:r>
-                        <a:rPr sz="860" b="0">
+                        <a:rPr sz="840" b="0">
                           <a:solidFill>
                             <a:srgbClr val="9FB0A8"/>
                           </a:solidFill>
@@ -7589,12 +8020,55 @@
                     <a:p>
                       <a:pPr algn="r"/>
                       <a:r>
-                        <a:rPr sz="860" b="0">
+                        <a:rPr sz="840" b="0">
                           <a:solidFill>
                             <a:srgbClr val="9FB0A8"/>
                           </a:solidFill>
                           <a:latin typeface="Segoe UI"/>
                         </a:rPr>
+                        <a:t>19.1%</a:t>
+                      </a:r>
+                    </a:p>
+                  </a:txBody>
+                  <a:tcPr anchor="ctr" marL="54864" marR="54864" marT="9144" marB="9144">
+                    <a:lnL w="9525" cap="flat">
+                      <a:solidFill>
+                        <a:srgbClr val="EAF1ED"/>
+                      </a:solidFill>
+                    </a:lnL>
+                    <a:lnR w="9525" cap="flat">
+                      <a:solidFill>
+                        <a:srgbClr val="EAF1ED"/>
+                      </a:solidFill>
+                    </a:lnR>
+                    <a:lnT w="9525" cap="flat">
+                      <a:solidFill>
+                        <a:srgbClr val="EAF1ED"/>
+                      </a:solidFill>
+                    </a:lnT>
+                    <a:lnB w="9525" cap="flat">
+                      <a:solidFill>
+                        <a:srgbClr val="EAF1ED"/>
+                      </a:solidFill>
+                    </a:lnB>
+                    <a:solidFill>
+                      <a:srgbClr val="FFFFFF"/>
+                    </a:solidFill>
+                  </a:tcPr>
+                </a:tc>
+                <a:tc>
+                  <a:txBody>
+                    <a:bodyPr wrap="none"/>
+                    <a:lstStyle/>
+                    <a:p>
+                      <a:pPr algn="r"/>
+                      <a:r>
+                        <a:rPr sz="840" b="0">
+                          <a:solidFill>
+                            <a:srgbClr val="9FB0A8"/>
+                          </a:solidFill>
+                          <a:latin typeface="Segoe UI"/>
+                        </a:rPr>
                         <a:t>147,087</a:t>
                       </a:r>
                     </a:p>
@@ -7632,7 +8106,7 @@
                     <a:p>
                       <a:pPr algn="r"/>
                       <a:r>
-                        <a:rPr sz="860" b="0">
+                        <a:rPr sz="840" b="0">
                           <a:solidFill>
                             <a:srgbClr val="9FB0A8"/>
                           </a:solidFill>
@@ -7675,7 +8149,7 @@
                     <a:p>
                       <a:pPr algn="r"/>
                       <a:r>
-                        <a:rPr sz="860" b="0">
+                        <a:rPr sz="840" b="0">
                           <a:solidFill>
                             <a:srgbClr val="9FB0A8"/>
                           </a:solidFill>
@@ -7718,7 +8192,7 @@
                     <a:p>
                       <a:pPr algn="r"/>
                       <a:r>
-                        <a:rPr sz="860" b="0">
+                        <a:rPr sz="840" b="0">
                           <a:solidFill>
                             <a:srgbClr val="9FB0A8"/>
                           </a:solidFill>
@@ -7761,7 +8235,7 @@
                     <a:p>
                       <a:pPr algn="r"/>
                       <a:r>
-                        <a:rPr sz="860" b="0">
+                        <a:rPr sz="840" b="0">
                           <a:solidFill>
                             <a:srgbClr val="9FB0A8"/>
                           </a:solidFill>
@@ -7806,7 +8280,7 @@
                     <a:p>
                       <a:pPr algn="ctr"/>
                       <a:r>
-                        <a:rPr sz="860" b="1">
+                        <a:rPr sz="840" b="1">
                           <a:solidFill>
                             <a:srgbClr val="112233"/>
                           </a:solidFill>
@@ -7849,7 +8323,7 @@
                     <a:p>
                       <a:pPr algn="r"/>
                       <a:r>
-                        <a:rPr sz="860" b="0">
+                        <a:rPr sz="840" b="0">
                           <a:solidFill>
                             <a:srgbClr val="9FB0A8"/>
                           </a:solidFill>
@@ -7892,12 +8366,55 @@
                     <a:p>
                       <a:pPr algn="r"/>
                       <a:r>
-                        <a:rPr sz="860" b="0">
+                        <a:rPr sz="840" b="0">
                           <a:solidFill>
                             <a:srgbClr val="9FB0A8"/>
                           </a:solidFill>
                           <a:latin typeface="Segoe UI"/>
                         </a:rPr>
+                        <a:t>36.9%</a:t>
+                      </a:r>
+                    </a:p>
+                  </a:txBody>
+                  <a:tcPr anchor="ctr" marL="54864" marR="54864" marT="9144" marB="9144">
+                    <a:lnL w="9525" cap="flat">
+                      <a:solidFill>
+                        <a:srgbClr val="EAF1ED"/>
+                      </a:solidFill>
+                    </a:lnL>
+                    <a:lnR w="9525" cap="flat">
+                      <a:solidFill>
+                        <a:srgbClr val="EAF1ED"/>
+                      </a:solidFill>
+                    </a:lnR>
+                    <a:lnT w="9525" cap="flat">
+                      <a:solidFill>
+                        <a:srgbClr val="EAF1ED"/>
+                      </a:solidFill>
+                    </a:lnT>
+                    <a:lnB w="9525" cap="flat">
+                      <a:solidFill>
+                        <a:srgbClr val="EAF1ED"/>
+                      </a:solidFill>
+                    </a:lnB>
+                    <a:solidFill>
+                      <a:srgbClr val="FFFFFF"/>
+                    </a:solidFill>
+                  </a:tcPr>
+                </a:tc>
+                <a:tc>
+                  <a:txBody>
+                    <a:bodyPr wrap="none"/>
+                    <a:lstStyle/>
+                    <a:p>
+                      <a:pPr algn="r"/>
+                      <a:r>
+                        <a:rPr sz="840" b="0">
+                          <a:solidFill>
+                            <a:srgbClr val="9FB0A8"/>
+                          </a:solidFill>
+                          <a:latin typeface="Segoe UI"/>
+                        </a:rPr>
                         <a:t>70,579</a:t>
                       </a:r>
                     </a:p>
@@ -7935,7 +8452,7 @@
                     <a:p>
                       <a:pPr algn="r"/>
                       <a:r>
-                        <a:rPr sz="860" b="0">
+                        <a:rPr sz="840" b="0">
                           <a:solidFill>
                             <a:srgbClr val="9FB0A8"/>
                           </a:solidFill>
@@ -7978,7 +8495,7 @@
                     <a:p>
                       <a:pPr algn="r"/>
                       <a:r>
-                        <a:rPr sz="860" b="0">
+                        <a:rPr sz="840" b="0">
                           <a:solidFill>
                             <a:srgbClr val="9FB0A8"/>
                           </a:solidFill>
@@ -8021,7 +8538,7 @@
                     <a:p>
                       <a:pPr algn="r"/>
                       <a:r>
-                        <a:rPr sz="860" b="0">
+                        <a:rPr sz="840" b="0">
                           <a:solidFill>
                             <a:srgbClr val="9FB0A8"/>
                           </a:solidFill>
@@ -8064,7 +8581,7 @@
                     <a:p>
                       <a:pPr algn="r"/>
                       <a:r>
-                        <a:rPr sz="860" b="0">
+                        <a:rPr sz="840" b="0">
                           <a:solidFill>
                             <a:srgbClr val="9FB0A8"/>
                           </a:solidFill>
@@ -8109,7 +8626,7 @@
                     <a:p>
                       <a:pPr algn="ctr"/>
                       <a:r>
-                        <a:rPr sz="860" b="1">
+                        <a:rPr sz="840" b="1">
                           <a:solidFill>
                             <a:srgbClr val="112233"/>
                           </a:solidFill>
@@ -8152,7 +8669,7 @@
                     <a:p>
                       <a:pPr algn="r"/>
                       <a:r>
-                        <a:rPr sz="860" b="0">
+                        <a:rPr sz="840" b="0">
                           <a:solidFill>
                             <a:srgbClr val="9FB0A8"/>
                           </a:solidFill>
@@ -8195,12 +8712,55 @@
                     <a:p>
                       <a:pPr algn="r"/>
                       <a:r>
-                        <a:rPr sz="860" b="0">
+                        <a:rPr sz="840" b="0">
                           <a:solidFill>
                             <a:srgbClr val="9FB0A8"/>
                           </a:solidFill>
                           <a:latin typeface="Segoe UI"/>
                         </a:rPr>
+                        <a:t>39.7%</a:t>
+                      </a:r>
+                    </a:p>
+                  </a:txBody>
+                  <a:tcPr anchor="ctr" marL="54864" marR="54864" marT="9144" marB="9144">
+                    <a:lnL w="9525" cap="flat">
+                      <a:solidFill>
+                        <a:srgbClr val="EAF1ED"/>
+                      </a:solidFill>
+                    </a:lnL>
+                    <a:lnR w="9525" cap="flat">
+                      <a:solidFill>
+                        <a:srgbClr val="EAF1ED"/>
+                      </a:solidFill>
+                    </a:lnR>
+                    <a:lnT w="9525" cap="flat">
+                      <a:solidFill>
+                        <a:srgbClr val="EAF1ED"/>
+                      </a:solidFill>
+                    </a:lnT>
+                    <a:lnB w="9525" cap="flat">
+                      <a:solidFill>
+                        <a:srgbClr val="EAF1ED"/>
+                      </a:solidFill>
+                    </a:lnB>
+                    <a:solidFill>
+                      <a:srgbClr val="FFFFFF"/>
+                    </a:solidFill>
+                  </a:tcPr>
+                </a:tc>
+                <a:tc>
+                  <a:txBody>
+                    <a:bodyPr wrap="none"/>
+                    <a:lstStyle/>
+                    <a:p>
+                      <a:pPr algn="r"/>
+                      <a:r>
+                        <a:rPr sz="840" b="0">
+                          <a:solidFill>
+                            <a:srgbClr val="9FB0A8"/>
+                          </a:solidFill>
+                          <a:latin typeface="Segoe UI"/>
+                        </a:rPr>
                         <a:t>223,194</a:t>
                       </a:r>
                     </a:p>
@@ -8238,7 +8798,7 @@
                     <a:p>
                       <a:pPr algn="r"/>
                       <a:r>
-                        <a:rPr sz="860" b="0">
+                        <a:rPr sz="840" b="0">
                           <a:solidFill>
                             <a:srgbClr val="9FB0A8"/>
                           </a:solidFill>
@@ -8281,7 +8841,7 @@
                     <a:p>
                       <a:pPr algn="r"/>
                       <a:r>
-                        <a:rPr sz="860" b="0">
+                        <a:rPr sz="840" b="0">
                           <a:solidFill>
                             <a:srgbClr val="9FB0A8"/>
                           </a:solidFill>
@@ -8324,7 +8884,7 @@
                     <a:p>
                       <a:pPr algn="r"/>
                       <a:r>
-                        <a:rPr sz="860" b="0">
+                        <a:rPr sz="840" b="0">
                           <a:solidFill>
                             <a:srgbClr val="9FB0A8"/>
                           </a:solidFill>
@@ -8367,7 +8927,7 @@
                     <a:p>
                       <a:pPr algn="r"/>
                       <a:r>
-                        <a:rPr sz="860" b="0">
+                        <a:rPr sz="840" b="0">
                           <a:solidFill>
                             <a:srgbClr val="9FB0A8"/>
                           </a:solidFill>
@@ -8412,7 +8972,7 @@
                     <a:p>
                       <a:pPr algn="l"/>
                       <a:r>
-                        <a:rPr sz="860" b="1">
+                        <a:rPr sz="840" b="1">
                           <a:solidFill>
                             <a:srgbClr val="0A4B44"/>
                           </a:solidFill>
@@ -8455,7 +9015,7 @@
                     <a:p>
                       <a:pPr algn="r"/>
                       <a:r>
-                        <a:rPr sz="860" b="1">
+                        <a:rPr sz="840" b="1">
                           <a:solidFill>
                             <a:srgbClr val="0A4B44"/>
                           </a:solidFill>
@@ -8498,12 +9058,55 @@
                     <a:p>
                       <a:pPr algn="r"/>
                       <a:r>
-                        <a:rPr sz="860" b="1">
+                        <a:rPr sz="840" b="1">
                           <a:solidFill>
                             <a:srgbClr val="0A4B44"/>
                           </a:solidFill>
                           <a:latin typeface="Segoe UI"/>
                         </a:rPr>
+                        <a:t>8.4%</a:t>
+                      </a:r>
+                    </a:p>
+                  </a:txBody>
+                  <a:tcPr anchor="ctr" marL="54864" marR="54864" marT="9144" marB="9144">
+                    <a:lnL w="9525" cap="flat">
+                      <a:solidFill>
+                        <a:srgbClr val="EAF1ED"/>
+                      </a:solidFill>
+                    </a:lnL>
+                    <a:lnR w="9525" cap="flat">
+                      <a:solidFill>
+                        <a:srgbClr val="EAF1ED"/>
+                      </a:solidFill>
+                    </a:lnR>
+                    <a:lnT w="9525" cap="flat">
+                      <a:solidFill>
+                        <a:srgbClr val="EAF1ED"/>
+                      </a:solidFill>
+                    </a:lnT>
+                    <a:lnB w="9525" cap="flat">
+                      <a:solidFill>
+                        <a:srgbClr val="EAF1ED"/>
+                      </a:solidFill>
+                    </a:lnB>
+                    <a:solidFill>
+                      <a:srgbClr val="DFF0EA"/>
+                    </a:solidFill>
+                  </a:tcPr>
+                </a:tc>
+                <a:tc>
+                  <a:txBody>
+                    <a:bodyPr wrap="none"/>
+                    <a:lstStyle/>
+                    <a:p>
+                      <a:pPr algn="r"/>
+                      <a:r>
+                        <a:rPr sz="840" b="1">
+                          <a:solidFill>
+                            <a:srgbClr val="0A4B44"/>
+                          </a:solidFill>
+                          <a:latin typeface="Segoe UI"/>
+                        </a:rPr>
                         <a:t>188,869</a:t>
                       </a:r>
                     </a:p>
@@ -8541,7 +9144,7 @@
                     <a:p>
                       <a:pPr algn="r"/>
                       <a:r>
-                        <a:rPr sz="860" b="1">
+                        <a:rPr sz="840" b="1">
                           <a:solidFill>
                             <a:srgbClr val="0A4B44"/>
                           </a:solidFill>
@@ -8584,7 +9187,7 @@
                     <a:p>
                       <a:pPr algn="r"/>
                       <a:r>
-                        <a:rPr sz="860" b="1">
+                        <a:rPr sz="840" b="1">
                           <a:solidFill>
                             <a:srgbClr val="0A4B44"/>
                           </a:solidFill>
@@ -8627,7 +9230,7 @@
                     <a:p>
                       <a:pPr algn="r"/>
                       <a:r>
-                        <a:rPr sz="860" b="1">
+                        <a:rPr sz="840" b="1">
                           <a:solidFill>
                             <a:srgbClr val="0A4B44"/>
                           </a:solidFill>
@@ -8670,7 +9273,7 @@
                     <a:p>
                       <a:pPr algn="r"/>
                       <a:r>
-                        <a:rPr sz="860" b="1">
+                        <a:rPr sz="840" b="1">
                           <a:solidFill>
                             <a:srgbClr val="0A4B44"/>
                           </a:solidFill>
@@ -8852,7 +9455,7 @@
         <p:spPr>
           <a:xfrm>
             <a:off x="384048" y="6519672"/>
-            <a:ext cx="7863840" cy="274320"/>
+            <a:ext cx="8138160" cy="274320"/>
           </a:xfrm>
           <a:prstGeom prst="rect">
             <a:avLst/>
@@ -8886,7 +9489,7 @@
                 </a:solidFill>
                 <a:latin typeface="Segoe UI"/>
               </a:rPr>
-              <a:t> Σ Cantidad de la base inicial con Prob. ≤ 35%</a:t>
+              <a:t> Σ Cantidad de la base inicial con RD ≤ 9%</a:t>
             </a:r>
             <a:r>
               <a:rPr sz="760" b="1">
@@ -8895,7 +9498,7 @@
                 </a:solidFill>
                 <a:latin typeface="Segoe UI"/>
               </a:rPr>
-              <a:t>  ·  Nuevos:</a:t>
+              <a:t>  ·  RD</a:t>
             </a:r>
             <a:r>
               <a:rPr sz="760" b="0">
@@ -8904,7 +9507,25 @@
                 </a:solidFill>
                 <a:latin typeface="Segoe UI"/>
               </a:rPr>
-              <a:t> elegibles − los que hoy están en campaña.</a:t>
+              <a:t> = tasa de riesgo / default observado  ·  </a:t>
+            </a:r>
+            <a:r>
+              <a:rPr sz="760" b="1">
+                <a:solidFill>
+                  <a:srgbClr val="26603A"/>
+                </a:solidFill>
+                <a:latin typeface="Segoe UI"/>
+              </a:rPr>
+              <a:t>Nuevos:</a:t>
+            </a:r>
+            <a:r>
+              <a:rPr sz="760" b="0">
+                <a:solidFill>
+                  <a:srgbClr val="8A9B93"/>
+                </a:solidFill>
+                <a:latin typeface="Segoe UI"/>
+              </a:rPr>
+              <a:t> elegibles − los de campaña.</a:t>
             </a:r>
           </a:p>
         </p:txBody>

--- a/presentacion_impacto_5a_editable.pptx
+++ b/presentacion_impacto_5a_editable.pptx
@@ -3582,7 +3582,7 @@
                 </a:solidFill>
                 <a:latin typeface="Segoe UI"/>
               </a:rPr>
-              <a:t>188,869</a:t>
+              <a:t>83,873</a:t>
             </a:r>
           </a:p>
         </p:txBody>
@@ -3621,7 +3621,7 @@
                 </a:solidFill>
                 <a:latin typeface="Segoe UI"/>
               </a:rPr>
-              <a:t>11.1% de la base inicial</a:t>
+              <a:t>4.9% de la base inicial</a:t>
             </a:r>
           </a:p>
         </p:txBody>
@@ -3745,7 +3745,7 @@
                 </a:solidFill>
                 <a:latin typeface="Segoe UI"/>
               </a:rPr>
-              <a:t>+171,932</a:t>
+              <a:t>+66,118</a:t>
             </a:r>
           </a:p>
         </p:txBody>
@@ -3784,7 +3784,7 @@
                 </a:solidFill>
                 <a:latin typeface="Segoe UI"/>
               </a:rPr>
-              <a:t>× 11.2 vs. campaña actual</a:t>
+              <a:t>× 4.7 vs. campaña actual</a:t>
             </a:r>
           </a:p>
         </p:txBody>
@@ -3910,7 +3910,7 @@
                 </a:solidFill>
                 <a:latin typeface="Segoe UI"/>
               </a:rPr>
-              <a:t>16,937</a:t>
+              <a:t>17,755</a:t>
             </a:r>
           </a:p>
         </p:txBody>
@@ -3949,7 +3949,7 @@
                 </a:solidFill>
                 <a:latin typeface="Segoe UI"/>
               </a:rPr>
-              <a:t>base de campañas · 20260624</a:t>
+              <a:t>base de campañas · 20260617</a:t>
             </a:r>
           </a:p>
         </p:txBody>
@@ -4114,7 +4114,7 @@
                 </a:solidFill>
                 <a:latin typeface="Segoe UI"/>
               </a:rPr>
-              <a:t>32.6%</a:t>
+              <a:t>29.7%</a:t>
             </a:r>
           </a:p>
         </p:txBody>
@@ -4192,7 +4192,7 @@
                 </a:solidFill>
                 <a:latin typeface="Segoe UI"/>
               </a:rPr>
-              <a:t>8.4%</a:t>
+              <a:t>7.4%</a:t>
             </a:r>
           </a:p>
         </p:txBody>
@@ -4270,7 +4270,7 @@
                 </a:solidFill>
                 <a:latin typeface="Segoe UI"/>
               </a:rPr>
-              <a:t>673</a:t>
+              <a:t>703</a:t>
             </a:r>
           </a:p>
         </p:txBody>
@@ -4394,7 +4394,7 @@
                 </a:solidFill>
                 <a:latin typeface="Segoe UI"/>
               </a:rPr>
-              <a:t>+28,655</a:t>
+              <a:t>+11,020</a:t>
             </a:r>
           </a:p>
         </p:txBody>
@@ -4433,7 +4433,7 @@
                 </a:solidFill>
                 <a:latin typeface="Segoe UI"/>
               </a:rPr>
-              <a:t>31,478 elegibles / mes</a:t>
+              <a:t>13,979 elegibles / mes</a:t>
             </a:r>
           </a:p>
         </p:txBody>
@@ -4448,7 +4448,7 @@
         </p:nvGraphicFramePr>
         <p:xfrm>
           <a:off x="384048" y="2304288"/>
-          <a:ext cx="11420852" cy="3401568"/>
+          <a:ext cx="11420852" cy="3406140"/>
         </p:xfrm>
         <a:graphic>
           <a:graphicData uri="http://schemas.openxmlformats.org/drawingml/2006/table">
@@ -4812,7 +4812,7 @@
                   </a:tcPr>
                 </a:tc>
               </a:tr>
-              <a:tr h="242316">
+              <a:tr h="224028">
                 <a:tc>
                   <a:txBody>
                     <a:bodyPr wrap="none"/>
@@ -5041,7 +5041,7 @@
                           </a:solidFill>
                           <a:latin typeface="Segoe UI"/>
                         </a:rPr>
-                        <a:t>17,656</a:t>
+                        <a:t>15,839</a:t>
                       </a:r>
                     </a:p>
                   </a:txBody>
@@ -5084,7 +5084,7 @@
                           </a:solidFill>
                           <a:latin typeface="Segoe UI"/>
                         </a:rPr>
-                        <a:t>2,358</a:t>
+                        <a:t>4,389</a:t>
                       </a:r>
                     </a:p>
                   </a:txBody>
@@ -5158,7 +5158,7 @@
                   </a:tcPr>
                 </a:tc>
               </a:tr>
-              <a:tr h="242316">
+              <a:tr h="224028">
                 <a:tc>
                   <a:txBody>
                     <a:bodyPr wrap="none"/>
@@ -5387,7 +5387,7 @@
                           </a:solidFill>
                           <a:latin typeface="Segoe UI"/>
                         </a:rPr>
-                        <a:t>27,642</a:t>
+                        <a:t>23,084</a:t>
                       </a:r>
                     </a:p>
                   </a:txBody>
@@ -5430,7 +5430,7 @@
                           </a:solidFill>
                           <a:latin typeface="Segoe UI"/>
                         </a:rPr>
-                        <a:t>642</a:t>
+                        <a:t>4,578</a:t>
                       </a:r>
                     </a:p>
                   </a:txBody>
@@ -5504,7 +5504,7 @@
                   </a:tcPr>
                 </a:tc>
               </a:tr>
-              <a:tr h="242316">
+              <a:tr h="224028">
                 <a:tc>
                   <a:txBody>
                     <a:bodyPr wrap="none"/>
@@ -5561,7 +5561,7 @@
                           </a:solidFill>
                           <a:latin typeface="Segoe UI"/>
                         </a:rPr>
-                        <a:t>33.5%</a:t>
+                        <a:t>29.0%</a:t>
                       </a:r>
                     </a:p>
                   </a:txBody>
@@ -5604,6 +5604,2860 @@
                           </a:solidFill>
                           <a:latin typeface="Segoe UI"/>
                         </a:rPr>
+                        <a:t>6.8%</a:t>
+                      </a:r>
+                    </a:p>
+                  </a:txBody>
+                  <a:tcPr anchor="ctr" marL="54864" marR="54864" marT="9144" marB="9144">
+                    <a:lnL w="9525" cap="flat">
+                      <a:solidFill>
+                        <a:srgbClr val="EAF1ED"/>
+                      </a:solidFill>
+                    </a:lnL>
+                    <a:lnR w="9525" cap="flat">
+                      <a:solidFill>
+                        <a:srgbClr val="EAF1ED"/>
+                      </a:solidFill>
+                    </a:lnR>
+                    <a:lnT w="9525" cap="flat">
+                      <a:solidFill>
+                        <a:srgbClr val="EAF1ED"/>
+                      </a:solidFill>
+                    </a:lnT>
+                    <a:lnB w="9525" cap="flat">
+                      <a:solidFill>
+                        <a:srgbClr val="EAF1ED"/>
+                      </a:solidFill>
+                    </a:lnB>
+                    <a:solidFill>
+                      <a:srgbClr val="EAFAEF"/>
+                    </a:solidFill>
+                  </a:tcPr>
+                </a:tc>
+                <a:tc>
+                  <a:txBody>
+                    <a:bodyPr wrap="none"/>
+                    <a:lstStyle/>
+                    <a:p>
+                      <a:pPr algn="r"/>
+                      <a:r>
+                        <a:rPr sz="840" b="1">
+                          <a:solidFill>
+                            <a:srgbClr val="1F5130"/>
+                          </a:solidFill>
+                          <a:latin typeface="Segoe UI"/>
+                        </a:rPr>
+                        <a:t>35,069</a:t>
+                      </a:r>
+                    </a:p>
+                  </a:txBody>
+                  <a:tcPr anchor="ctr" marL="54864" marR="54864" marT="9144" marB="9144">
+                    <a:lnL w="9525" cap="flat">
+                      <a:solidFill>
+                        <a:srgbClr val="EAF1ED"/>
+                      </a:solidFill>
+                    </a:lnL>
+                    <a:lnR w="9525" cap="flat">
+                      <a:solidFill>
+                        <a:srgbClr val="EAF1ED"/>
+                      </a:solidFill>
+                    </a:lnR>
+                    <a:lnT w="9525" cap="flat">
+                      <a:solidFill>
+                        <a:srgbClr val="EAF1ED"/>
+                      </a:solidFill>
+                    </a:lnT>
+                    <a:lnB w="9525" cap="flat">
+                      <a:solidFill>
+                        <a:srgbClr val="EAF1ED"/>
+                      </a:solidFill>
+                    </a:lnB>
+                    <a:solidFill>
+                      <a:srgbClr val="EAFAEF"/>
+                    </a:solidFill>
+                  </a:tcPr>
+                </a:tc>
+                <a:tc>
+                  <a:txBody>
+                    <a:bodyPr wrap="none"/>
+                    <a:lstStyle/>
+                    <a:p>
+                      <a:pPr algn="r"/>
+                      <a:r>
+                        <a:rPr sz="840" b="0">
+                          <a:solidFill>
+                            <a:srgbClr val="14271D"/>
+                          </a:solidFill>
+                          <a:latin typeface="Segoe UI"/>
+                        </a:rPr>
+                        <a:t>2.1%</a:t>
+                      </a:r>
+                    </a:p>
+                  </a:txBody>
+                  <a:tcPr anchor="ctr" marL="54864" marR="54864" marT="9144" marB="9144">
+                    <a:lnL w="9525" cap="flat">
+                      <a:solidFill>
+                        <a:srgbClr val="EAF1ED"/>
+                      </a:solidFill>
+                    </a:lnL>
+                    <a:lnR w="9525" cap="flat">
+                      <a:solidFill>
+                        <a:srgbClr val="EAF1ED"/>
+                      </a:solidFill>
+                    </a:lnR>
+                    <a:lnT w="9525" cap="flat">
+                      <a:solidFill>
+                        <a:srgbClr val="EAF1ED"/>
+                      </a:solidFill>
+                    </a:lnT>
+                    <a:lnB w="9525" cap="flat">
+                      <a:solidFill>
+                        <a:srgbClr val="EAF1ED"/>
+                      </a:solidFill>
+                    </a:lnB>
+                    <a:solidFill>
+                      <a:srgbClr val="EAFAEF"/>
+                    </a:solidFill>
+                  </a:tcPr>
+                </a:tc>
+                <a:tc>
+                  <a:txBody>
+                    <a:bodyPr wrap="none"/>
+                    <a:lstStyle/>
+                    <a:p>
+                      <a:pPr algn="r"/>
+                      <a:r>
+                        <a:rPr sz="840" b="0">
+                          <a:solidFill>
+                            <a:srgbClr val="14271D"/>
+                          </a:solidFill>
+                          <a:latin typeface="Segoe UI"/>
+                        </a:rPr>
+                        <a:t>23,489</a:t>
+                      </a:r>
+                    </a:p>
+                  </a:txBody>
+                  <a:tcPr anchor="ctr" marL="54864" marR="54864" marT="9144" marB="9144">
+                    <a:lnL w="9525" cap="flat">
+                      <a:solidFill>
+                        <a:srgbClr val="EAF1ED"/>
+                      </a:solidFill>
+                    </a:lnL>
+                    <a:lnR w="9525" cap="flat">
+                      <a:solidFill>
+                        <a:srgbClr val="EAF1ED"/>
+                      </a:solidFill>
+                    </a:lnR>
+                    <a:lnT w="9525" cap="flat">
+                      <a:solidFill>
+                        <a:srgbClr val="EAF1ED"/>
+                      </a:solidFill>
+                    </a:lnT>
+                    <a:lnB w="9525" cap="flat">
+                      <a:solidFill>
+                        <a:srgbClr val="EAF1ED"/>
+                      </a:solidFill>
+                    </a:lnB>
+                    <a:solidFill>
+                      <a:srgbClr val="EAFAEF"/>
+                    </a:solidFill>
+                  </a:tcPr>
+                </a:tc>
+                <a:tc>
+                  <a:txBody>
+                    <a:bodyPr wrap="none"/>
+                    <a:lstStyle/>
+                    <a:p>
+                      <a:pPr algn="r"/>
+                      <a:r>
+                        <a:rPr sz="840" b="0">
+                          <a:solidFill>
+                            <a:srgbClr val="14271D"/>
+                          </a:solidFill>
+                          <a:latin typeface="Segoe UI"/>
+                        </a:rPr>
+                        <a:t>8,788</a:t>
+                      </a:r>
+                    </a:p>
+                  </a:txBody>
+                  <a:tcPr anchor="ctr" marL="54864" marR="54864" marT="9144" marB="9144">
+                    <a:lnL w="9525" cap="flat">
+                      <a:solidFill>
+                        <a:srgbClr val="EAF1ED"/>
+                      </a:solidFill>
+                    </a:lnL>
+                    <a:lnR w="9525" cap="flat">
+                      <a:solidFill>
+                        <a:srgbClr val="EAF1ED"/>
+                      </a:solidFill>
+                    </a:lnR>
+                    <a:lnT w="9525" cap="flat">
+                      <a:solidFill>
+                        <a:srgbClr val="EAF1ED"/>
+                      </a:solidFill>
+                    </a:lnT>
+                    <a:lnB w="9525" cap="flat">
+                      <a:solidFill>
+                        <a:srgbClr val="EAF1ED"/>
+                      </a:solidFill>
+                    </a:lnB>
+                    <a:solidFill>
+                      <a:srgbClr val="EAFAEF"/>
+                    </a:solidFill>
+                  </a:tcPr>
+                </a:tc>
+                <a:tc>
+                  <a:txBody>
+                    <a:bodyPr wrap="none"/>
+                    <a:lstStyle/>
+                    <a:p>
+                      <a:pPr algn="r"/>
+                      <a:r>
+                        <a:rPr sz="840" b="0">
+                          <a:solidFill>
+                            <a:srgbClr val="14271D"/>
+                          </a:solidFill>
+                          <a:latin typeface="Segoe UI"/>
+                        </a:rPr>
+                        <a:t>710</a:t>
+                      </a:r>
+                    </a:p>
+                  </a:txBody>
+                  <a:tcPr anchor="ctr" marL="54864" marR="54864" marT="9144" marB="9144">
+                    <a:lnL w="9525" cap="flat">
+                      <a:solidFill>
+                        <a:srgbClr val="EAF1ED"/>
+                      </a:solidFill>
+                    </a:lnL>
+                    <a:lnR w="9525" cap="flat">
+                      <a:solidFill>
+                        <a:srgbClr val="EAF1ED"/>
+                      </a:solidFill>
+                    </a:lnR>
+                    <a:lnT w="9525" cap="flat">
+                      <a:solidFill>
+                        <a:srgbClr val="EAF1ED"/>
+                      </a:solidFill>
+                    </a:lnT>
+                    <a:lnB w="9525" cap="flat">
+                      <a:solidFill>
+                        <a:srgbClr val="EAF1ED"/>
+                      </a:solidFill>
+                    </a:lnB>
+                    <a:solidFill>
+                      <a:srgbClr val="EAFAEF"/>
+                    </a:solidFill>
+                  </a:tcPr>
+                </a:tc>
+              </a:tr>
+              <a:tr h="224028">
+                <a:tc>
+                  <a:txBody>
+                    <a:bodyPr wrap="none"/>
+                    <a:lstStyle/>
+                    <a:p>
+                      <a:pPr algn="ctr"/>
+                      <a:r>
+                        <a:rPr sz="840" b="1">
+                          <a:solidFill>
+                            <a:srgbClr val="112233"/>
+                          </a:solidFill>
+                          <a:latin typeface="Segoe UI"/>
+                        </a:rPr>
+                        <a:t>B4</a:t>
+                      </a:r>
+                    </a:p>
+                  </a:txBody>
+                  <a:tcPr anchor="ctr" marL="54864" marR="54864" marT="9144" marB="9144">
+                    <a:lnL w="9525" cap="flat">
+                      <a:solidFill>
+                        <a:srgbClr val="EAF1ED"/>
+                      </a:solidFill>
+                    </a:lnL>
+                    <a:lnR w="9525" cap="flat">
+                      <a:solidFill>
+                        <a:srgbClr val="EAF1ED"/>
+                      </a:solidFill>
+                    </a:lnR>
+                    <a:lnT w="9525" cap="flat">
+                      <a:solidFill>
+                        <a:srgbClr val="EAF1ED"/>
+                      </a:solidFill>
+                    </a:lnT>
+                    <a:lnB w="9525" cap="flat">
+                      <a:solidFill>
+                        <a:srgbClr val="EAF1ED"/>
+                      </a:solidFill>
+                    </a:lnB>
+                    <a:solidFill>
+                      <a:srgbClr val="C7EAAD"/>
+                    </a:solidFill>
+                  </a:tcPr>
+                </a:tc>
+                <a:tc>
+                  <a:txBody>
+                    <a:bodyPr wrap="none"/>
+                    <a:lstStyle/>
+                    <a:p>
+                      <a:pPr algn="r"/>
+                      <a:r>
+                        <a:rPr sz="840" b="0">
+                          <a:solidFill>
+                            <a:srgbClr val="9FB0A8"/>
+                          </a:solidFill>
+                          <a:latin typeface="Segoe UI"/>
+                        </a:rPr>
+                        <a:t>35.0%</a:t>
+                      </a:r>
+                    </a:p>
+                  </a:txBody>
+                  <a:tcPr anchor="ctr" marL="54864" marR="54864" marT="9144" marB="9144">
+                    <a:lnL w="9525" cap="flat">
+                      <a:solidFill>
+                        <a:srgbClr val="EAF1ED"/>
+                      </a:solidFill>
+                    </a:lnL>
+                    <a:lnR w="9525" cap="flat">
+                      <a:solidFill>
+                        <a:srgbClr val="EAF1ED"/>
+                      </a:solidFill>
+                    </a:lnR>
+                    <a:lnT w="9525" cap="flat">
+                      <a:solidFill>
+                        <a:srgbClr val="EAF1ED"/>
+                      </a:solidFill>
+                    </a:lnT>
+                    <a:lnB w="9525" cap="flat">
+                      <a:solidFill>
+                        <a:srgbClr val="EAF1ED"/>
+                      </a:solidFill>
+                    </a:lnB>
+                    <a:solidFill>
+                      <a:srgbClr val="FFFFFF"/>
+                    </a:solidFill>
+                  </a:tcPr>
+                </a:tc>
+                <a:tc>
+                  <a:txBody>
+                    <a:bodyPr wrap="none"/>
+                    <a:lstStyle/>
+                    <a:p>
+                      <a:pPr algn="r"/>
+                      <a:r>
+                        <a:rPr sz="840" b="0">
+                          <a:solidFill>
+                            <a:srgbClr val="9FB0A8"/>
+                          </a:solidFill>
+                          <a:latin typeface="Segoe UI"/>
+                        </a:rPr>
+                        <a:t>10.1%</a:t>
+                      </a:r>
+                    </a:p>
+                  </a:txBody>
+                  <a:tcPr anchor="ctr" marL="54864" marR="54864" marT="9144" marB="9144">
+                    <a:lnL w="9525" cap="flat">
+                      <a:solidFill>
+                        <a:srgbClr val="EAF1ED"/>
+                      </a:solidFill>
+                    </a:lnL>
+                    <a:lnR w="9525" cap="flat">
+                      <a:solidFill>
+                        <a:srgbClr val="EAF1ED"/>
+                      </a:solidFill>
+                    </a:lnR>
+                    <a:lnT w="9525" cap="flat">
+                      <a:solidFill>
+                        <a:srgbClr val="EAF1ED"/>
+                      </a:solidFill>
+                    </a:lnT>
+                    <a:lnB w="9525" cap="flat">
+                      <a:solidFill>
+                        <a:srgbClr val="EAF1ED"/>
+                      </a:solidFill>
+                    </a:lnB>
+                    <a:solidFill>
+                      <a:srgbClr val="FFFFFF"/>
+                    </a:solidFill>
+                  </a:tcPr>
+                </a:tc>
+                <a:tc>
+                  <a:txBody>
+                    <a:bodyPr wrap="none"/>
+                    <a:lstStyle/>
+                    <a:p>
+                      <a:pPr algn="r"/>
+                      <a:r>
+                        <a:rPr sz="840" b="0">
+                          <a:solidFill>
+                            <a:srgbClr val="9FB0A8"/>
+                          </a:solidFill>
+                          <a:latin typeface="Segoe UI"/>
+                        </a:rPr>
+                        <a:t>104,996</a:t>
+                      </a:r>
+                    </a:p>
+                  </a:txBody>
+                  <a:tcPr anchor="ctr" marL="54864" marR="54864" marT="9144" marB="9144">
+                    <a:lnL w="9525" cap="flat">
+                      <a:solidFill>
+                        <a:srgbClr val="EAF1ED"/>
+                      </a:solidFill>
+                    </a:lnL>
+                    <a:lnR w="9525" cap="flat">
+                      <a:solidFill>
+                        <a:srgbClr val="EAF1ED"/>
+                      </a:solidFill>
+                    </a:lnR>
+                    <a:lnT w="9525" cap="flat">
+                      <a:solidFill>
+                        <a:srgbClr val="EAF1ED"/>
+                      </a:solidFill>
+                    </a:lnT>
+                    <a:lnB w="9525" cap="flat">
+                      <a:solidFill>
+                        <a:srgbClr val="EAF1ED"/>
+                      </a:solidFill>
+                    </a:lnB>
+                    <a:solidFill>
+                      <a:srgbClr val="FFFFFF"/>
+                    </a:solidFill>
+                  </a:tcPr>
+                </a:tc>
+                <a:tc>
+                  <a:txBody>
+                    <a:bodyPr wrap="none"/>
+                    <a:lstStyle/>
+                    <a:p>
+                      <a:pPr algn="r"/>
+                      <a:r>
+                        <a:rPr sz="840" b="0">
+                          <a:solidFill>
+                            <a:srgbClr val="9FB0A8"/>
+                          </a:solidFill>
+                          <a:latin typeface="Segoe UI"/>
+                        </a:rPr>
+                        <a:t>6.2%</a:t>
+                      </a:r>
+                    </a:p>
+                  </a:txBody>
+                  <a:tcPr anchor="ctr" marL="54864" marR="54864" marT="9144" marB="9144">
+                    <a:lnL w="9525" cap="flat">
+                      <a:solidFill>
+                        <a:srgbClr val="EAF1ED"/>
+                      </a:solidFill>
+                    </a:lnL>
+                    <a:lnR w="9525" cap="flat">
+                      <a:solidFill>
+                        <a:srgbClr val="EAF1ED"/>
+                      </a:solidFill>
+                    </a:lnR>
+                    <a:lnT w="9525" cap="flat">
+                      <a:solidFill>
+                        <a:srgbClr val="EAF1ED"/>
+                      </a:solidFill>
+                    </a:lnT>
+                    <a:lnB w="9525" cap="flat">
+                      <a:solidFill>
+                        <a:srgbClr val="EAF1ED"/>
+                      </a:solidFill>
+                    </a:lnB>
+                    <a:solidFill>
+                      <a:srgbClr val="FFFFFF"/>
+                    </a:solidFill>
+                  </a:tcPr>
+                </a:tc>
+                <a:tc>
+                  <a:txBody>
+                    <a:bodyPr wrap="none"/>
+                    <a:lstStyle/>
+                    <a:p>
+                      <a:pPr algn="r"/>
+                      <a:r>
+                        <a:rPr sz="840" b="0">
+                          <a:solidFill>
+                            <a:srgbClr val="9FB0A8"/>
+                          </a:solidFill>
+                          <a:latin typeface="Segoe UI"/>
+                        </a:rPr>
+                        <a:t>94,328</a:t>
+                      </a:r>
+                    </a:p>
+                  </a:txBody>
+                  <a:tcPr anchor="ctr" marL="54864" marR="54864" marT="9144" marB="9144">
+                    <a:lnL w="9525" cap="flat">
+                      <a:solidFill>
+                        <a:srgbClr val="EAF1ED"/>
+                      </a:solidFill>
+                    </a:lnL>
+                    <a:lnR w="9525" cap="flat">
+                      <a:solidFill>
+                        <a:srgbClr val="EAF1ED"/>
+                      </a:solidFill>
+                    </a:lnR>
+                    <a:lnT w="9525" cap="flat">
+                      <a:solidFill>
+                        <a:srgbClr val="EAF1ED"/>
+                      </a:solidFill>
+                    </a:lnT>
+                    <a:lnB w="9525" cap="flat">
+                      <a:solidFill>
+                        <a:srgbClr val="EAF1ED"/>
+                      </a:solidFill>
+                    </a:lnB>
+                    <a:solidFill>
+                      <a:srgbClr val="FFFFFF"/>
+                    </a:solidFill>
+                  </a:tcPr>
+                </a:tc>
+                <a:tc>
+                  <a:txBody>
+                    <a:bodyPr wrap="none"/>
+                    <a:lstStyle/>
+                    <a:p>
+                      <a:pPr algn="r"/>
+                      <a:r>
+                        <a:rPr sz="840" b="0">
+                          <a:solidFill>
+                            <a:srgbClr val="9FB0A8"/>
+                          </a:solidFill>
+                          <a:latin typeface="Segoe UI"/>
+                        </a:rPr>
+                        <a:t>7,713</a:t>
+                      </a:r>
+                    </a:p>
+                  </a:txBody>
+                  <a:tcPr anchor="ctr" marL="54864" marR="54864" marT="9144" marB="9144">
+                    <a:lnL w="9525" cap="flat">
+                      <a:solidFill>
+                        <a:srgbClr val="EAF1ED"/>
+                      </a:solidFill>
+                    </a:lnL>
+                    <a:lnR w="9525" cap="flat">
+                      <a:solidFill>
+                        <a:srgbClr val="EAF1ED"/>
+                      </a:solidFill>
+                    </a:lnR>
+                    <a:lnT w="9525" cap="flat">
+                      <a:solidFill>
+                        <a:srgbClr val="EAF1ED"/>
+                      </a:solidFill>
+                    </a:lnT>
+                    <a:lnB w="9525" cap="flat">
+                      <a:solidFill>
+                        <a:srgbClr val="EAF1ED"/>
+                      </a:solidFill>
+                    </a:lnB>
+                    <a:solidFill>
+                      <a:srgbClr val="FFFFFF"/>
+                    </a:solidFill>
+                  </a:tcPr>
+                </a:tc>
+                <a:tc>
+                  <a:txBody>
+                    <a:bodyPr wrap="none"/>
+                    <a:lstStyle/>
+                    <a:p>
+                      <a:pPr algn="r"/>
+                      <a:r>
+                        <a:rPr sz="840" b="0">
+                          <a:solidFill>
+                            <a:srgbClr val="9FB0A8"/>
+                          </a:solidFill>
+                          <a:latin typeface="Segoe UI"/>
+                        </a:rPr>
+                        <a:t>649</a:t>
+                      </a:r>
+                    </a:p>
+                  </a:txBody>
+                  <a:tcPr anchor="ctr" marL="54864" marR="54864" marT="9144" marB="9144">
+                    <a:lnL w="9525" cap="flat">
+                      <a:solidFill>
+                        <a:srgbClr val="EAF1ED"/>
+                      </a:solidFill>
+                    </a:lnL>
+                    <a:lnR w="9525" cap="flat">
+                      <a:solidFill>
+                        <a:srgbClr val="EAF1ED"/>
+                      </a:solidFill>
+                    </a:lnR>
+                    <a:lnT w="9525" cap="flat">
+                      <a:solidFill>
+                        <a:srgbClr val="EAF1ED"/>
+                      </a:solidFill>
+                    </a:lnT>
+                    <a:lnB w="9525" cap="flat">
+                      <a:solidFill>
+                        <a:srgbClr val="EAF1ED"/>
+                      </a:solidFill>
+                    </a:lnB>
+                    <a:solidFill>
+                      <a:srgbClr val="FFFFFF"/>
+                    </a:solidFill>
+                  </a:tcPr>
+                </a:tc>
+              </a:tr>
+              <a:tr h="224028">
+                <a:tc>
+                  <a:txBody>
+                    <a:bodyPr wrap="none"/>
+                    <a:lstStyle/>
+                    <a:p>
+                      <a:pPr algn="ctr"/>
+                      <a:r>
+                        <a:rPr sz="840" b="1">
+                          <a:solidFill>
+                            <a:srgbClr val="112233"/>
+                          </a:solidFill>
+                          <a:latin typeface="Segoe UI"/>
+                        </a:rPr>
+                        <a:t>B5</a:t>
+                      </a:r>
+                    </a:p>
+                  </a:txBody>
+                  <a:tcPr anchor="ctr" marL="54864" marR="54864" marT="9144" marB="9144">
+                    <a:lnL w="9525" cap="flat">
+                      <a:solidFill>
+                        <a:srgbClr val="EAF1ED"/>
+                      </a:solidFill>
+                    </a:lnL>
+                    <a:lnR w="9525" cap="flat">
+                      <a:solidFill>
+                        <a:srgbClr val="EAF1ED"/>
+                      </a:solidFill>
+                    </a:lnR>
+                    <a:lnT w="9525" cap="flat">
+                      <a:solidFill>
+                        <a:srgbClr val="EAF1ED"/>
+                      </a:solidFill>
+                    </a:lnT>
+                    <a:lnB w="9525" cap="flat">
+                      <a:solidFill>
+                        <a:srgbClr val="EAF1ED"/>
+                      </a:solidFill>
+                    </a:lnB>
+                    <a:solidFill>
+                      <a:srgbClr val="D3EAAD"/>
+                    </a:solidFill>
+                  </a:tcPr>
+                </a:tc>
+                <a:tc>
+                  <a:txBody>
+                    <a:bodyPr wrap="none"/>
+                    <a:lstStyle/>
+                    <a:p>
+                      <a:pPr algn="r"/>
+                      <a:r>
+                        <a:rPr sz="840" b="0">
+                          <a:solidFill>
+                            <a:srgbClr val="9FB0A8"/>
+                          </a:solidFill>
+                          <a:latin typeface="Segoe UI"/>
+                        </a:rPr>
+                        <a:t>35.2%</a:t>
+                      </a:r>
+                    </a:p>
+                  </a:txBody>
+                  <a:tcPr anchor="ctr" marL="54864" marR="54864" marT="9144" marB="9144">
+                    <a:lnL w="9525" cap="flat">
+                      <a:solidFill>
+                        <a:srgbClr val="EAF1ED"/>
+                      </a:solidFill>
+                    </a:lnL>
+                    <a:lnR w="9525" cap="flat">
+                      <a:solidFill>
+                        <a:srgbClr val="EAF1ED"/>
+                      </a:solidFill>
+                    </a:lnR>
+                    <a:lnT w="9525" cap="flat">
+                      <a:solidFill>
+                        <a:srgbClr val="EAF1ED"/>
+                      </a:solidFill>
+                    </a:lnT>
+                    <a:lnB w="9525" cap="flat">
+                      <a:solidFill>
+                        <a:srgbClr val="EAF1ED"/>
+                      </a:solidFill>
+                    </a:lnB>
+                    <a:solidFill>
+                      <a:srgbClr val="FFFFFF"/>
+                    </a:solidFill>
+                  </a:tcPr>
+                </a:tc>
+                <a:tc>
+                  <a:txBody>
+                    <a:bodyPr wrap="none"/>
+                    <a:lstStyle/>
+                    <a:p>
+                      <a:pPr algn="r"/>
+                      <a:r>
+                        <a:rPr sz="840" b="0">
+                          <a:solidFill>
+                            <a:srgbClr val="9FB0A8"/>
+                          </a:solidFill>
+                          <a:latin typeface="Segoe UI"/>
+                        </a:rPr>
+                        <a:t>9.4%</a:t>
+                      </a:r>
+                    </a:p>
+                  </a:txBody>
+                  <a:tcPr anchor="ctr" marL="54864" marR="54864" marT="9144" marB="9144">
+                    <a:lnL w="9525" cap="flat">
+                      <a:solidFill>
+                        <a:srgbClr val="EAF1ED"/>
+                      </a:solidFill>
+                    </a:lnL>
+                    <a:lnR w="9525" cap="flat">
+                      <a:solidFill>
+                        <a:srgbClr val="EAF1ED"/>
+                      </a:solidFill>
+                    </a:lnR>
+                    <a:lnT w="9525" cap="flat">
+                      <a:solidFill>
+                        <a:srgbClr val="EAF1ED"/>
+                      </a:solidFill>
+                    </a:lnT>
+                    <a:lnB w="9525" cap="flat">
+                      <a:solidFill>
+                        <a:srgbClr val="EAF1ED"/>
+                      </a:solidFill>
+                    </a:lnB>
+                    <a:solidFill>
+                      <a:srgbClr val="FFFFFF"/>
+                    </a:solidFill>
+                  </a:tcPr>
+                </a:tc>
+                <a:tc>
+                  <a:txBody>
+                    <a:bodyPr wrap="none"/>
+                    <a:lstStyle/>
+                    <a:p>
+                      <a:pPr algn="r"/>
+                      <a:r>
+                        <a:rPr sz="840" b="0">
+                          <a:solidFill>
+                            <a:srgbClr val="9FB0A8"/>
+                          </a:solidFill>
+                          <a:latin typeface="Segoe UI"/>
+                        </a:rPr>
+                        <a:t>187,958</a:t>
+                      </a:r>
+                    </a:p>
+                  </a:txBody>
+                  <a:tcPr anchor="ctr" marL="54864" marR="54864" marT="9144" marB="9144">
+                    <a:lnL w="9525" cap="flat">
+                      <a:solidFill>
+                        <a:srgbClr val="EAF1ED"/>
+                      </a:solidFill>
+                    </a:lnL>
+                    <a:lnR w="9525" cap="flat">
+                      <a:solidFill>
+                        <a:srgbClr val="EAF1ED"/>
+                      </a:solidFill>
+                    </a:lnR>
+                    <a:lnT w="9525" cap="flat">
+                      <a:solidFill>
+                        <a:srgbClr val="EAF1ED"/>
+                      </a:solidFill>
+                    </a:lnT>
+                    <a:lnB w="9525" cap="flat">
+                      <a:solidFill>
+                        <a:srgbClr val="EAF1ED"/>
+                      </a:solidFill>
+                    </a:lnB>
+                    <a:solidFill>
+                      <a:srgbClr val="FFFFFF"/>
+                    </a:solidFill>
+                  </a:tcPr>
+                </a:tc>
+                <a:tc>
+                  <a:txBody>
+                    <a:bodyPr wrap="none"/>
+                    <a:lstStyle/>
+                    <a:p>
+                      <a:pPr algn="r"/>
+                      <a:r>
+                        <a:rPr sz="840" b="0">
+                          <a:solidFill>
+                            <a:srgbClr val="9FB0A8"/>
+                          </a:solidFill>
+                          <a:latin typeface="Segoe UI"/>
+                        </a:rPr>
+                        <a:t>11.1%</a:t>
+                      </a:r>
+                    </a:p>
+                  </a:txBody>
+                  <a:tcPr anchor="ctr" marL="54864" marR="54864" marT="9144" marB="9144">
+                    <a:lnL w="9525" cap="flat">
+                      <a:solidFill>
+                        <a:srgbClr val="EAF1ED"/>
+                      </a:solidFill>
+                    </a:lnL>
+                    <a:lnR w="9525" cap="flat">
+                      <a:solidFill>
+                        <a:srgbClr val="EAF1ED"/>
+                      </a:solidFill>
+                    </a:lnR>
+                    <a:lnT w="9525" cap="flat">
+                      <a:solidFill>
+                        <a:srgbClr val="EAF1ED"/>
+                      </a:solidFill>
+                    </a:lnT>
+                    <a:lnB w="9525" cap="flat">
+                      <a:solidFill>
+                        <a:srgbClr val="EAF1ED"/>
+                      </a:solidFill>
+                    </a:lnB>
+                    <a:solidFill>
+                      <a:srgbClr val="FFFFFF"/>
+                    </a:solidFill>
+                  </a:tcPr>
+                </a:tc>
+                <a:tc>
+                  <a:txBody>
+                    <a:bodyPr wrap="none"/>
+                    <a:lstStyle/>
+                    <a:p>
+                      <a:pPr algn="r"/>
+                      <a:r>
+                        <a:rPr sz="840" b="0">
+                          <a:solidFill>
+                            <a:srgbClr val="9FB0A8"/>
+                          </a:solidFill>
+                          <a:latin typeface="Segoe UI"/>
+                        </a:rPr>
+                        <a:t>176,976</a:t>
+                      </a:r>
+                    </a:p>
+                  </a:txBody>
+                  <a:tcPr anchor="ctr" marL="54864" marR="54864" marT="9144" marB="9144">
+                    <a:lnL w="9525" cap="flat">
+                      <a:solidFill>
+                        <a:srgbClr val="EAF1ED"/>
+                      </a:solidFill>
+                    </a:lnL>
+                    <a:lnR w="9525" cap="flat">
+                      <a:solidFill>
+                        <a:srgbClr val="EAF1ED"/>
+                      </a:solidFill>
+                    </a:lnR>
+                    <a:lnT w="9525" cap="flat">
+                      <a:solidFill>
+                        <a:srgbClr val="EAF1ED"/>
+                      </a:solidFill>
+                    </a:lnT>
+                    <a:lnB w="9525" cap="flat">
+                      <a:solidFill>
+                        <a:srgbClr val="EAF1ED"/>
+                      </a:solidFill>
+                    </a:lnB>
+                    <a:solidFill>
+                      <a:srgbClr val="FFFFFF"/>
+                    </a:solidFill>
+                  </a:tcPr>
+                </a:tc>
+                <a:tc>
+                  <a:txBody>
+                    <a:bodyPr wrap="none"/>
+                    <a:lstStyle/>
+                    <a:p>
+                      <a:pPr algn="r"/>
+                      <a:r>
+                        <a:rPr sz="840" b="0">
+                          <a:solidFill>
+                            <a:srgbClr val="9FB0A8"/>
+                          </a:solidFill>
+                          <a:latin typeface="Segoe UI"/>
+                        </a:rPr>
+                        <a:t>6,726</a:t>
+                      </a:r>
+                    </a:p>
+                  </a:txBody>
+                  <a:tcPr anchor="ctr" marL="54864" marR="54864" marT="9144" marB="9144">
+                    <a:lnL w="9525" cap="flat">
+                      <a:solidFill>
+                        <a:srgbClr val="EAF1ED"/>
+                      </a:solidFill>
+                    </a:lnL>
+                    <a:lnR w="9525" cap="flat">
+                      <a:solidFill>
+                        <a:srgbClr val="EAF1ED"/>
+                      </a:solidFill>
+                    </a:lnR>
+                    <a:lnT w="9525" cap="flat">
+                      <a:solidFill>
+                        <a:srgbClr val="EAF1ED"/>
+                      </a:solidFill>
+                    </a:lnT>
+                    <a:lnB w="9525" cap="flat">
+                      <a:solidFill>
+                        <a:srgbClr val="EAF1ED"/>
+                      </a:solidFill>
+                    </a:lnB>
+                    <a:solidFill>
+                      <a:srgbClr val="FFFFFF"/>
+                    </a:solidFill>
+                  </a:tcPr>
+                </a:tc>
+                <a:tc>
+                  <a:txBody>
+                    <a:bodyPr wrap="none"/>
+                    <a:lstStyle/>
+                    <a:p>
+                      <a:pPr algn="r"/>
+                      <a:r>
+                        <a:rPr sz="840" b="0">
+                          <a:solidFill>
+                            <a:srgbClr val="9FB0A8"/>
+                          </a:solidFill>
+                          <a:latin typeface="Segoe UI"/>
+                        </a:rPr>
+                        <a:t>647</a:t>
+                      </a:r>
+                    </a:p>
+                  </a:txBody>
+                  <a:tcPr anchor="ctr" marL="54864" marR="54864" marT="9144" marB="9144">
+                    <a:lnL w="9525" cap="flat">
+                      <a:solidFill>
+                        <a:srgbClr val="EAF1ED"/>
+                      </a:solidFill>
+                    </a:lnL>
+                    <a:lnR w="9525" cap="flat">
+                      <a:solidFill>
+                        <a:srgbClr val="EAF1ED"/>
+                      </a:solidFill>
+                    </a:lnR>
+                    <a:lnT w="9525" cap="flat">
+                      <a:solidFill>
+                        <a:srgbClr val="EAF1ED"/>
+                      </a:solidFill>
+                    </a:lnT>
+                    <a:lnB w="9525" cap="flat">
+                      <a:solidFill>
+                        <a:srgbClr val="EAF1ED"/>
+                      </a:solidFill>
+                    </a:lnB>
+                    <a:solidFill>
+                      <a:srgbClr val="FFFFFF"/>
+                    </a:solidFill>
+                  </a:tcPr>
+                </a:tc>
+              </a:tr>
+              <a:tr h="224028">
+                <a:tc>
+                  <a:txBody>
+                    <a:bodyPr wrap="none"/>
+                    <a:lstStyle/>
+                    <a:p>
+                      <a:pPr algn="ctr"/>
+                      <a:r>
+                        <a:rPr sz="840" b="1">
+                          <a:solidFill>
+                            <a:srgbClr val="112233"/>
+                          </a:solidFill>
+                          <a:latin typeface="Segoe UI"/>
+                        </a:rPr>
+                        <a:t>B6</a:t>
+                      </a:r>
+                    </a:p>
+                  </a:txBody>
+                  <a:tcPr anchor="ctr" marL="54864" marR="54864" marT="9144" marB="9144">
+                    <a:lnL w="9525" cap="flat">
+                      <a:solidFill>
+                        <a:srgbClr val="EAF1ED"/>
+                      </a:solidFill>
+                    </a:lnL>
+                    <a:lnR w="9525" cap="flat">
+                      <a:solidFill>
+                        <a:srgbClr val="EAF1ED"/>
+                      </a:solidFill>
+                    </a:lnR>
+                    <a:lnT w="9525" cap="flat">
+                      <a:solidFill>
+                        <a:srgbClr val="EAF1ED"/>
+                      </a:solidFill>
+                    </a:lnT>
+                    <a:lnB w="9525" cap="flat">
+                      <a:solidFill>
+                        <a:srgbClr val="EAF1ED"/>
+                      </a:solidFill>
+                    </a:lnB>
+                    <a:solidFill>
+                      <a:srgbClr val="DFEAAD"/>
+                    </a:solidFill>
+                  </a:tcPr>
+                </a:tc>
+                <a:tc>
+                  <a:txBody>
+                    <a:bodyPr wrap="none"/>
+                    <a:lstStyle/>
+                    <a:p>
+                      <a:pPr algn="r"/>
+                      <a:r>
+                        <a:rPr sz="840" b="0">
+                          <a:solidFill>
+                            <a:srgbClr val="9FB0A8"/>
+                          </a:solidFill>
+                          <a:latin typeface="Segoe UI"/>
+                        </a:rPr>
+                        <a:t>39.6%</a:t>
+                      </a:r>
+                    </a:p>
+                  </a:txBody>
+                  <a:tcPr anchor="ctr" marL="54864" marR="54864" marT="9144" marB="9144">
+                    <a:lnL w="9525" cap="flat">
+                      <a:solidFill>
+                        <a:srgbClr val="EAF1ED"/>
+                      </a:solidFill>
+                    </a:lnL>
+                    <a:lnR w="9525" cap="flat">
+                      <a:solidFill>
+                        <a:srgbClr val="EAF1ED"/>
+                      </a:solidFill>
+                    </a:lnR>
+                    <a:lnT w="9525" cap="flat">
+                      <a:solidFill>
+                        <a:srgbClr val="EAF1ED"/>
+                      </a:solidFill>
+                    </a:lnT>
+                    <a:lnB w="9525" cap="flat">
+                      <a:solidFill>
+                        <a:srgbClr val="EAF1ED"/>
+                      </a:solidFill>
+                    </a:lnB>
+                    <a:solidFill>
+                      <a:srgbClr val="FFFFFF"/>
+                    </a:solidFill>
+                  </a:tcPr>
+                </a:tc>
+                <a:tc>
+                  <a:txBody>
+                    <a:bodyPr wrap="none"/>
+                    <a:lstStyle/>
+                    <a:p>
+                      <a:pPr algn="r"/>
+                      <a:r>
+                        <a:rPr sz="840" b="0">
+                          <a:solidFill>
+                            <a:srgbClr val="9FB0A8"/>
+                          </a:solidFill>
+                          <a:latin typeface="Segoe UI"/>
+                        </a:rPr>
+                        <a:t>13.4%</a:t>
+                      </a:r>
+                    </a:p>
+                  </a:txBody>
+                  <a:tcPr anchor="ctr" marL="54864" marR="54864" marT="9144" marB="9144">
+                    <a:lnL w="9525" cap="flat">
+                      <a:solidFill>
+                        <a:srgbClr val="EAF1ED"/>
+                      </a:solidFill>
+                    </a:lnL>
+                    <a:lnR w="9525" cap="flat">
+                      <a:solidFill>
+                        <a:srgbClr val="EAF1ED"/>
+                      </a:solidFill>
+                    </a:lnR>
+                    <a:lnT w="9525" cap="flat">
+                      <a:solidFill>
+                        <a:srgbClr val="EAF1ED"/>
+                      </a:solidFill>
+                    </a:lnT>
+                    <a:lnB w="9525" cap="flat">
+                      <a:solidFill>
+                        <a:srgbClr val="EAF1ED"/>
+                      </a:solidFill>
+                    </a:lnB>
+                    <a:solidFill>
+                      <a:srgbClr val="FFFFFF"/>
+                    </a:solidFill>
+                  </a:tcPr>
+                </a:tc>
+                <a:tc>
+                  <a:txBody>
+                    <a:bodyPr wrap="none"/>
+                    <a:lstStyle/>
+                    <a:p>
+                      <a:pPr algn="r"/>
+                      <a:r>
+                        <a:rPr sz="840" b="0">
+                          <a:solidFill>
+                            <a:srgbClr val="9FB0A8"/>
+                          </a:solidFill>
+                          <a:latin typeface="Segoe UI"/>
+                        </a:rPr>
+                        <a:t>114,041</a:t>
+                      </a:r>
+                    </a:p>
+                  </a:txBody>
+                  <a:tcPr anchor="ctr" marL="54864" marR="54864" marT="9144" marB="9144">
+                    <a:lnL w="9525" cap="flat">
+                      <a:solidFill>
+                        <a:srgbClr val="EAF1ED"/>
+                      </a:solidFill>
+                    </a:lnL>
+                    <a:lnR w="9525" cap="flat">
+                      <a:solidFill>
+                        <a:srgbClr val="EAF1ED"/>
+                      </a:solidFill>
+                    </a:lnR>
+                    <a:lnT w="9525" cap="flat">
+                      <a:solidFill>
+                        <a:srgbClr val="EAF1ED"/>
+                      </a:solidFill>
+                    </a:lnT>
+                    <a:lnB w="9525" cap="flat">
+                      <a:solidFill>
+                        <a:srgbClr val="EAF1ED"/>
+                      </a:solidFill>
+                    </a:lnB>
+                    <a:solidFill>
+                      <a:srgbClr val="FFFFFF"/>
+                    </a:solidFill>
+                  </a:tcPr>
+                </a:tc>
+                <a:tc>
+                  <a:txBody>
+                    <a:bodyPr wrap="none"/>
+                    <a:lstStyle/>
+                    <a:p>
+                      <a:pPr algn="r"/>
+                      <a:r>
+                        <a:rPr sz="840" b="0">
+                          <a:solidFill>
+                            <a:srgbClr val="9FB0A8"/>
+                          </a:solidFill>
+                          <a:latin typeface="Segoe UI"/>
+                        </a:rPr>
+                        <a:t>6.7%</a:t>
+                      </a:r>
+                    </a:p>
+                  </a:txBody>
+                  <a:tcPr anchor="ctr" marL="54864" marR="54864" marT="9144" marB="9144">
+                    <a:lnL w="9525" cap="flat">
+                      <a:solidFill>
+                        <a:srgbClr val="EAF1ED"/>
+                      </a:solidFill>
+                    </a:lnL>
+                    <a:lnR w="9525" cap="flat">
+                      <a:solidFill>
+                        <a:srgbClr val="EAF1ED"/>
+                      </a:solidFill>
+                    </a:lnR>
+                    <a:lnT w="9525" cap="flat">
+                      <a:solidFill>
+                        <a:srgbClr val="EAF1ED"/>
+                      </a:solidFill>
+                    </a:lnT>
+                    <a:lnB w="9525" cap="flat">
+                      <a:solidFill>
+                        <a:srgbClr val="EAF1ED"/>
+                      </a:solidFill>
+                    </a:lnB>
+                    <a:solidFill>
+                      <a:srgbClr val="FFFFFF"/>
+                    </a:solidFill>
+                  </a:tcPr>
+                </a:tc>
+                <a:tc>
+                  <a:txBody>
+                    <a:bodyPr wrap="none"/>
+                    <a:lstStyle/>
+                    <a:p>
+                      <a:pPr algn="r"/>
+                      <a:r>
+                        <a:rPr sz="840" b="0">
+                          <a:solidFill>
+                            <a:srgbClr val="9FB0A8"/>
+                          </a:solidFill>
+                          <a:latin typeface="Segoe UI"/>
+                        </a:rPr>
+                        <a:t>110,243</a:t>
+                      </a:r>
+                    </a:p>
+                  </a:txBody>
+                  <a:tcPr anchor="ctr" marL="54864" marR="54864" marT="9144" marB="9144">
+                    <a:lnL w="9525" cap="flat">
+                      <a:solidFill>
+                        <a:srgbClr val="EAF1ED"/>
+                      </a:solidFill>
+                    </a:lnL>
+                    <a:lnR w="9525" cap="flat">
+                      <a:solidFill>
+                        <a:srgbClr val="EAF1ED"/>
+                      </a:solidFill>
+                    </a:lnR>
+                    <a:lnT w="9525" cap="flat">
+                      <a:solidFill>
+                        <a:srgbClr val="EAF1ED"/>
+                      </a:solidFill>
+                    </a:lnT>
+                    <a:lnB w="9525" cap="flat">
+                      <a:solidFill>
+                        <a:srgbClr val="EAF1ED"/>
+                      </a:solidFill>
+                    </a:lnB>
+                    <a:solidFill>
+                      <a:srgbClr val="FFFFFF"/>
+                    </a:solidFill>
+                  </a:tcPr>
+                </a:tc>
+                <a:tc>
+                  <a:txBody>
+                    <a:bodyPr wrap="none"/>
+                    <a:lstStyle/>
+                    <a:p>
+                      <a:pPr algn="r"/>
+                      <a:r>
+                        <a:rPr sz="840" b="0">
+                          <a:solidFill>
+                            <a:srgbClr val="9FB0A8"/>
+                          </a:solidFill>
+                          <a:latin typeface="Segoe UI"/>
+                        </a:rPr>
+                        <a:t>5,248</a:t>
+                      </a:r>
+                    </a:p>
+                  </a:txBody>
+                  <a:tcPr anchor="ctr" marL="54864" marR="54864" marT="9144" marB="9144">
+                    <a:lnL w="9525" cap="flat">
+                      <a:solidFill>
+                        <a:srgbClr val="EAF1ED"/>
+                      </a:solidFill>
+                    </a:lnL>
+                    <a:lnR w="9525" cap="flat">
+                      <a:solidFill>
+                        <a:srgbClr val="EAF1ED"/>
+                      </a:solidFill>
+                    </a:lnR>
+                    <a:lnT w="9525" cap="flat">
+                      <a:solidFill>
+                        <a:srgbClr val="EAF1ED"/>
+                      </a:solidFill>
+                    </a:lnT>
+                    <a:lnB w="9525" cap="flat">
+                      <a:solidFill>
+                        <a:srgbClr val="EAF1ED"/>
+                      </a:solidFill>
+                    </a:lnB>
+                    <a:solidFill>
+                      <a:srgbClr val="FFFFFF"/>
+                    </a:solidFill>
+                  </a:tcPr>
+                </a:tc>
+                <a:tc>
+                  <a:txBody>
+                    <a:bodyPr wrap="none"/>
+                    <a:lstStyle/>
+                    <a:p>
+                      <a:pPr algn="r"/>
+                      <a:r>
+                        <a:rPr sz="840" b="0">
+                          <a:solidFill>
+                            <a:srgbClr val="9FB0A8"/>
+                          </a:solidFill>
+                          <a:latin typeface="Segoe UI"/>
+                        </a:rPr>
+                        <a:t>603</a:t>
+                      </a:r>
+                    </a:p>
+                  </a:txBody>
+                  <a:tcPr anchor="ctr" marL="54864" marR="54864" marT="9144" marB="9144">
+                    <a:lnL w="9525" cap="flat">
+                      <a:solidFill>
+                        <a:srgbClr val="EAF1ED"/>
+                      </a:solidFill>
+                    </a:lnL>
+                    <a:lnR w="9525" cap="flat">
+                      <a:solidFill>
+                        <a:srgbClr val="EAF1ED"/>
+                      </a:solidFill>
+                    </a:lnR>
+                    <a:lnT w="9525" cap="flat">
+                      <a:solidFill>
+                        <a:srgbClr val="EAF1ED"/>
+                      </a:solidFill>
+                    </a:lnT>
+                    <a:lnB w="9525" cap="flat">
+                      <a:solidFill>
+                        <a:srgbClr val="EAF1ED"/>
+                      </a:solidFill>
+                    </a:lnB>
+                    <a:solidFill>
+                      <a:srgbClr val="FFFFFF"/>
+                    </a:solidFill>
+                  </a:tcPr>
+                </a:tc>
+              </a:tr>
+              <a:tr h="224028">
+                <a:tc>
+                  <a:txBody>
+                    <a:bodyPr wrap="none"/>
+                    <a:lstStyle/>
+                    <a:p>
+                      <a:pPr algn="ctr"/>
+                      <a:r>
+                        <a:rPr sz="840" b="1">
+                          <a:solidFill>
+                            <a:srgbClr val="112233"/>
+                          </a:solidFill>
+                          <a:latin typeface="Segoe UI"/>
+                        </a:rPr>
+                        <a:t>B7</a:t>
+                      </a:r>
+                    </a:p>
+                  </a:txBody>
+                  <a:tcPr anchor="ctr" marL="54864" marR="54864" marT="9144" marB="9144">
+                    <a:lnL w="9525" cap="flat">
+                      <a:solidFill>
+                        <a:srgbClr val="EAF1ED"/>
+                      </a:solidFill>
+                    </a:lnL>
+                    <a:lnR w="9525" cap="flat">
+                      <a:solidFill>
+                        <a:srgbClr val="EAF1ED"/>
+                      </a:solidFill>
+                    </a:lnR>
+                    <a:lnT w="9525" cap="flat">
+                      <a:solidFill>
+                        <a:srgbClr val="EAF1ED"/>
+                      </a:solidFill>
+                    </a:lnT>
+                    <a:lnB w="9525" cap="flat">
+                      <a:solidFill>
+                        <a:srgbClr val="EAF1ED"/>
+                      </a:solidFill>
+                    </a:lnB>
+                    <a:solidFill>
+                      <a:srgbClr val="EAE9AD"/>
+                    </a:solidFill>
+                  </a:tcPr>
+                </a:tc>
+                <a:tc>
+                  <a:txBody>
+                    <a:bodyPr wrap="none"/>
+                    <a:lstStyle/>
+                    <a:p>
+                      <a:pPr algn="r"/>
+                      <a:r>
+                        <a:rPr sz="840" b="0">
+                          <a:solidFill>
+                            <a:srgbClr val="9FB0A8"/>
+                          </a:solidFill>
+                          <a:latin typeface="Segoe UI"/>
+                        </a:rPr>
+                        <a:t>39.8%</a:t>
+                      </a:r>
+                    </a:p>
+                  </a:txBody>
+                  <a:tcPr anchor="ctr" marL="54864" marR="54864" marT="9144" marB="9144">
+                    <a:lnL w="9525" cap="flat">
+                      <a:solidFill>
+                        <a:srgbClr val="EAF1ED"/>
+                      </a:solidFill>
+                    </a:lnL>
+                    <a:lnR w="9525" cap="flat">
+                      <a:solidFill>
+                        <a:srgbClr val="EAF1ED"/>
+                      </a:solidFill>
+                    </a:lnR>
+                    <a:lnT w="9525" cap="flat">
+                      <a:solidFill>
+                        <a:srgbClr val="EAF1ED"/>
+                      </a:solidFill>
+                    </a:lnT>
+                    <a:lnB w="9525" cap="flat">
+                      <a:solidFill>
+                        <a:srgbClr val="EAF1ED"/>
+                      </a:solidFill>
+                    </a:lnB>
+                    <a:solidFill>
+                      <a:srgbClr val="FFFFFF"/>
+                    </a:solidFill>
+                  </a:tcPr>
+                </a:tc>
+                <a:tc>
+                  <a:txBody>
+                    <a:bodyPr wrap="none"/>
+                    <a:lstStyle/>
+                    <a:p>
+                      <a:pPr algn="r"/>
+                      <a:r>
+                        <a:rPr sz="840" b="0">
+                          <a:solidFill>
+                            <a:srgbClr val="9FB0A8"/>
+                          </a:solidFill>
+                          <a:latin typeface="Segoe UI"/>
+                        </a:rPr>
+                        <a:t>13.5%</a:t>
+                      </a:r>
+                    </a:p>
+                  </a:txBody>
+                  <a:tcPr anchor="ctr" marL="54864" marR="54864" marT="9144" marB="9144">
+                    <a:lnL w="9525" cap="flat">
+                      <a:solidFill>
+                        <a:srgbClr val="EAF1ED"/>
+                      </a:solidFill>
+                    </a:lnL>
+                    <a:lnR w="9525" cap="flat">
+                      <a:solidFill>
+                        <a:srgbClr val="EAF1ED"/>
+                      </a:solidFill>
+                    </a:lnR>
+                    <a:lnT w="9525" cap="flat">
+                      <a:solidFill>
+                        <a:srgbClr val="EAF1ED"/>
+                      </a:solidFill>
+                    </a:lnT>
+                    <a:lnB w="9525" cap="flat">
+                      <a:solidFill>
+                        <a:srgbClr val="EAF1ED"/>
+                      </a:solidFill>
+                    </a:lnB>
+                    <a:solidFill>
+                      <a:srgbClr val="FFFFFF"/>
+                    </a:solidFill>
+                  </a:tcPr>
+                </a:tc>
+                <a:tc>
+                  <a:txBody>
+                    <a:bodyPr wrap="none"/>
+                    <a:lstStyle/>
+                    <a:p>
+                      <a:pPr algn="r"/>
+                      <a:r>
+                        <a:rPr sz="840" b="0">
+                          <a:solidFill>
+                            <a:srgbClr val="9FB0A8"/>
+                          </a:solidFill>
+                          <a:latin typeface="Segoe UI"/>
+                        </a:rPr>
+                        <a:t>289,713</a:t>
+                      </a:r>
+                    </a:p>
+                  </a:txBody>
+                  <a:tcPr anchor="ctr" marL="54864" marR="54864" marT="9144" marB="9144">
+                    <a:lnL w="9525" cap="flat">
+                      <a:solidFill>
+                        <a:srgbClr val="EAF1ED"/>
+                      </a:solidFill>
+                    </a:lnL>
+                    <a:lnR w="9525" cap="flat">
+                      <a:solidFill>
+                        <a:srgbClr val="EAF1ED"/>
+                      </a:solidFill>
+                    </a:lnR>
+                    <a:lnT w="9525" cap="flat">
+                      <a:solidFill>
+                        <a:srgbClr val="EAF1ED"/>
+                      </a:solidFill>
+                    </a:lnT>
+                    <a:lnB w="9525" cap="flat">
+                      <a:solidFill>
+                        <a:srgbClr val="EAF1ED"/>
+                      </a:solidFill>
+                    </a:lnB>
+                    <a:solidFill>
+                      <a:srgbClr val="FFFFFF"/>
+                    </a:solidFill>
+                  </a:tcPr>
+                </a:tc>
+                <a:tc>
+                  <a:txBody>
+                    <a:bodyPr wrap="none"/>
+                    <a:lstStyle/>
+                    <a:p>
+                      <a:pPr algn="r"/>
+                      <a:r>
+                        <a:rPr sz="840" b="0">
+                          <a:solidFill>
+                            <a:srgbClr val="9FB0A8"/>
+                          </a:solidFill>
+                          <a:latin typeface="Segoe UI"/>
+                        </a:rPr>
+                        <a:t>17.1%</a:t>
+                      </a:r>
+                    </a:p>
+                  </a:txBody>
+                  <a:tcPr anchor="ctr" marL="54864" marR="54864" marT="9144" marB="9144">
+                    <a:lnL w="9525" cap="flat">
+                      <a:solidFill>
+                        <a:srgbClr val="EAF1ED"/>
+                      </a:solidFill>
+                    </a:lnL>
+                    <a:lnR w="9525" cap="flat">
+                      <a:solidFill>
+                        <a:srgbClr val="EAF1ED"/>
+                      </a:solidFill>
+                    </a:lnR>
+                    <a:lnT w="9525" cap="flat">
+                      <a:solidFill>
+                        <a:srgbClr val="EAF1ED"/>
+                      </a:solidFill>
+                    </a:lnT>
+                    <a:lnB w="9525" cap="flat">
+                      <a:solidFill>
+                        <a:srgbClr val="EAF1ED"/>
+                      </a:solidFill>
+                    </a:lnB>
+                    <a:solidFill>
+                      <a:srgbClr val="FFFFFF"/>
+                    </a:solidFill>
+                  </a:tcPr>
+                </a:tc>
+                <a:tc>
+                  <a:txBody>
+                    <a:bodyPr wrap="none"/>
+                    <a:lstStyle/>
+                    <a:p>
+                      <a:pPr algn="r"/>
+                      <a:r>
+                        <a:rPr sz="840" b="0">
+                          <a:solidFill>
+                            <a:srgbClr val="9FB0A8"/>
+                          </a:solidFill>
+                          <a:latin typeface="Segoe UI"/>
+                        </a:rPr>
+                        <a:t>284,907</a:t>
+                      </a:r>
+                    </a:p>
+                  </a:txBody>
+                  <a:tcPr anchor="ctr" marL="54864" marR="54864" marT="9144" marB="9144">
+                    <a:lnL w="9525" cap="flat">
+                      <a:solidFill>
+                        <a:srgbClr val="EAF1ED"/>
+                      </a:solidFill>
+                    </a:lnL>
+                    <a:lnR w="9525" cap="flat">
+                      <a:solidFill>
+                        <a:srgbClr val="EAF1ED"/>
+                      </a:solidFill>
+                    </a:lnR>
+                    <a:lnT w="9525" cap="flat">
+                      <a:solidFill>
+                        <a:srgbClr val="EAF1ED"/>
+                      </a:solidFill>
+                    </a:lnT>
+                    <a:lnB w="9525" cap="flat">
+                      <a:solidFill>
+                        <a:srgbClr val="EAF1ED"/>
+                      </a:solidFill>
+                    </a:lnB>
+                    <a:solidFill>
+                      <a:srgbClr val="FFFFFF"/>
+                    </a:solidFill>
+                  </a:tcPr>
+                </a:tc>
+                <a:tc>
+                  <a:txBody>
+                    <a:bodyPr wrap="none"/>
+                    <a:lstStyle/>
+                    <a:p>
+                      <a:pPr algn="r"/>
+                      <a:r>
+                        <a:rPr sz="840" b="0">
+                          <a:solidFill>
+                            <a:srgbClr val="9FB0A8"/>
+                          </a:solidFill>
+                          <a:latin typeface="Segoe UI"/>
+                        </a:rPr>
+                        <a:t>4,731</a:t>
+                      </a:r>
+                    </a:p>
+                  </a:txBody>
+                  <a:tcPr anchor="ctr" marL="54864" marR="54864" marT="9144" marB="9144">
+                    <a:lnL w="9525" cap="flat">
+                      <a:solidFill>
+                        <a:srgbClr val="EAF1ED"/>
+                      </a:solidFill>
+                    </a:lnL>
+                    <a:lnR w="9525" cap="flat">
+                      <a:solidFill>
+                        <a:srgbClr val="EAF1ED"/>
+                      </a:solidFill>
+                    </a:lnR>
+                    <a:lnT w="9525" cap="flat">
+                      <a:solidFill>
+                        <a:srgbClr val="EAF1ED"/>
+                      </a:solidFill>
+                    </a:lnT>
+                    <a:lnB w="9525" cap="flat">
+                      <a:solidFill>
+                        <a:srgbClr val="EAF1ED"/>
+                      </a:solidFill>
+                    </a:lnB>
+                    <a:solidFill>
+                      <a:srgbClr val="FFFFFF"/>
+                    </a:solidFill>
+                  </a:tcPr>
+                </a:tc>
+                <a:tc>
+                  <a:txBody>
+                    <a:bodyPr wrap="none"/>
+                    <a:lstStyle/>
+                    <a:p>
+                      <a:pPr algn="r"/>
+                      <a:r>
+                        <a:rPr sz="840" b="0">
+                          <a:solidFill>
+                            <a:srgbClr val="9FB0A8"/>
+                          </a:solidFill>
+                          <a:latin typeface="Segoe UI"/>
+                        </a:rPr>
+                        <a:t>602</a:t>
+                      </a:r>
+                    </a:p>
+                  </a:txBody>
+                  <a:tcPr anchor="ctr" marL="54864" marR="54864" marT="9144" marB="9144">
+                    <a:lnL w="9525" cap="flat">
+                      <a:solidFill>
+                        <a:srgbClr val="EAF1ED"/>
+                      </a:solidFill>
+                    </a:lnL>
+                    <a:lnR w="9525" cap="flat">
+                      <a:solidFill>
+                        <a:srgbClr val="EAF1ED"/>
+                      </a:solidFill>
+                    </a:lnR>
+                    <a:lnT w="9525" cap="flat">
+                      <a:solidFill>
+                        <a:srgbClr val="EAF1ED"/>
+                      </a:solidFill>
+                    </a:lnT>
+                    <a:lnB w="9525" cap="flat">
+                      <a:solidFill>
+                        <a:srgbClr val="EAF1ED"/>
+                      </a:solidFill>
+                    </a:lnB>
+                    <a:solidFill>
+                      <a:srgbClr val="FFFFFF"/>
+                    </a:solidFill>
+                  </a:tcPr>
+                </a:tc>
+              </a:tr>
+              <a:tr h="224028">
+                <a:tc>
+                  <a:txBody>
+                    <a:bodyPr wrap="none"/>
+                    <a:lstStyle/>
+                    <a:p>
+                      <a:pPr algn="ctr"/>
+                      <a:r>
+                        <a:rPr sz="840" b="1">
+                          <a:solidFill>
+                            <a:srgbClr val="112233"/>
+                          </a:solidFill>
+                          <a:latin typeface="Segoe UI"/>
+                        </a:rPr>
+                        <a:t>B8</a:t>
+                      </a:r>
+                    </a:p>
+                  </a:txBody>
+                  <a:tcPr anchor="ctr" marL="54864" marR="54864" marT="9144" marB="9144">
+                    <a:lnL w="9525" cap="flat">
+                      <a:solidFill>
+                        <a:srgbClr val="EAF1ED"/>
+                      </a:solidFill>
+                    </a:lnL>
+                    <a:lnR w="9525" cap="flat">
+                      <a:solidFill>
+                        <a:srgbClr val="EAF1ED"/>
+                      </a:solidFill>
+                    </a:lnR>
+                    <a:lnT w="9525" cap="flat">
+                      <a:solidFill>
+                        <a:srgbClr val="EAF1ED"/>
+                      </a:solidFill>
+                    </a:lnT>
+                    <a:lnB w="9525" cap="flat">
+                      <a:solidFill>
+                        <a:srgbClr val="EAF1ED"/>
+                      </a:solidFill>
+                    </a:lnB>
+                    <a:solidFill>
+                      <a:srgbClr val="EADDAD"/>
+                    </a:solidFill>
+                  </a:tcPr>
+                </a:tc>
+                <a:tc>
+                  <a:txBody>
+                    <a:bodyPr wrap="none"/>
+                    <a:lstStyle/>
+                    <a:p>
+                      <a:pPr algn="r"/>
+                      <a:r>
+                        <a:rPr sz="840" b="0">
+                          <a:solidFill>
+                            <a:srgbClr val="9FB0A8"/>
+                          </a:solidFill>
+                          <a:latin typeface="Segoe UI"/>
+                        </a:rPr>
+                        <a:t>40.1%</a:t>
+                      </a:r>
+                    </a:p>
+                  </a:txBody>
+                  <a:tcPr anchor="ctr" marL="54864" marR="54864" marT="9144" marB="9144">
+                    <a:lnL w="9525" cap="flat">
+                      <a:solidFill>
+                        <a:srgbClr val="EAF1ED"/>
+                      </a:solidFill>
+                    </a:lnL>
+                    <a:lnR w="9525" cap="flat">
+                      <a:solidFill>
+                        <a:srgbClr val="EAF1ED"/>
+                      </a:solidFill>
+                    </a:lnR>
+                    <a:lnT w="9525" cap="flat">
+                      <a:solidFill>
+                        <a:srgbClr val="EAF1ED"/>
+                      </a:solidFill>
+                    </a:lnT>
+                    <a:lnB w="9525" cap="flat">
+                      <a:solidFill>
+                        <a:srgbClr val="EAF1ED"/>
+                      </a:solidFill>
+                    </a:lnB>
+                    <a:solidFill>
+                      <a:srgbClr val="FFFFFF"/>
+                    </a:solidFill>
+                  </a:tcPr>
+                </a:tc>
+                <a:tc>
+                  <a:txBody>
+                    <a:bodyPr wrap="none"/>
+                    <a:lstStyle/>
+                    <a:p>
+                      <a:pPr algn="r"/>
+                      <a:r>
+                        <a:rPr sz="840" b="0">
+                          <a:solidFill>
+                            <a:srgbClr val="9FB0A8"/>
+                          </a:solidFill>
+                          <a:latin typeface="Segoe UI"/>
+                        </a:rPr>
+                        <a:t>13.2%</a:t>
+                      </a:r>
+                    </a:p>
+                  </a:txBody>
+                  <a:tcPr anchor="ctr" marL="54864" marR="54864" marT="9144" marB="9144">
+                    <a:lnL w="9525" cap="flat">
+                      <a:solidFill>
+                        <a:srgbClr val="EAF1ED"/>
+                      </a:solidFill>
+                    </a:lnL>
+                    <a:lnR w="9525" cap="flat">
+                      <a:solidFill>
+                        <a:srgbClr val="EAF1ED"/>
+                      </a:solidFill>
+                    </a:lnR>
+                    <a:lnT w="9525" cap="flat">
+                      <a:solidFill>
+                        <a:srgbClr val="EAF1ED"/>
+                      </a:solidFill>
+                    </a:lnT>
+                    <a:lnB w="9525" cap="flat">
+                      <a:solidFill>
+                        <a:srgbClr val="EAF1ED"/>
+                      </a:solidFill>
+                    </a:lnB>
+                    <a:solidFill>
+                      <a:srgbClr val="FFFFFF"/>
+                    </a:solidFill>
+                  </a:tcPr>
+                </a:tc>
+                <a:tc>
+                  <a:txBody>
+                    <a:bodyPr wrap="none"/>
+                    <a:lstStyle/>
+                    <a:p>
+                      <a:pPr algn="r"/>
+                      <a:r>
+                        <a:rPr sz="840" b="0">
+                          <a:solidFill>
+                            <a:srgbClr val="9FB0A8"/>
+                          </a:solidFill>
+                          <a:latin typeface="Segoe UI"/>
+                        </a:rPr>
+                        <a:t>278,690</a:t>
+                      </a:r>
+                    </a:p>
+                  </a:txBody>
+                  <a:tcPr anchor="ctr" marL="54864" marR="54864" marT="9144" marB="9144">
+                    <a:lnL w="9525" cap="flat">
+                      <a:solidFill>
+                        <a:srgbClr val="EAF1ED"/>
+                      </a:solidFill>
+                    </a:lnL>
+                    <a:lnR w="9525" cap="flat">
+                      <a:solidFill>
+                        <a:srgbClr val="EAF1ED"/>
+                      </a:solidFill>
+                    </a:lnR>
+                    <a:lnT w="9525" cap="flat">
+                      <a:solidFill>
+                        <a:srgbClr val="EAF1ED"/>
+                      </a:solidFill>
+                    </a:lnT>
+                    <a:lnB w="9525" cap="flat">
+                      <a:solidFill>
+                        <a:srgbClr val="EAF1ED"/>
+                      </a:solidFill>
+                    </a:lnB>
+                    <a:solidFill>
+                      <a:srgbClr val="FFFFFF"/>
+                    </a:solidFill>
+                  </a:tcPr>
+                </a:tc>
+                <a:tc>
+                  <a:txBody>
+                    <a:bodyPr wrap="none"/>
+                    <a:lstStyle/>
+                    <a:p>
+                      <a:pPr algn="r"/>
+                      <a:r>
+                        <a:rPr sz="840" b="0">
+                          <a:solidFill>
+                            <a:srgbClr val="9FB0A8"/>
+                          </a:solidFill>
+                          <a:latin typeface="Segoe UI"/>
+                        </a:rPr>
+                        <a:t>16.4%</a:t>
+                      </a:r>
+                    </a:p>
+                  </a:txBody>
+                  <a:tcPr anchor="ctr" marL="54864" marR="54864" marT="9144" marB="9144">
+                    <a:lnL w="9525" cap="flat">
+                      <a:solidFill>
+                        <a:srgbClr val="EAF1ED"/>
+                      </a:solidFill>
+                    </a:lnL>
+                    <a:lnR w="9525" cap="flat">
+                      <a:solidFill>
+                        <a:srgbClr val="EAF1ED"/>
+                      </a:solidFill>
+                    </a:lnR>
+                    <a:lnT w="9525" cap="flat">
+                      <a:solidFill>
+                        <a:srgbClr val="EAF1ED"/>
+                      </a:solidFill>
+                    </a:lnT>
+                    <a:lnB w="9525" cap="flat">
+                      <a:solidFill>
+                        <a:srgbClr val="EAF1ED"/>
+                      </a:solidFill>
+                    </a:lnB>
+                    <a:solidFill>
+                      <a:srgbClr val="FFFFFF"/>
+                    </a:solidFill>
+                  </a:tcPr>
+                </a:tc>
+                <a:tc>
+                  <a:txBody>
+                    <a:bodyPr wrap="none"/>
+                    <a:lstStyle/>
+                    <a:p>
+                      <a:pPr algn="r"/>
+                      <a:r>
+                        <a:rPr sz="840" b="0">
+                          <a:solidFill>
+                            <a:srgbClr val="9FB0A8"/>
+                          </a:solidFill>
+                          <a:latin typeface="Segoe UI"/>
+                        </a:rPr>
+                        <a:t>273,776</a:t>
+                      </a:r>
+                    </a:p>
+                  </a:txBody>
+                  <a:tcPr anchor="ctr" marL="54864" marR="54864" marT="9144" marB="9144">
+                    <a:lnL w="9525" cap="flat">
+                      <a:solidFill>
+                        <a:srgbClr val="EAF1ED"/>
+                      </a:solidFill>
+                    </a:lnL>
+                    <a:lnR w="9525" cap="flat">
+                      <a:solidFill>
+                        <a:srgbClr val="EAF1ED"/>
+                      </a:solidFill>
+                    </a:lnR>
+                    <a:lnT w="9525" cap="flat">
+                      <a:solidFill>
+                        <a:srgbClr val="EAF1ED"/>
+                      </a:solidFill>
+                    </a:lnT>
+                    <a:lnB w="9525" cap="flat">
+                      <a:solidFill>
+                        <a:srgbClr val="EAF1ED"/>
+                      </a:solidFill>
+                    </a:lnB>
+                    <a:solidFill>
+                      <a:srgbClr val="FFFFFF"/>
+                    </a:solidFill>
+                  </a:tcPr>
+                </a:tc>
+                <a:tc>
+                  <a:txBody>
+                    <a:bodyPr wrap="none"/>
+                    <a:lstStyle/>
+                    <a:p>
+                      <a:pPr algn="r"/>
+                      <a:r>
+                        <a:rPr sz="840" b="0">
+                          <a:solidFill>
+                            <a:srgbClr val="9FB0A8"/>
+                          </a:solidFill>
+                          <a:latin typeface="Segoe UI"/>
+                        </a:rPr>
+                        <a:t>4,806</a:t>
+                      </a:r>
+                    </a:p>
+                  </a:txBody>
+                  <a:tcPr anchor="ctr" marL="54864" marR="54864" marT="9144" marB="9144">
+                    <a:lnL w="9525" cap="flat">
+                      <a:solidFill>
+                        <a:srgbClr val="EAF1ED"/>
+                      </a:solidFill>
+                    </a:lnL>
+                    <a:lnR w="9525" cap="flat">
+                      <a:solidFill>
+                        <a:srgbClr val="EAF1ED"/>
+                      </a:solidFill>
+                    </a:lnR>
+                    <a:lnT w="9525" cap="flat">
+                      <a:solidFill>
+                        <a:srgbClr val="EAF1ED"/>
+                      </a:solidFill>
+                    </a:lnT>
+                    <a:lnB w="9525" cap="flat">
+                      <a:solidFill>
+                        <a:srgbClr val="EAF1ED"/>
+                      </a:solidFill>
+                    </a:lnB>
+                    <a:solidFill>
+                      <a:srgbClr val="FFFFFF"/>
+                    </a:solidFill>
+                  </a:tcPr>
+                </a:tc>
+                <a:tc>
+                  <a:txBody>
+                    <a:bodyPr wrap="none"/>
+                    <a:lstStyle/>
+                    <a:p>
+                      <a:pPr algn="r"/>
+                      <a:r>
+                        <a:rPr sz="840" b="0">
+                          <a:solidFill>
+                            <a:srgbClr val="9FB0A8"/>
+                          </a:solidFill>
+                          <a:latin typeface="Segoe UI"/>
+                        </a:rPr>
+                        <a:t>598</a:t>
+                      </a:r>
+                    </a:p>
+                  </a:txBody>
+                  <a:tcPr anchor="ctr" marL="54864" marR="54864" marT="9144" marB="9144">
+                    <a:lnL w="9525" cap="flat">
+                      <a:solidFill>
+                        <a:srgbClr val="EAF1ED"/>
+                      </a:solidFill>
+                    </a:lnL>
+                    <a:lnR w="9525" cap="flat">
+                      <a:solidFill>
+                        <a:srgbClr val="EAF1ED"/>
+                      </a:solidFill>
+                    </a:lnR>
+                    <a:lnT w="9525" cap="flat">
+                      <a:solidFill>
+                        <a:srgbClr val="EAF1ED"/>
+                      </a:solidFill>
+                    </a:lnT>
+                    <a:lnB w="9525" cap="flat">
+                      <a:solidFill>
+                        <a:srgbClr val="EAF1ED"/>
+                      </a:solidFill>
+                    </a:lnB>
+                    <a:solidFill>
+                      <a:srgbClr val="FFFFFF"/>
+                    </a:solidFill>
+                  </a:tcPr>
+                </a:tc>
+              </a:tr>
+              <a:tr h="224028">
+                <a:tc>
+                  <a:txBody>
+                    <a:bodyPr wrap="none"/>
+                    <a:lstStyle/>
+                    <a:p>
+                      <a:pPr algn="ctr"/>
+                      <a:r>
+                        <a:rPr sz="840" b="1">
+                          <a:solidFill>
+                            <a:srgbClr val="112233"/>
+                          </a:solidFill>
+                          <a:latin typeface="Segoe UI"/>
+                        </a:rPr>
+                        <a:t>B9</a:t>
+                      </a:r>
+                    </a:p>
+                  </a:txBody>
+                  <a:tcPr anchor="ctr" marL="54864" marR="54864" marT="9144" marB="9144">
+                    <a:lnL w="9525" cap="flat">
+                      <a:solidFill>
+                        <a:srgbClr val="EAF1ED"/>
+                      </a:solidFill>
+                    </a:lnL>
+                    <a:lnR w="9525" cap="flat">
+                      <a:solidFill>
+                        <a:srgbClr val="EAF1ED"/>
+                      </a:solidFill>
+                    </a:lnR>
+                    <a:lnT w="9525" cap="flat">
+                      <a:solidFill>
+                        <a:srgbClr val="EAF1ED"/>
+                      </a:solidFill>
+                    </a:lnT>
+                    <a:lnB w="9525" cap="flat">
+                      <a:solidFill>
+                        <a:srgbClr val="EAF1ED"/>
+                      </a:solidFill>
+                    </a:lnB>
+                    <a:solidFill>
+                      <a:srgbClr val="EAD1AD"/>
+                    </a:solidFill>
+                  </a:tcPr>
+                </a:tc>
+                <a:tc>
+                  <a:txBody>
+                    <a:bodyPr wrap="none"/>
+                    <a:lstStyle/>
+                    <a:p>
+                      <a:pPr algn="r"/>
+                      <a:r>
+                        <a:rPr sz="840" b="0">
+                          <a:solidFill>
+                            <a:srgbClr val="9FB0A8"/>
+                          </a:solidFill>
+                          <a:latin typeface="Segoe UI"/>
+                        </a:rPr>
+                        <a:t>42.1%</a:t>
+                      </a:r>
+                    </a:p>
+                  </a:txBody>
+                  <a:tcPr anchor="ctr" marL="54864" marR="54864" marT="9144" marB="9144">
+                    <a:lnL w="9525" cap="flat">
+                      <a:solidFill>
+                        <a:srgbClr val="EAF1ED"/>
+                      </a:solidFill>
+                    </a:lnL>
+                    <a:lnR w="9525" cap="flat">
+                      <a:solidFill>
+                        <a:srgbClr val="EAF1ED"/>
+                      </a:solidFill>
+                    </a:lnR>
+                    <a:lnT w="9525" cap="flat">
+                      <a:solidFill>
+                        <a:srgbClr val="EAF1ED"/>
+                      </a:solidFill>
+                    </a:lnT>
+                    <a:lnB w="9525" cap="flat">
+                      <a:solidFill>
+                        <a:srgbClr val="EAF1ED"/>
+                      </a:solidFill>
+                    </a:lnB>
+                    <a:solidFill>
+                      <a:srgbClr val="FFFFFF"/>
+                    </a:solidFill>
+                  </a:tcPr>
+                </a:tc>
+                <a:tc>
+                  <a:txBody>
+                    <a:bodyPr wrap="none"/>
+                    <a:lstStyle/>
+                    <a:p>
+                      <a:pPr algn="r"/>
+                      <a:r>
+                        <a:rPr sz="840" b="0">
+                          <a:solidFill>
+                            <a:srgbClr val="9FB0A8"/>
+                          </a:solidFill>
+                          <a:latin typeface="Segoe UI"/>
+                        </a:rPr>
+                        <a:t>17.1%</a:t>
+                      </a:r>
+                    </a:p>
+                  </a:txBody>
+                  <a:tcPr anchor="ctr" marL="54864" marR="54864" marT="9144" marB="9144">
+                    <a:lnL w="9525" cap="flat">
+                      <a:solidFill>
+                        <a:srgbClr val="EAF1ED"/>
+                      </a:solidFill>
+                    </a:lnL>
+                    <a:lnR w="9525" cap="flat">
+                      <a:solidFill>
+                        <a:srgbClr val="EAF1ED"/>
+                      </a:solidFill>
+                    </a:lnR>
+                    <a:lnT w="9525" cap="flat">
+                      <a:solidFill>
+                        <a:srgbClr val="EAF1ED"/>
+                      </a:solidFill>
+                    </a:lnT>
+                    <a:lnB w="9525" cap="flat">
+                      <a:solidFill>
+                        <a:srgbClr val="EAF1ED"/>
+                      </a:solidFill>
+                    </a:lnB>
+                    <a:solidFill>
+                      <a:srgbClr val="FFFFFF"/>
+                    </a:solidFill>
+                  </a:tcPr>
+                </a:tc>
+                <a:tc>
+                  <a:txBody>
+                    <a:bodyPr wrap="none"/>
+                    <a:lstStyle/>
+                    <a:p>
+                      <a:pPr algn="r"/>
+                      <a:r>
+                        <a:rPr sz="840" b="0">
+                          <a:solidFill>
+                            <a:srgbClr val="9FB0A8"/>
+                          </a:solidFill>
+                          <a:latin typeface="Segoe UI"/>
+                        </a:rPr>
+                        <a:t>86,512</a:t>
+                      </a:r>
+                    </a:p>
+                  </a:txBody>
+                  <a:tcPr anchor="ctr" marL="54864" marR="54864" marT="9144" marB="9144">
+                    <a:lnL w="9525" cap="flat">
+                      <a:solidFill>
+                        <a:srgbClr val="EAF1ED"/>
+                      </a:solidFill>
+                    </a:lnL>
+                    <a:lnR w="9525" cap="flat">
+                      <a:solidFill>
+                        <a:srgbClr val="EAF1ED"/>
+                      </a:solidFill>
+                    </a:lnR>
+                    <a:lnT w="9525" cap="flat">
+                      <a:solidFill>
+                        <a:srgbClr val="EAF1ED"/>
+                      </a:solidFill>
+                    </a:lnT>
+                    <a:lnB w="9525" cap="flat">
+                      <a:solidFill>
+                        <a:srgbClr val="EAF1ED"/>
+                      </a:solidFill>
+                    </a:lnB>
+                    <a:solidFill>
+                      <a:srgbClr val="FFFFFF"/>
+                    </a:solidFill>
+                  </a:tcPr>
+                </a:tc>
+                <a:tc>
+                  <a:txBody>
+                    <a:bodyPr wrap="none"/>
+                    <a:lstStyle/>
+                    <a:p>
+                      <a:pPr algn="r"/>
+                      <a:r>
+                        <a:rPr sz="840" b="0">
+                          <a:solidFill>
+                            <a:srgbClr val="9FB0A8"/>
+                          </a:solidFill>
+                          <a:latin typeface="Segoe UI"/>
+                        </a:rPr>
+                        <a:t>5.1%</a:t>
+                      </a:r>
+                    </a:p>
+                  </a:txBody>
+                  <a:tcPr anchor="ctr" marL="54864" marR="54864" marT="9144" marB="9144">
+                    <a:lnL w="9525" cap="flat">
+                      <a:solidFill>
+                        <a:srgbClr val="EAF1ED"/>
+                      </a:solidFill>
+                    </a:lnL>
+                    <a:lnR w="9525" cap="flat">
+                      <a:solidFill>
+                        <a:srgbClr val="EAF1ED"/>
+                      </a:solidFill>
+                    </a:lnR>
+                    <a:lnT w="9525" cap="flat">
+                      <a:solidFill>
+                        <a:srgbClr val="EAF1ED"/>
+                      </a:solidFill>
+                    </a:lnT>
+                    <a:lnB w="9525" cap="flat">
+                      <a:solidFill>
+                        <a:srgbClr val="EAF1ED"/>
+                      </a:solidFill>
+                    </a:lnB>
+                    <a:solidFill>
+                      <a:srgbClr val="FFFFFF"/>
+                    </a:solidFill>
+                  </a:tcPr>
+                </a:tc>
+                <a:tc>
+                  <a:txBody>
+                    <a:bodyPr wrap="none"/>
+                    <a:lstStyle/>
+                    <a:p>
+                      <a:pPr algn="r"/>
+                      <a:r>
+                        <a:rPr sz="840" b="0">
+                          <a:solidFill>
+                            <a:srgbClr val="9FB0A8"/>
+                          </a:solidFill>
+                          <a:latin typeface="Segoe UI"/>
+                        </a:rPr>
+                        <a:t>85,508</a:t>
+                      </a:r>
+                    </a:p>
+                  </a:txBody>
+                  <a:tcPr anchor="ctr" marL="54864" marR="54864" marT="9144" marB="9144">
+                    <a:lnL w="9525" cap="flat">
+                      <a:solidFill>
+                        <a:srgbClr val="EAF1ED"/>
+                      </a:solidFill>
+                    </a:lnL>
+                    <a:lnR w="9525" cap="flat">
+                      <a:solidFill>
+                        <a:srgbClr val="EAF1ED"/>
+                      </a:solidFill>
+                    </a:lnR>
+                    <a:lnT w="9525" cap="flat">
+                      <a:solidFill>
+                        <a:srgbClr val="EAF1ED"/>
+                      </a:solidFill>
+                    </a:lnT>
+                    <a:lnB w="9525" cap="flat">
+                      <a:solidFill>
+                        <a:srgbClr val="EAF1ED"/>
+                      </a:solidFill>
+                    </a:lnB>
+                    <a:solidFill>
+                      <a:srgbClr val="FFFFFF"/>
+                    </a:solidFill>
+                  </a:tcPr>
+                </a:tc>
+                <a:tc>
+                  <a:txBody>
+                    <a:bodyPr wrap="none"/>
+                    <a:lstStyle/>
+                    <a:p>
+                      <a:pPr algn="r"/>
+                      <a:r>
+                        <a:rPr sz="840" b="0">
+                          <a:solidFill>
+                            <a:srgbClr val="9FB0A8"/>
+                          </a:solidFill>
+                          <a:latin typeface="Segoe UI"/>
+                        </a:rPr>
+                        <a:t>2,536</a:t>
+                      </a:r>
+                    </a:p>
+                  </a:txBody>
+                  <a:tcPr anchor="ctr" marL="54864" marR="54864" marT="9144" marB="9144">
+                    <a:lnL w="9525" cap="flat">
+                      <a:solidFill>
+                        <a:srgbClr val="EAF1ED"/>
+                      </a:solidFill>
+                    </a:lnL>
+                    <a:lnR w="9525" cap="flat">
+                      <a:solidFill>
+                        <a:srgbClr val="EAF1ED"/>
+                      </a:solidFill>
+                    </a:lnR>
+                    <a:lnT w="9525" cap="flat">
+                      <a:solidFill>
+                        <a:srgbClr val="EAF1ED"/>
+                      </a:solidFill>
+                    </a:lnT>
+                    <a:lnB w="9525" cap="flat">
+                      <a:solidFill>
+                        <a:srgbClr val="EAF1ED"/>
+                      </a:solidFill>
+                    </a:lnB>
+                    <a:solidFill>
+                      <a:srgbClr val="FFFFFF"/>
+                    </a:solidFill>
+                  </a:tcPr>
+                </a:tc>
+                <a:tc>
+                  <a:txBody>
+                    <a:bodyPr wrap="none"/>
+                    <a:lstStyle/>
+                    <a:p>
+                      <a:pPr algn="r"/>
+                      <a:r>
+                        <a:rPr sz="840" b="0">
+                          <a:solidFill>
+                            <a:srgbClr val="9FB0A8"/>
+                          </a:solidFill>
+                          <a:latin typeface="Segoe UI"/>
+                        </a:rPr>
+                        <a:t>579</a:t>
+                      </a:r>
+                    </a:p>
+                  </a:txBody>
+                  <a:tcPr anchor="ctr" marL="54864" marR="54864" marT="9144" marB="9144">
+                    <a:lnL w="9525" cap="flat">
+                      <a:solidFill>
+                        <a:srgbClr val="EAF1ED"/>
+                      </a:solidFill>
+                    </a:lnL>
+                    <a:lnR w="9525" cap="flat">
+                      <a:solidFill>
+                        <a:srgbClr val="EAF1ED"/>
+                      </a:solidFill>
+                    </a:lnR>
+                    <a:lnT w="9525" cap="flat">
+                      <a:solidFill>
+                        <a:srgbClr val="EAF1ED"/>
+                      </a:solidFill>
+                    </a:lnT>
+                    <a:lnB w="9525" cap="flat">
+                      <a:solidFill>
+                        <a:srgbClr val="EAF1ED"/>
+                      </a:solidFill>
+                    </a:lnB>
+                    <a:solidFill>
+                      <a:srgbClr val="FFFFFF"/>
+                    </a:solidFill>
+                  </a:tcPr>
+                </a:tc>
+              </a:tr>
+              <a:tr h="224028">
+                <a:tc>
+                  <a:txBody>
+                    <a:bodyPr wrap="none"/>
+                    <a:lstStyle/>
+                    <a:p>
+                      <a:pPr algn="ctr"/>
+                      <a:r>
+                        <a:rPr sz="840" b="1">
+                          <a:solidFill>
+                            <a:srgbClr val="112233"/>
+                          </a:solidFill>
+                          <a:latin typeface="Segoe UI"/>
+                        </a:rPr>
+                        <a:t>B10</a:t>
+                      </a:r>
+                    </a:p>
+                  </a:txBody>
+                  <a:tcPr anchor="ctr" marL="54864" marR="54864" marT="9144" marB="9144">
+                    <a:lnL w="9525" cap="flat">
+                      <a:solidFill>
+                        <a:srgbClr val="EAF1ED"/>
+                      </a:solidFill>
+                    </a:lnL>
+                    <a:lnR w="9525" cap="flat">
+                      <a:solidFill>
+                        <a:srgbClr val="EAF1ED"/>
+                      </a:solidFill>
+                    </a:lnR>
+                    <a:lnT w="9525" cap="flat">
+                      <a:solidFill>
+                        <a:srgbClr val="EAF1ED"/>
+                      </a:solidFill>
+                    </a:lnT>
+                    <a:lnB w="9525" cap="flat">
+                      <a:solidFill>
+                        <a:srgbClr val="EAF1ED"/>
+                      </a:solidFill>
+                    </a:lnB>
+                    <a:solidFill>
+                      <a:srgbClr val="EAC5AD"/>
+                    </a:solidFill>
+                  </a:tcPr>
+                </a:tc>
+                <a:tc>
+                  <a:txBody>
+                    <a:bodyPr wrap="none"/>
+                    <a:lstStyle/>
+                    <a:p>
+                      <a:pPr algn="r"/>
+                      <a:r>
+                        <a:rPr sz="840" b="0">
+                          <a:solidFill>
+                            <a:srgbClr val="9FB0A8"/>
+                          </a:solidFill>
+                          <a:latin typeface="Segoe UI"/>
+                        </a:rPr>
+                        <a:t>44.9%</a:t>
+                      </a:r>
+                    </a:p>
+                  </a:txBody>
+                  <a:tcPr anchor="ctr" marL="54864" marR="54864" marT="9144" marB="9144">
+                    <a:lnL w="9525" cap="flat">
+                      <a:solidFill>
+                        <a:srgbClr val="EAF1ED"/>
+                      </a:solidFill>
+                    </a:lnL>
+                    <a:lnR w="9525" cap="flat">
+                      <a:solidFill>
+                        <a:srgbClr val="EAF1ED"/>
+                      </a:solidFill>
+                    </a:lnR>
+                    <a:lnT w="9525" cap="flat">
+                      <a:solidFill>
+                        <a:srgbClr val="EAF1ED"/>
+                      </a:solidFill>
+                    </a:lnT>
+                    <a:lnB w="9525" cap="flat">
+                      <a:solidFill>
+                        <a:srgbClr val="EAF1ED"/>
+                      </a:solidFill>
+                    </a:lnB>
+                    <a:solidFill>
+                      <a:srgbClr val="FFFFFF"/>
+                    </a:solidFill>
+                  </a:tcPr>
+                </a:tc>
+                <a:tc>
+                  <a:txBody>
+                    <a:bodyPr wrap="none"/>
+                    <a:lstStyle/>
+                    <a:p>
+                      <a:pPr algn="r"/>
+                      <a:r>
+                        <a:rPr sz="840" b="0">
+                          <a:solidFill>
+                            <a:srgbClr val="9FB0A8"/>
+                          </a:solidFill>
+                          <a:latin typeface="Segoe UI"/>
+                        </a:rPr>
+                        <a:t>18.1%</a:t>
+                      </a:r>
+                    </a:p>
+                  </a:txBody>
+                  <a:tcPr anchor="ctr" marL="54864" marR="54864" marT="9144" marB="9144">
+                    <a:lnL w="9525" cap="flat">
+                      <a:solidFill>
+                        <a:srgbClr val="EAF1ED"/>
+                      </a:solidFill>
+                    </a:lnL>
+                    <a:lnR w="9525" cap="flat">
+                      <a:solidFill>
+                        <a:srgbClr val="EAF1ED"/>
+                      </a:solidFill>
+                    </a:lnR>
+                    <a:lnT w="9525" cap="flat">
+                      <a:solidFill>
+                        <a:srgbClr val="EAF1ED"/>
+                      </a:solidFill>
+                    </a:lnT>
+                    <a:lnB w="9525" cap="flat">
+                      <a:solidFill>
+                        <a:srgbClr val="EAF1ED"/>
+                      </a:solidFill>
+                    </a:lnB>
+                    <a:solidFill>
+                      <a:srgbClr val="FFFFFF"/>
+                    </a:solidFill>
+                  </a:tcPr>
+                </a:tc>
+                <a:tc>
+                  <a:txBody>
+                    <a:bodyPr wrap="none"/>
+                    <a:lstStyle/>
+                    <a:p>
+                      <a:pPr algn="r"/>
+                      <a:r>
+                        <a:rPr sz="840" b="0">
+                          <a:solidFill>
+                            <a:srgbClr val="9FB0A8"/>
+                          </a:solidFill>
+                          <a:latin typeface="Segoe UI"/>
+                        </a:rPr>
+                        <a:t>111,032</a:t>
+                      </a:r>
+                    </a:p>
+                  </a:txBody>
+                  <a:tcPr anchor="ctr" marL="54864" marR="54864" marT="9144" marB="9144">
+                    <a:lnL w="9525" cap="flat">
+                      <a:solidFill>
+                        <a:srgbClr val="EAF1ED"/>
+                      </a:solidFill>
+                    </a:lnL>
+                    <a:lnR w="9525" cap="flat">
+                      <a:solidFill>
+                        <a:srgbClr val="EAF1ED"/>
+                      </a:solidFill>
+                    </a:lnR>
+                    <a:lnT w="9525" cap="flat">
+                      <a:solidFill>
+                        <a:srgbClr val="EAF1ED"/>
+                      </a:solidFill>
+                    </a:lnT>
+                    <a:lnB w="9525" cap="flat">
+                      <a:solidFill>
+                        <a:srgbClr val="EAF1ED"/>
+                      </a:solidFill>
+                    </a:lnB>
+                    <a:solidFill>
+                      <a:srgbClr val="FFFFFF"/>
+                    </a:solidFill>
+                  </a:tcPr>
+                </a:tc>
+                <a:tc>
+                  <a:txBody>
+                    <a:bodyPr wrap="none"/>
+                    <a:lstStyle/>
+                    <a:p>
+                      <a:pPr algn="r"/>
+                      <a:r>
+                        <a:rPr sz="840" b="0">
+                          <a:solidFill>
+                            <a:srgbClr val="9FB0A8"/>
+                          </a:solidFill>
+                          <a:latin typeface="Segoe UI"/>
+                        </a:rPr>
+                        <a:t>6.5%</a:t>
+                      </a:r>
+                    </a:p>
+                  </a:txBody>
+                  <a:tcPr anchor="ctr" marL="54864" marR="54864" marT="9144" marB="9144">
+                    <a:lnL w="9525" cap="flat">
+                      <a:solidFill>
+                        <a:srgbClr val="EAF1ED"/>
+                      </a:solidFill>
+                    </a:lnL>
+                    <a:lnR w="9525" cap="flat">
+                      <a:solidFill>
+                        <a:srgbClr val="EAF1ED"/>
+                      </a:solidFill>
+                    </a:lnR>
+                    <a:lnT w="9525" cap="flat">
+                      <a:solidFill>
+                        <a:srgbClr val="EAF1ED"/>
+                      </a:solidFill>
+                    </a:lnT>
+                    <a:lnB w="9525" cap="flat">
+                      <a:solidFill>
+                        <a:srgbClr val="EAF1ED"/>
+                      </a:solidFill>
+                    </a:lnB>
+                    <a:solidFill>
+                      <a:srgbClr val="FFFFFF"/>
+                    </a:solidFill>
+                  </a:tcPr>
+                </a:tc>
+                <a:tc>
+                  <a:txBody>
+                    <a:bodyPr wrap="none"/>
+                    <a:lstStyle/>
+                    <a:p>
+                      <a:pPr algn="r"/>
+                      <a:r>
+                        <a:rPr sz="840" b="0">
+                          <a:solidFill>
+                            <a:srgbClr val="9FB0A8"/>
+                          </a:solidFill>
+                          <a:latin typeface="Segoe UI"/>
+                        </a:rPr>
+                        <a:t>110,475</a:t>
+                      </a:r>
+                    </a:p>
+                  </a:txBody>
+                  <a:tcPr anchor="ctr" marL="54864" marR="54864" marT="9144" marB="9144">
+                    <a:lnL w="9525" cap="flat">
+                      <a:solidFill>
+                        <a:srgbClr val="EAF1ED"/>
+                      </a:solidFill>
+                    </a:lnL>
+                    <a:lnR w="9525" cap="flat">
+                      <a:solidFill>
+                        <a:srgbClr val="EAF1ED"/>
+                      </a:solidFill>
+                    </a:lnR>
+                    <a:lnT w="9525" cap="flat">
+                      <a:solidFill>
+                        <a:srgbClr val="EAF1ED"/>
+                      </a:solidFill>
+                    </a:lnT>
+                    <a:lnB w="9525" cap="flat">
+                      <a:solidFill>
+                        <a:srgbClr val="EAF1ED"/>
+                      </a:solidFill>
+                    </a:lnB>
+                    <a:solidFill>
+                      <a:srgbClr val="FFFFFF"/>
+                    </a:solidFill>
+                  </a:tcPr>
+                </a:tc>
+                <a:tc>
+                  <a:txBody>
+                    <a:bodyPr wrap="none"/>
+                    <a:lstStyle/>
+                    <a:p>
+                      <a:pPr algn="r"/>
+                      <a:r>
+                        <a:rPr sz="840" b="0">
+                          <a:solidFill>
+                            <a:srgbClr val="9FB0A8"/>
+                          </a:solidFill>
+                          <a:latin typeface="Segoe UI"/>
+                        </a:rPr>
+                        <a:t>1,460</a:t>
+                      </a:r>
+                    </a:p>
+                  </a:txBody>
+                  <a:tcPr anchor="ctr" marL="54864" marR="54864" marT="9144" marB="9144">
+                    <a:lnL w="9525" cap="flat">
+                      <a:solidFill>
+                        <a:srgbClr val="EAF1ED"/>
+                      </a:solidFill>
+                    </a:lnL>
+                    <a:lnR w="9525" cap="flat">
+                      <a:solidFill>
+                        <a:srgbClr val="EAF1ED"/>
+                      </a:solidFill>
+                    </a:lnR>
+                    <a:lnT w="9525" cap="flat">
+                      <a:solidFill>
+                        <a:srgbClr val="EAF1ED"/>
+                      </a:solidFill>
+                    </a:lnT>
+                    <a:lnB w="9525" cap="flat">
+                      <a:solidFill>
+                        <a:srgbClr val="EAF1ED"/>
+                      </a:solidFill>
+                    </a:lnB>
+                    <a:solidFill>
+                      <a:srgbClr val="FFFFFF"/>
+                    </a:solidFill>
+                  </a:tcPr>
+                </a:tc>
+                <a:tc>
+                  <a:txBody>
+                    <a:bodyPr wrap="none"/>
+                    <a:lstStyle/>
+                    <a:p>
+                      <a:pPr algn="r"/>
+                      <a:r>
+                        <a:rPr sz="840" b="0">
+                          <a:solidFill>
+                            <a:srgbClr val="9FB0A8"/>
+                          </a:solidFill>
+                          <a:latin typeface="Segoe UI"/>
+                        </a:rPr>
+                        <a:t>550</a:t>
+                      </a:r>
+                    </a:p>
+                  </a:txBody>
+                  <a:tcPr anchor="ctr" marL="54864" marR="54864" marT="9144" marB="9144">
+                    <a:lnL w="9525" cap="flat">
+                      <a:solidFill>
+                        <a:srgbClr val="EAF1ED"/>
+                      </a:solidFill>
+                    </a:lnL>
+                    <a:lnR w="9525" cap="flat">
+                      <a:solidFill>
+                        <a:srgbClr val="EAF1ED"/>
+                      </a:solidFill>
+                    </a:lnR>
+                    <a:lnT w="9525" cap="flat">
+                      <a:solidFill>
+                        <a:srgbClr val="EAF1ED"/>
+                      </a:solidFill>
+                    </a:lnT>
+                    <a:lnB w="9525" cap="flat">
+                      <a:solidFill>
+                        <a:srgbClr val="EAF1ED"/>
+                      </a:solidFill>
+                    </a:lnB>
+                    <a:solidFill>
+                      <a:srgbClr val="FFFFFF"/>
+                    </a:solidFill>
+                  </a:tcPr>
+                </a:tc>
+              </a:tr>
+              <a:tr h="224028">
+                <a:tc>
+                  <a:txBody>
+                    <a:bodyPr wrap="none"/>
+                    <a:lstStyle/>
+                    <a:p>
+                      <a:pPr algn="ctr"/>
+                      <a:r>
+                        <a:rPr sz="840" b="1">
+                          <a:solidFill>
+                            <a:srgbClr val="112233"/>
+                          </a:solidFill>
+                          <a:latin typeface="Segoe UI"/>
+                        </a:rPr>
+                        <a:t>B11</a:t>
+                      </a:r>
+                    </a:p>
+                  </a:txBody>
+                  <a:tcPr anchor="ctr" marL="54864" marR="54864" marT="9144" marB="9144">
+                    <a:lnL w="9525" cap="flat">
+                      <a:solidFill>
+                        <a:srgbClr val="EAF1ED"/>
+                      </a:solidFill>
+                    </a:lnL>
+                    <a:lnR w="9525" cap="flat">
+                      <a:solidFill>
+                        <a:srgbClr val="EAF1ED"/>
+                      </a:solidFill>
+                    </a:lnR>
+                    <a:lnT w="9525" cap="flat">
+                      <a:solidFill>
+                        <a:srgbClr val="EAF1ED"/>
+                      </a:solidFill>
+                    </a:lnT>
+                    <a:lnB w="9525" cap="flat">
+                      <a:solidFill>
+                        <a:srgbClr val="EAF1ED"/>
+                      </a:solidFill>
+                    </a:lnB>
+                    <a:solidFill>
+                      <a:srgbClr val="EAB9AD"/>
+                    </a:solidFill>
+                  </a:tcPr>
+                </a:tc>
+                <a:tc>
+                  <a:txBody>
+                    <a:bodyPr wrap="none"/>
+                    <a:lstStyle/>
+                    <a:p>
+                      <a:pPr algn="r"/>
+                      <a:r>
+                        <a:rPr sz="840" b="0">
+                          <a:solidFill>
+                            <a:srgbClr val="9FB0A8"/>
+                          </a:solidFill>
+                          <a:latin typeface="Segoe UI"/>
+                        </a:rPr>
+                        <a:t>45.0%</a:t>
+                      </a:r>
+                    </a:p>
+                  </a:txBody>
+                  <a:tcPr anchor="ctr" marL="54864" marR="54864" marT="9144" marB="9144">
+                    <a:lnL w="9525" cap="flat">
+                      <a:solidFill>
+                        <a:srgbClr val="EAF1ED"/>
+                      </a:solidFill>
+                    </a:lnL>
+                    <a:lnR w="9525" cap="flat">
+                      <a:solidFill>
+                        <a:srgbClr val="EAF1ED"/>
+                      </a:solidFill>
+                    </a:lnR>
+                    <a:lnT w="9525" cap="flat">
+                      <a:solidFill>
+                        <a:srgbClr val="EAF1ED"/>
+                      </a:solidFill>
+                    </a:lnT>
+                    <a:lnB w="9525" cap="flat">
+                      <a:solidFill>
+                        <a:srgbClr val="EAF1ED"/>
+                      </a:solidFill>
+                    </a:lnB>
+                    <a:solidFill>
+                      <a:srgbClr val="FFFFFF"/>
+                    </a:solidFill>
+                  </a:tcPr>
+                </a:tc>
+                <a:tc>
+                  <a:txBody>
+                    <a:bodyPr wrap="none"/>
+                    <a:lstStyle/>
+                    <a:p>
+                      <a:pPr algn="r"/>
+                      <a:r>
+                        <a:rPr sz="840" b="0">
+                          <a:solidFill>
+                            <a:srgbClr val="9FB0A8"/>
+                          </a:solidFill>
+                          <a:latin typeface="Segoe UI"/>
+                        </a:rPr>
+                        <a:t>19.1%</a:t>
+                      </a:r>
+                    </a:p>
+                  </a:txBody>
+                  <a:tcPr anchor="ctr" marL="54864" marR="54864" marT="9144" marB="9144">
+                    <a:lnL w="9525" cap="flat">
+                      <a:solidFill>
+                        <a:srgbClr val="EAF1ED"/>
+                      </a:solidFill>
+                    </a:lnL>
+                    <a:lnR w="9525" cap="flat">
+                      <a:solidFill>
+                        <a:srgbClr val="EAF1ED"/>
+                      </a:solidFill>
+                    </a:lnR>
+                    <a:lnT w="9525" cap="flat">
+                      <a:solidFill>
+                        <a:srgbClr val="EAF1ED"/>
+                      </a:solidFill>
+                    </a:lnT>
+                    <a:lnB w="9525" cap="flat">
+                      <a:solidFill>
+                        <a:srgbClr val="EAF1ED"/>
+                      </a:solidFill>
+                    </a:lnB>
+                    <a:solidFill>
+                      <a:srgbClr val="FFFFFF"/>
+                    </a:solidFill>
+                  </a:tcPr>
+                </a:tc>
+                <a:tc>
+                  <a:txBody>
+                    <a:bodyPr wrap="none"/>
+                    <a:lstStyle/>
+                    <a:p>
+                      <a:pPr algn="r"/>
+                      <a:r>
+                        <a:rPr sz="840" b="0">
+                          <a:solidFill>
+                            <a:srgbClr val="9FB0A8"/>
+                          </a:solidFill>
+                          <a:latin typeface="Segoe UI"/>
+                        </a:rPr>
+                        <a:t>147,087</a:t>
+                      </a:r>
+                    </a:p>
+                  </a:txBody>
+                  <a:tcPr anchor="ctr" marL="54864" marR="54864" marT="9144" marB="9144">
+                    <a:lnL w="9525" cap="flat">
+                      <a:solidFill>
+                        <a:srgbClr val="EAF1ED"/>
+                      </a:solidFill>
+                    </a:lnL>
+                    <a:lnR w="9525" cap="flat">
+                      <a:solidFill>
+                        <a:srgbClr val="EAF1ED"/>
+                      </a:solidFill>
+                    </a:lnR>
+                    <a:lnT w="9525" cap="flat">
+                      <a:solidFill>
+                        <a:srgbClr val="EAF1ED"/>
+                      </a:solidFill>
+                    </a:lnT>
+                    <a:lnB w="9525" cap="flat">
+                      <a:solidFill>
+                        <a:srgbClr val="EAF1ED"/>
+                      </a:solidFill>
+                    </a:lnB>
+                    <a:solidFill>
+                      <a:srgbClr val="FFFFFF"/>
+                    </a:solidFill>
+                  </a:tcPr>
+                </a:tc>
+                <a:tc>
+                  <a:txBody>
+                    <a:bodyPr wrap="none"/>
+                    <a:lstStyle/>
+                    <a:p>
+                      <a:pPr algn="r"/>
+                      <a:r>
+                        <a:rPr sz="840" b="0">
+                          <a:solidFill>
+                            <a:srgbClr val="9FB0A8"/>
+                          </a:solidFill>
+                          <a:latin typeface="Segoe UI"/>
+                        </a:rPr>
                         <a:t>8.7%</a:t>
                       </a:r>
                     </a:p>
@@ -5630,50 +8484,181 @@
                       </a:solidFill>
                     </a:lnB>
                     <a:solidFill>
-                      <a:srgbClr val="EAFAEF"/>
-                    </a:solidFill>
-                  </a:tcPr>
-                </a:tc>
-                <a:tc>
-                  <a:txBody>
-                    <a:bodyPr wrap="none"/>
-                    <a:lstStyle/>
-                    <a:p>
-                      <a:pPr algn="r"/>
+                      <a:srgbClr val="FFFFFF"/>
+                    </a:solidFill>
+                  </a:tcPr>
+                </a:tc>
+                <a:tc>
+                  <a:txBody>
+                    <a:bodyPr wrap="none"/>
+                    <a:lstStyle/>
+                    <a:p>
+                      <a:pPr algn="r"/>
+                      <a:r>
+                        <a:rPr sz="840" b="0">
+                          <a:solidFill>
+                            <a:srgbClr val="9FB0A8"/>
+                          </a:solidFill>
+                          <a:latin typeface="Segoe UI"/>
+                        </a:rPr>
+                        <a:t>145,556</a:t>
+                      </a:r>
+                    </a:p>
+                  </a:txBody>
+                  <a:tcPr anchor="ctr" marL="54864" marR="54864" marT="9144" marB="9144">
+                    <a:lnL w="9525" cap="flat">
+                      <a:solidFill>
+                        <a:srgbClr val="EAF1ED"/>
+                      </a:solidFill>
+                    </a:lnL>
+                    <a:lnR w="9525" cap="flat">
+                      <a:solidFill>
+                        <a:srgbClr val="EAF1ED"/>
+                      </a:solidFill>
+                    </a:lnR>
+                    <a:lnT w="9525" cap="flat">
+                      <a:solidFill>
+                        <a:srgbClr val="EAF1ED"/>
+                      </a:solidFill>
+                    </a:lnT>
+                    <a:lnB w="9525" cap="flat">
+                      <a:solidFill>
+                        <a:srgbClr val="EAF1ED"/>
+                      </a:solidFill>
+                    </a:lnB>
+                    <a:solidFill>
+                      <a:srgbClr val="FFFFFF"/>
+                    </a:solidFill>
+                  </a:tcPr>
+                </a:tc>
+                <a:tc>
+                  <a:txBody>
+                    <a:bodyPr wrap="none"/>
+                    <a:lstStyle/>
+                    <a:p>
+                      <a:pPr algn="r"/>
+                      <a:r>
+                        <a:rPr sz="840" b="0">
+                          <a:solidFill>
+                            <a:srgbClr val="9FB0A8"/>
+                          </a:solidFill>
+                          <a:latin typeface="Segoe UI"/>
+                        </a:rPr>
+                        <a:t>1,871</a:t>
+                      </a:r>
+                    </a:p>
+                  </a:txBody>
+                  <a:tcPr anchor="ctr" marL="54864" marR="54864" marT="9144" marB="9144">
+                    <a:lnL w="9525" cap="flat">
+                      <a:solidFill>
+                        <a:srgbClr val="EAF1ED"/>
+                      </a:solidFill>
+                    </a:lnL>
+                    <a:lnR w="9525" cap="flat">
+                      <a:solidFill>
+                        <a:srgbClr val="EAF1ED"/>
+                      </a:solidFill>
+                    </a:lnR>
+                    <a:lnT w="9525" cap="flat">
+                      <a:solidFill>
+                        <a:srgbClr val="EAF1ED"/>
+                      </a:solidFill>
+                    </a:lnT>
+                    <a:lnB w="9525" cap="flat">
+                      <a:solidFill>
+                        <a:srgbClr val="EAF1ED"/>
+                      </a:solidFill>
+                    </a:lnB>
+                    <a:solidFill>
+                      <a:srgbClr val="FFFFFF"/>
+                    </a:solidFill>
+                  </a:tcPr>
+                </a:tc>
+                <a:tc>
+                  <a:txBody>
+                    <a:bodyPr wrap="none"/>
+                    <a:lstStyle/>
+                    <a:p>
+                      <a:pPr algn="r"/>
+                      <a:r>
+                        <a:rPr sz="840" b="0">
+                          <a:solidFill>
+                            <a:srgbClr val="9FB0A8"/>
+                          </a:solidFill>
+                          <a:latin typeface="Segoe UI"/>
+                        </a:rPr>
+                        <a:t>549</a:t>
+                      </a:r>
+                    </a:p>
+                  </a:txBody>
+                  <a:tcPr anchor="ctr" marL="54864" marR="54864" marT="9144" marB="9144">
+                    <a:lnL w="9525" cap="flat">
+                      <a:solidFill>
+                        <a:srgbClr val="EAF1ED"/>
+                      </a:solidFill>
+                    </a:lnL>
+                    <a:lnR w="9525" cap="flat">
+                      <a:solidFill>
+                        <a:srgbClr val="EAF1ED"/>
+                      </a:solidFill>
+                    </a:lnR>
+                    <a:lnT w="9525" cap="flat">
+                      <a:solidFill>
+                        <a:srgbClr val="EAF1ED"/>
+                      </a:solidFill>
+                    </a:lnT>
+                    <a:lnB w="9525" cap="flat">
+                      <a:solidFill>
+                        <a:srgbClr val="EAF1ED"/>
+                      </a:solidFill>
+                    </a:lnB>
+                    <a:solidFill>
+                      <a:srgbClr val="FFFFFF"/>
+                    </a:solidFill>
+                  </a:tcPr>
+                </a:tc>
+              </a:tr>
+              <a:tr h="224028">
+                <a:tc>
+                  <a:txBody>
+                    <a:bodyPr wrap="none"/>
+                    <a:lstStyle/>
+                    <a:p>
+                      <a:pPr algn="ctr"/>
                       <a:r>
                         <a:rPr sz="840" b="1">
                           <a:solidFill>
-                            <a:srgbClr val="1F5130"/>
-                          </a:solidFill>
-                          <a:latin typeface="Segoe UI"/>
-                        </a:rPr>
-                        <a:t>140,065</a:t>
-                      </a:r>
-                    </a:p>
-                  </a:txBody>
-                  <a:tcPr anchor="ctr" marL="54864" marR="54864" marT="9144" marB="9144">
-                    <a:lnL w="9525" cap="flat">
-                      <a:solidFill>
-                        <a:srgbClr val="EAF1ED"/>
-                      </a:solidFill>
-                    </a:lnL>
-                    <a:lnR w="9525" cap="flat">
-                      <a:solidFill>
-                        <a:srgbClr val="EAF1ED"/>
-                      </a:solidFill>
-                    </a:lnR>
-                    <a:lnT w="9525" cap="flat">
-                      <a:solidFill>
-                        <a:srgbClr val="EAF1ED"/>
-                      </a:solidFill>
-                    </a:lnT>
-                    <a:lnB w="9525" cap="flat">
-                      <a:solidFill>
-                        <a:srgbClr val="EAF1ED"/>
-                      </a:solidFill>
-                    </a:lnB>
-                    <a:solidFill>
-                      <a:srgbClr val="EAFAEF"/>
+                            <a:srgbClr val="112233"/>
+                          </a:solidFill>
+                          <a:latin typeface="Segoe UI"/>
+                        </a:rPr>
+                        <a:t>B12</a:t>
+                      </a:r>
+                    </a:p>
+                  </a:txBody>
+                  <a:tcPr anchor="ctr" marL="54864" marR="54864" marT="9144" marB="9144">
+                    <a:lnL w="9525" cap="flat">
+                      <a:solidFill>
+                        <a:srgbClr val="EAF1ED"/>
+                      </a:solidFill>
+                    </a:lnL>
+                    <a:lnR w="9525" cap="flat">
+                      <a:solidFill>
+                        <a:srgbClr val="EAF1ED"/>
+                      </a:solidFill>
+                    </a:lnR>
+                    <a:lnT w="9525" cap="flat">
+                      <a:solidFill>
+                        <a:srgbClr val="EAF1ED"/>
+                      </a:solidFill>
+                    </a:lnT>
+                    <a:lnB w="9525" cap="flat">
+                      <a:solidFill>
+                        <a:srgbClr val="EAF1ED"/>
+                      </a:solidFill>
+                    </a:lnB>
+                    <a:solidFill>
+                      <a:srgbClr val="EAADAD"/>
                     </a:solidFill>
                   </a:tcPr>
                 </a:tc>
@@ -5686,37 +8671,37 @@
                       <a:r>
                         <a:rPr sz="840" b="0">
                           <a:solidFill>
-                            <a:srgbClr val="14271D"/>
-                          </a:solidFill>
-                          <a:latin typeface="Segoe UI"/>
-                        </a:rPr>
-                        <a:t>8.3%</a:t>
-                      </a:r>
-                    </a:p>
-                  </a:txBody>
-                  <a:tcPr anchor="ctr" marL="54864" marR="54864" marT="9144" marB="9144">
-                    <a:lnL w="9525" cap="flat">
-                      <a:solidFill>
-                        <a:srgbClr val="EAF1ED"/>
-                      </a:solidFill>
-                    </a:lnL>
-                    <a:lnR w="9525" cap="flat">
-                      <a:solidFill>
-                        <a:srgbClr val="EAF1ED"/>
-                      </a:solidFill>
-                    </a:lnR>
-                    <a:lnT w="9525" cap="flat">
-                      <a:solidFill>
-                        <a:srgbClr val="EAF1ED"/>
-                      </a:solidFill>
-                    </a:lnT>
-                    <a:lnB w="9525" cap="flat">
-                      <a:solidFill>
-                        <a:srgbClr val="EAF1ED"/>
-                      </a:solidFill>
-                    </a:lnB>
-                    <a:solidFill>
-                      <a:srgbClr val="EAFAEF"/>
+                            <a:srgbClr val="9FB0A8"/>
+                          </a:solidFill>
+                          <a:latin typeface="Segoe UI"/>
+                        </a:rPr>
+                        <a:t>47.8%</a:t>
+                      </a:r>
+                    </a:p>
+                  </a:txBody>
+                  <a:tcPr anchor="ctr" marL="54864" marR="54864" marT="9144" marB="9144">
+                    <a:lnL w="9525" cap="flat">
+                      <a:solidFill>
+                        <a:srgbClr val="EAF1ED"/>
+                      </a:solidFill>
+                    </a:lnL>
+                    <a:lnR w="9525" cap="flat">
+                      <a:solidFill>
+                        <a:srgbClr val="EAF1ED"/>
+                      </a:solidFill>
+                    </a:lnR>
+                    <a:lnT w="9525" cap="flat">
+                      <a:solidFill>
+                        <a:srgbClr val="EAF1ED"/>
+                      </a:solidFill>
+                    </a:lnT>
+                    <a:lnB w="9525" cap="flat">
+                      <a:solidFill>
+                        <a:srgbClr val="EAF1ED"/>
+                      </a:solidFill>
+                    </a:lnB>
+                    <a:solidFill>
+                      <a:srgbClr val="FFFFFF"/>
                     </a:solidFill>
                   </a:tcPr>
                 </a:tc>
@@ -5729,37 +8714,37 @@
                       <a:r>
                         <a:rPr sz="840" b="0">
                           <a:solidFill>
-                            <a:srgbClr val="14271D"/>
-                          </a:solidFill>
-                          <a:latin typeface="Segoe UI"/>
-                        </a:rPr>
-                        <a:t>117,373</a:t>
-                      </a:r>
-                    </a:p>
-                  </a:txBody>
-                  <a:tcPr anchor="ctr" marL="54864" marR="54864" marT="9144" marB="9144">
-                    <a:lnL w="9525" cap="flat">
-                      <a:solidFill>
-                        <a:srgbClr val="EAF1ED"/>
-                      </a:solidFill>
-                    </a:lnL>
-                    <a:lnR w="9525" cap="flat">
-                      <a:solidFill>
-                        <a:srgbClr val="EAF1ED"/>
-                      </a:solidFill>
-                    </a:lnR>
-                    <a:lnT w="9525" cap="flat">
-                      <a:solidFill>
-                        <a:srgbClr val="EAF1ED"/>
-                      </a:solidFill>
-                    </a:lnT>
-                    <a:lnB w="9525" cap="flat">
-                      <a:solidFill>
-                        <a:srgbClr val="EAF1ED"/>
-                      </a:solidFill>
-                    </a:lnB>
-                    <a:solidFill>
-                      <a:srgbClr val="EAFAEF"/>
+                            <a:srgbClr val="9FB0A8"/>
+                          </a:solidFill>
+                          <a:latin typeface="Segoe UI"/>
+                        </a:rPr>
+                        <a:t>36.9%</a:t>
+                      </a:r>
+                    </a:p>
+                  </a:txBody>
+                  <a:tcPr anchor="ctr" marL="54864" marR="54864" marT="9144" marB="9144">
+                    <a:lnL w="9525" cap="flat">
+                      <a:solidFill>
+                        <a:srgbClr val="EAF1ED"/>
+                      </a:solidFill>
+                    </a:lnL>
+                    <a:lnR w="9525" cap="flat">
+                      <a:solidFill>
+                        <a:srgbClr val="EAF1ED"/>
+                      </a:solidFill>
+                    </a:lnR>
+                    <a:lnT w="9525" cap="flat">
+                      <a:solidFill>
+                        <a:srgbClr val="EAF1ED"/>
+                      </a:solidFill>
+                    </a:lnT>
+                    <a:lnB w="9525" cap="flat">
+                      <a:solidFill>
+                        <a:srgbClr val="EAF1ED"/>
+                      </a:solidFill>
+                    </a:lnB>
+                    <a:solidFill>
+                      <a:srgbClr val="FFFFFF"/>
                     </a:solidFill>
                   </a:tcPr>
                 </a:tc>
@@ -5772,37 +8757,37 @@
                       <a:r>
                         <a:rPr sz="840" b="0">
                           <a:solidFill>
-                            <a:srgbClr val="14271D"/>
-                          </a:solidFill>
-                          <a:latin typeface="Segoe UI"/>
-                        </a:rPr>
-                        <a:t>13,937</a:t>
-                      </a:r>
-                    </a:p>
-                  </a:txBody>
-                  <a:tcPr anchor="ctr" marL="54864" marR="54864" marT="9144" marB="9144">
-                    <a:lnL w="9525" cap="flat">
-                      <a:solidFill>
-                        <a:srgbClr val="EAF1ED"/>
-                      </a:solidFill>
-                    </a:lnL>
-                    <a:lnR w="9525" cap="flat">
-                      <a:solidFill>
-                        <a:srgbClr val="EAF1ED"/>
-                      </a:solidFill>
-                    </a:lnR>
-                    <a:lnT w="9525" cap="flat">
-                      <a:solidFill>
-                        <a:srgbClr val="EAF1ED"/>
-                      </a:solidFill>
-                    </a:lnT>
-                    <a:lnB w="9525" cap="flat">
-                      <a:solidFill>
-                        <a:srgbClr val="EAF1ED"/>
-                      </a:solidFill>
-                    </a:lnB>
-                    <a:solidFill>
-                      <a:srgbClr val="EAFAEF"/>
+                            <a:srgbClr val="9FB0A8"/>
+                          </a:solidFill>
+                          <a:latin typeface="Segoe UI"/>
+                        </a:rPr>
+                        <a:t>70,579</a:t>
+                      </a:r>
+                    </a:p>
+                  </a:txBody>
+                  <a:tcPr anchor="ctr" marL="54864" marR="54864" marT="9144" marB="9144">
+                    <a:lnL w="9525" cap="flat">
+                      <a:solidFill>
+                        <a:srgbClr val="EAF1ED"/>
+                      </a:solidFill>
+                    </a:lnL>
+                    <a:lnR w="9525" cap="flat">
+                      <a:solidFill>
+                        <a:srgbClr val="EAF1ED"/>
+                      </a:solidFill>
+                    </a:lnR>
+                    <a:lnT w="9525" cap="flat">
+                      <a:solidFill>
+                        <a:srgbClr val="EAF1ED"/>
+                      </a:solidFill>
+                    </a:lnT>
+                    <a:lnB w="9525" cap="flat">
+                      <a:solidFill>
+                        <a:srgbClr val="EAF1ED"/>
+                      </a:solidFill>
+                    </a:lnB>
+                    <a:solidFill>
+                      <a:srgbClr val="FFFFFF"/>
                     </a:solidFill>
                   </a:tcPr>
                 </a:tc>
@@ -5815,42 +8800,171 @@
                       <a:r>
                         <a:rPr sz="840" b="0">
                           <a:solidFill>
-                            <a:srgbClr val="14271D"/>
-                          </a:solidFill>
-                          <a:latin typeface="Segoe UI"/>
-                        </a:rPr>
-                        <a:t>664</a:t>
-                      </a:r>
-                    </a:p>
-                  </a:txBody>
-                  <a:tcPr anchor="ctr" marL="54864" marR="54864" marT="9144" marB="9144">
-                    <a:lnL w="9525" cap="flat">
-                      <a:solidFill>
-                        <a:srgbClr val="EAF1ED"/>
-                      </a:solidFill>
-                    </a:lnL>
-                    <a:lnR w="9525" cap="flat">
-                      <a:solidFill>
-                        <a:srgbClr val="EAF1ED"/>
-                      </a:solidFill>
-                    </a:lnR>
-                    <a:lnT w="9525" cap="flat">
-                      <a:solidFill>
-                        <a:srgbClr val="EAF1ED"/>
-                      </a:solidFill>
-                    </a:lnT>
-                    <a:lnB w="9525" cap="flat">
-                      <a:solidFill>
-                        <a:srgbClr val="EAF1ED"/>
-                      </a:solidFill>
-                    </a:lnB>
-                    <a:solidFill>
-                      <a:srgbClr val="EAFAEF"/>
+                            <a:srgbClr val="9FB0A8"/>
+                          </a:solidFill>
+                          <a:latin typeface="Segoe UI"/>
+                        </a:rPr>
+                        <a:t>4.2%</a:t>
+                      </a:r>
+                    </a:p>
+                  </a:txBody>
+                  <a:tcPr anchor="ctr" marL="54864" marR="54864" marT="9144" marB="9144">
+                    <a:lnL w="9525" cap="flat">
+                      <a:solidFill>
+                        <a:srgbClr val="EAF1ED"/>
+                      </a:solidFill>
+                    </a:lnL>
+                    <a:lnR w="9525" cap="flat">
+                      <a:solidFill>
+                        <a:srgbClr val="EAF1ED"/>
+                      </a:solidFill>
+                    </a:lnR>
+                    <a:lnT w="9525" cap="flat">
+                      <a:solidFill>
+                        <a:srgbClr val="EAF1ED"/>
+                      </a:solidFill>
+                    </a:lnT>
+                    <a:lnB w="9525" cap="flat">
+                      <a:solidFill>
+                        <a:srgbClr val="EAF1ED"/>
+                      </a:solidFill>
+                    </a:lnB>
+                    <a:solidFill>
+                      <a:srgbClr val="FFFFFF"/>
+                    </a:solidFill>
+                  </a:tcPr>
+                </a:tc>
+                <a:tc>
+                  <a:txBody>
+                    <a:bodyPr wrap="none"/>
+                    <a:lstStyle/>
+                    <a:p>
+                      <a:pPr algn="r"/>
+                      <a:r>
+                        <a:rPr sz="840" b="0">
+                          <a:solidFill>
+                            <a:srgbClr val="9FB0A8"/>
+                          </a:solidFill>
+                          <a:latin typeface="Segoe UI"/>
+                        </a:rPr>
+                        <a:t>70,323</a:t>
+                      </a:r>
+                    </a:p>
+                  </a:txBody>
+                  <a:tcPr anchor="ctr" marL="54864" marR="54864" marT="9144" marB="9144">
+                    <a:lnL w="9525" cap="flat">
+                      <a:solidFill>
+                        <a:srgbClr val="EAF1ED"/>
+                      </a:solidFill>
+                    </a:lnL>
+                    <a:lnR w="9525" cap="flat">
+                      <a:solidFill>
+                        <a:srgbClr val="EAF1ED"/>
+                      </a:solidFill>
+                    </a:lnR>
+                    <a:lnT w="9525" cap="flat">
+                      <a:solidFill>
+                        <a:srgbClr val="EAF1ED"/>
+                      </a:solidFill>
+                    </a:lnT>
+                    <a:lnB w="9525" cap="flat">
+                      <a:solidFill>
+                        <a:srgbClr val="EAF1ED"/>
+                      </a:solidFill>
+                    </a:lnB>
+                    <a:solidFill>
+                      <a:srgbClr val="FFFFFF"/>
+                    </a:solidFill>
+                  </a:tcPr>
+                </a:tc>
+                <a:tc>
+                  <a:txBody>
+                    <a:bodyPr wrap="none"/>
+                    <a:lstStyle/>
+                    <a:p>
+                      <a:pPr algn="r"/>
+                      <a:r>
+                        <a:rPr sz="840" b="0">
+                          <a:solidFill>
+                            <a:srgbClr val="9FB0A8"/>
+                          </a:solidFill>
+                          <a:latin typeface="Segoe UI"/>
+                        </a:rPr>
+                        <a:t>3,844</a:t>
+                      </a:r>
+                    </a:p>
+                  </a:txBody>
+                  <a:tcPr anchor="ctr" marL="54864" marR="54864" marT="9144" marB="9144">
+                    <a:lnL w="9525" cap="flat">
+                      <a:solidFill>
+                        <a:srgbClr val="EAF1ED"/>
+                      </a:solidFill>
+                    </a:lnL>
+                    <a:lnR w="9525" cap="flat">
+                      <a:solidFill>
+                        <a:srgbClr val="EAF1ED"/>
+                      </a:solidFill>
+                    </a:lnR>
+                    <a:lnT w="9525" cap="flat">
+                      <a:solidFill>
+                        <a:srgbClr val="EAF1ED"/>
+                      </a:solidFill>
+                    </a:lnT>
+                    <a:lnB w="9525" cap="flat">
+                      <a:solidFill>
+                        <a:srgbClr val="EAF1ED"/>
+                      </a:solidFill>
+                    </a:lnB>
+                    <a:solidFill>
+                      <a:srgbClr val="FFFFFF"/>
+                    </a:solidFill>
+                  </a:tcPr>
+                </a:tc>
+                <a:tc>
+                  <a:txBody>
+                    <a:bodyPr wrap="none"/>
+                    <a:lstStyle/>
+                    <a:p>
+                      <a:pPr algn="r"/>
+                      <a:r>
+                        <a:rPr sz="840" b="0">
+                          <a:solidFill>
+                            <a:srgbClr val="9FB0A8"/>
+                          </a:solidFill>
+                          <a:latin typeface="Segoe UI"/>
+                        </a:rPr>
+                        <a:t>522</a:t>
+                      </a:r>
+                    </a:p>
+                  </a:txBody>
+                  <a:tcPr anchor="ctr" marL="54864" marR="54864" marT="9144" marB="9144">
+                    <a:lnL w="9525" cap="flat">
+                      <a:solidFill>
+                        <a:srgbClr val="EAF1ED"/>
+                      </a:solidFill>
+                    </a:lnL>
+                    <a:lnR w="9525" cap="flat">
+                      <a:solidFill>
+                        <a:srgbClr val="EAF1ED"/>
+                      </a:solidFill>
+                    </a:lnR>
+                    <a:lnT w="9525" cap="flat">
+                      <a:solidFill>
+                        <a:srgbClr val="EAF1ED"/>
+                      </a:solidFill>
+                    </a:lnT>
+                    <a:lnB w="9525" cap="flat">
+                      <a:solidFill>
+                        <a:srgbClr val="EAF1ED"/>
+                      </a:solidFill>
+                    </a:lnB>
+                    <a:solidFill>
+                      <a:srgbClr val="FFFFFF"/>
                     </a:solidFill>
                   </a:tcPr>
                 </a:tc>
               </a:tr>
-              <a:tr h="242316">
+              <a:tr h="224028">
                 <a:tc>
                   <a:txBody>
                     <a:bodyPr wrap="none"/>
@@ -5864,33 +8978,33 @@
                           </a:solidFill>
                           <a:latin typeface="Segoe UI"/>
                         </a:rPr>
-                        <a:t>B4</a:t>
-                      </a:r>
-                    </a:p>
-                  </a:txBody>
-                  <a:tcPr anchor="ctr" marL="54864" marR="54864" marT="9144" marB="9144">
-                    <a:lnL w="9525" cap="flat">
-                      <a:solidFill>
-                        <a:srgbClr val="EAF1ED"/>
-                      </a:solidFill>
-                    </a:lnL>
-                    <a:lnR w="9525" cap="flat">
-                      <a:solidFill>
-                        <a:srgbClr val="EAF1ED"/>
-                      </a:solidFill>
-                    </a:lnR>
-                    <a:lnT w="9525" cap="flat">
-                      <a:solidFill>
-                        <a:srgbClr val="EAF1ED"/>
-                      </a:solidFill>
-                    </a:lnT>
-                    <a:lnB w="9525" cap="flat">
-                      <a:solidFill>
-                        <a:srgbClr val="EAF1ED"/>
-                      </a:solidFill>
-                    </a:lnB>
-                    <a:solidFill>
-                      <a:srgbClr val="C7EAAD"/>
+                        <a:t>B13</a:t>
+                      </a:r>
+                    </a:p>
+                  </a:txBody>
+                  <a:tcPr anchor="ctr" marL="54864" marR="54864" marT="9144" marB="9144">
+                    <a:lnL w="9525" cap="flat">
+                      <a:solidFill>
+                        <a:srgbClr val="EAF1ED"/>
+                      </a:solidFill>
+                    </a:lnL>
+                    <a:lnR w="9525" cap="flat">
+                      <a:solidFill>
+                        <a:srgbClr val="EAF1ED"/>
+                      </a:solidFill>
+                    </a:lnR>
+                    <a:lnT w="9525" cap="flat">
+                      <a:solidFill>
+                        <a:srgbClr val="EAF1ED"/>
+                      </a:solidFill>
+                    </a:lnT>
+                    <a:lnB w="9525" cap="flat">
+                      <a:solidFill>
+                        <a:srgbClr val="EAF1ED"/>
+                      </a:solidFill>
+                    </a:lnB>
+                    <a:solidFill>
+                      <a:srgbClr val="EAADB9"/>
                     </a:solidFill>
                   </a:tcPr>
                 </a:tc>
@@ -5907,7 +9021,7 @@
                           </a:solidFill>
                           <a:latin typeface="Segoe UI"/>
                         </a:rPr>
-                        <a:t>35.2%</a:t>
+                        <a:t>52.2%</a:t>
                       </a:r>
                     </a:p>
                   </a:txBody>
@@ -5950,7 +9064,7 @@
                           </a:solidFill>
                           <a:latin typeface="Segoe UI"/>
                         </a:rPr>
-                        <a:t>9.4%</a:t>
+                        <a:t>39.7%</a:t>
                       </a:r>
                     </a:p>
                   </a:txBody>
@@ -5993,7 +9107,7 @@
                           </a:solidFill>
                           <a:latin typeface="Segoe UI"/>
                         </a:rPr>
-                        <a:t>187,958</a:t>
+                        <a:t>223,194</a:t>
                       </a:r>
                     </a:p>
                   </a:txBody>
@@ -6036,7 +9150,7 @@
                           </a:solidFill>
                           <a:latin typeface="Segoe UI"/>
                         </a:rPr>
-                        <a:t>11.1%</a:t>
+                        <a:t>13.1%</a:t>
                       </a:r>
                     </a:p>
                   </a:txBody>
@@ -6079,7 +9193,7 @@
                           </a:solidFill>
                           <a:latin typeface="Segoe UI"/>
                         </a:rPr>
-                        <a:t>177,463</a:t>
+                        <a:t>222,592</a:t>
                       </a:r>
                     </a:p>
                   </a:txBody>
@@ -6122,2775 +9236,7 @@
                           </a:solidFill>
                           <a:latin typeface="Segoe UI"/>
                         </a:rPr>
-                        <a:t>5,434</a:t>
-                      </a:r>
-                    </a:p>
-                  </a:txBody>
-                  <a:tcPr anchor="ctr" marL="54864" marR="54864" marT="9144" marB="9144">
-                    <a:lnL w="9525" cap="flat">
-                      <a:solidFill>
-                        <a:srgbClr val="EAF1ED"/>
-                      </a:solidFill>
-                    </a:lnL>
-                    <a:lnR w="9525" cap="flat">
-                      <a:solidFill>
-                        <a:srgbClr val="EAF1ED"/>
-                      </a:solidFill>
-                    </a:lnR>
-                    <a:lnT w="9525" cap="flat">
-                      <a:solidFill>
-                        <a:srgbClr val="EAF1ED"/>
-                      </a:solidFill>
-                    </a:lnT>
-                    <a:lnB w="9525" cap="flat">
-                      <a:solidFill>
-                        <a:srgbClr val="EAF1ED"/>
-                      </a:solidFill>
-                    </a:lnB>
-                    <a:solidFill>
-                      <a:srgbClr val="FFFFFF"/>
-                    </a:solidFill>
-                  </a:tcPr>
-                </a:tc>
-                <a:tc>
-                  <a:txBody>
-                    <a:bodyPr wrap="none"/>
-                    <a:lstStyle/>
-                    <a:p>
-                      <a:pPr algn="r"/>
-                      <a:r>
-                        <a:rPr sz="840" b="0">
-                          <a:solidFill>
-                            <a:srgbClr val="9FB0A8"/>
-                          </a:solidFill>
-                          <a:latin typeface="Segoe UI"/>
-                        </a:rPr>
-                        <a:t>647</a:t>
-                      </a:r>
-                    </a:p>
-                  </a:txBody>
-                  <a:tcPr anchor="ctr" marL="54864" marR="54864" marT="9144" marB="9144">
-                    <a:lnL w="9525" cap="flat">
-                      <a:solidFill>
-                        <a:srgbClr val="EAF1ED"/>
-                      </a:solidFill>
-                    </a:lnL>
-                    <a:lnR w="9525" cap="flat">
-                      <a:solidFill>
-                        <a:srgbClr val="EAF1ED"/>
-                      </a:solidFill>
-                    </a:lnR>
-                    <a:lnT w="9525" cap="flat">
-                      <a:solidFill>
-                        <a:srgbClr val="EAF1ED"/>
-                      </a:solidFill>
-                    </a:lnT>
-                    <a:lnB w="9525" cap="flat">
-                      <a:solidFill>
-                        <a:srgbClr val="EAF1ED"/>
-                      </a:solidFill>
-                    </a:lnB>
-                    <a:solidFill>
-                      <a:srgbClr val="FFFFFF"/>
-                    </a:solidFill>
-                  </a:tcPr>
-                </a:tc>
-              </a:tr>
-              <a:tr h="242316">
-                <a:tc>
-                  <a:txBody>
-                    <a:bodyPr wrap="none"/>
-                    <a:lstStyle/>
-                    <a:p>
-                      <a:pPr algn="ctr"/>
-                      <a:r>
-                        <a:rPr sz="840" b="1">
-                          <a:solidFill>
-                            <a:srgbClr val="112233"/>
-                          </a:solidFill>
-                          <a:latin typeface="Segoe UI"/>
-                        </a:rPr>
-                        <a:t>B5</a:t>
-                      </a:r>
-                    </a:p>
-                  </a:txBody>
-                  <a:tcPr anchor="ctr" marL="54864" marR="54864" marT="9144" marB="9144">
-                    <a:lnL w="9525" cap="flat">
-                      <a:solidFill>
-                        <a:srgbClr val="EAF1ED"/>
-                      </a:solidFill>
-                    </a:lnL>
-                    <a:lnR w="9525" cap="flat">
-                      <a:solidFill>
-                        <a:srgbClr val="EAF1ED"/>
-                      </a:solidFill>
-                    </a:lnR>
-                    <a:lnT w="9525" cap="flat">
-                      <a:solidFill>
-                        <a:srgbClr val="EAF1ED"/>
-                      </a:solidFill>
-                    </a:lnT>
-                    <a:lnB w="9525" cap="flat">
-                      <a:solidFill>
-                        <a:srgbClr val="EAF1ED"/>
-                      </a:solidFill>
-                    </a:lnB>
-                    <a:solidFill>
-                      <a:srgbClr val="D3EAAD"/>
-                    </a:solidFill>
-                  </a:tcPr>
-                </a:tc>
-                <a:tc>
-                  <a:txBody>
-                    <a:bodyPr wrap="none"/>
-                    <a:lstStyle/>
-                    <a:p>
-                      <a:pPr algn="r"/>
-                      <a:r>
-                        <a:rPr sz="840" b="0">
-                          <a:solidFill>
-                            <a:srgbClr val="9FB0A8"/>
-                          </a:solidFill>
-                          <a:latin typeface="Segoe UI"/>
-                        </a:rPr>
-                        <a:t>39.6%</a:t>
-                      </a:r>
-                    </a:p>
-                  </a:txBody>
-                  <a:tcPr anchor="ctr" marL="54864" marR="54864" marT="9144" marB="9144">
-                    <a:lnL w="9525" cap="flat">
-                      <a:solidFill>
-                        <a:srgbClr val="EAF1ED"/>
-                      </a:solidFill>
-                    </a:lnL>
-                    <a:lnR w="9525" cap="flat">
-                      <a:solidFill>
-                        <a:srgbClr val="EAF1ED"/>
-                      </a:solidFill>
-                    </a:lnR>
-                    <a:lnT w="9525" cap="flat">
-                      <a:solidFill>
-                        <a:srgbClr val="EAF1ED"/>
-                      </a:solidFill>
-                    </a:lnT>
-                    <a:lnB w="9525" cap="flat">
-                      <a:solidFill>
-                        <a:srgbClr val="EAF1ED"/>
-                      </a:solidFill>
-                    </a:lnB>
-                    <a:solidFill>
-                      <a:srgbClr val="FFFFFF"/>
-                    </a:solidFill>
-                  </a:tcPr>
-                </a:tc>
-                <a:tc>
-                  <a:txBody>
-                    <a:bodyPr wrap="none"/>
-                    <a:lstStyle/>
-                    <a:p>
-                      <a:pPr algn="r"/>
-                      <a:r>
-                        <a:rPr sz="840" b="0">
-                          <a:solidFill>
-                            <a:srgbClr val="9FB0A8"/>
-                          </a:solidFill>
-                          <a:latin typeface="Segoe UI"/>
-                        </a:rPr>
-                        <a:t>13.4%</a:t>
-                      </a:r>
-                    </a:p>
-                  </a:txBody>
-                  <a:tcPr anchor="ctr" marL="54864" marR="54864" marT="9144" marB="9144">
-                    <a:lnL w="9525" cap="flat">
-                      <a:solidFill>
-                        <a:srgbClr val="EAF1ED"/>
-                      </a:solidFill>
-                    </a:lnL>
-                    <a:lnR w="9525" cap="flat">
-                      <a:solidFill>
-                        <a:srgbClr val="EAF1ED"/>
-                      </a:solidFill>
-                    </a:lnR>
-                    <a:lnT w="9525" cap="flat">
-                      <a:solidFill>
-                        <a:srgbClr val="EAF1ED"/>
-                      </a:solidFill>
-                    </a:lnT>
-                    <a:lnB w="9525" cap="flat">
-                      <a:solidFill>
-                        <a:srgbClr val="EAF1ED"/>
-                      </a:solidFill>
-                    </a:lnB>
-                    <a:solidFill>
-                      <a:srgbClr val="FFFFFF"/>
-                    </a:solidFill>
-                  </a:tcPr>
-                </a:tc>
-                <a:tc>
-                  <a:txBody>
-                    <a:bodyPr wrap="none"/>
-                    <a:lstStyle/>
-                    <a:p>
-                      <a:pPr algn="r"/>
-                      <a:r>
-                        <a:rPr sz="840" b="0">
-                          <a:solidFill>
-                            <a:srgbClr val="9FB0A8"/>
-                          </a:solidFill>
-                          <a:latin typeface="Segoe UI"/>
-                        </a:rPr>
-                        <a:t>114,041</a:t>
-                      </a:r>
-                    </a:p>
-                  </a:txBody>
-                  <a:tcPr anchor="ctr" marL="54864" marR="54864" marT="9144" marB="9144">
-                    <a:lnL w="9525" cap="flat">
-                      <a:solidFill>
-                        <a:srgbClr val="EAF1ED"/>
-                      </a:solidFill>
-                    </a:lnL>
-                    <a:lnR w="9525" cap="flat">
-                      <a:solidFill>
-                        <a:srgbClr val="EAF1ED"/>
-                      </a:solidFill>
-                    </a:lnR>
-                    <a:lnT w="9525" cap="flat">
-                      <a:solidFill>
-                        <a:srgbClr val="EAF1ED"/>
-                      </a:solidFill>
-                    </a:lnT>
-                    <a:lnB w="9525" cap="flat">
-                      <a:solidFill>
-                        <a:srgbClr val="EAF1ED"/>
-                      </a:solidFill>
-                    </a:lnB>
-                    <a:solidFill>
-                      <a:srgbClr val="FFFFFF"/>
-                    </a:solidFill>
-                  </a:tcPr>
-                </a:tc>
-                <a:tc>
-                  <a:txBody>
-                    <a:bodyPr wrap="none"/>
-                    <a:lstStyle/>
-                    <a:p>
-                      <a:pPr algn="r"/>
-                      <a:r>
-                        <a:rPr sz="840" b="0">
-                          <a:solidFill>
-                            <a:srgbClr val="9FB0A8"/>
-                          </a:solidFill>
-                          <a:latin typeface="Segoe UI"/>
-                        </a:rPr>
-                        <a:t>6.7%</a:t>
-                      </a:r>
-                    </a:p>
-                  </a:txBody>
-                  <a:tcPr anchor="ctr" marL="54864" marR="54864" marT="9144" marB="9144">
-                    <a:lnL w="9525" cap="flat">
-                      <a:solidFill>
-                        <a:srgbClr val="EAF1ED"/>
-                      </a:solidFill>
-                    </a:lnL>
-                    <a:lnR w="9525" cap="flat">
-                      <a:solidFill>
-                        <a:srgbClr val="EAF1ED"/>
-                      </a:solidFill>
-                    </a:lnR>
-                    <a:lnT w="9525" cap="flat">
-                      <a:solidFill>
-                        <a:srgbClr val="EAF1ED"/>
-                      </a:solidFill>
-                    </a:lnT>
-                    <a:lnB w="9525" cap="flat">
-                      <a:solidFill>
-                        <a:srgbClr val="EAF1ED"/>
-                      </a:solidFill>
-                    </a:lnB>
-                    <a:solidFill>
-                      <a:srgbClr val="FFFFFF"/>
-                    </a:solidFill>
-                  </a:tcPr>
-                </a:tc>
-                <a:tc>
-                  <a:txBody>
-                    <a:bodyPr wrap="none"/>
-                    <a:lstStyle/>
-                    <a:p>
-                      <a:pPr algn="r"/>
-                      <a:r>
-                        <a:rPr sz="840" b="0">
-                          <a:solidFill>
-                            <a:srgbClr val="9FB0A8"/>
-                          </a:solidFill>
-                          <a:latin typeface="Segoe UI"/>
-                        </a:rPr>
-                        <a:t>110,285</a:t>
-                      </a:r>
-                    </a:p>
-                  </a:txBody>
-                  <a:tcPr anchor="ctr" marL="54864" marR="54864" marT="9144" marB="9144">
-                    <a:lnL w="9525" cap="flat">
-                      <a:solidFill>
-                        <a:srgbClr val="EAF1ED"/>
-                      </a:solidFill>
-                    </a:lnL>
-                    <a:lnR w="9525" cap="flat">
-                      <a:solidFill>
-                        <a:srgbClr val="EAF1ED"/>
-                      </a:solidFill>
-                    </a:lnR>
-                    <a:lnT w="9525" cap="flat">
-                      <a:solidFill>
-                        <a:srgbClr val="EAF1ED"/>
-                      </a:solidFill>
-                    </a:lnT>
-                    <a:lnB w="9525" cap="flat">
-                      <a:solidFill>
-                        <a:srgbClr val="EAF1ED"/>
-                      </a:solidFill>
-                    </a:lnB>
-                    <a:solidFill>
-                      <a:srgbClr val="FFFFFF"/>
-                    </a:solidFill>
-                  </a:tcPr>
-                </a:tc>
-                <a:tc>
-                  <a:txBody>
-                    <a:bodyPr wrap="none"/>
-                    <a:lstStyle/>
-                    <a:p>
-                      <a:pPr algn="r"/>
-                      <a:r>
-                        <a:rPr sz="840" b="0">
-                          <a:solidFill>
-                            <a:srgbClr val="9FB0A8"/>
-                          </a:solidFill>
-                          <a:latin typeface="Segoe UI"/>
-                        </a:rPr>
-                        <a:t>4,018</a:t>
-                      </a:r>
-                    </a:p>
-                  </a:txBody>
-                  <a:tcPr anchor="ctr" marL="54864" marR="54864" marT="9144" marB="9144">
-                    <a:lnL w="9525" cap="flat">
-                      <a:solidFill>
-                        <a:srgbClr val="EAF1ED"/>
-                      </a:solidFill>
-                    </a:lnL>
-                    <a:lnR w="9525" cap="flat">
-                      <a:solidFill>
-                        <a:srgbClr val="EAF1ED"/>
-                      </a:solidFill>
-                    </a:lnR>
-                    <a:lnT w="9525" cap="flat">
-                      <a:solidFill>
-                        <a:srgbClr val="EAF1ED"/>
-                      </a:solidFill>
-                    </a:lnT>
-                    <a:lnB w="9525" cap="flat">
-                      <a:solidFill>
-                        <a:srgbClr val="EAF1ED"/>
-                      </a:solidFill>
-                    </a:lnB>
-                    <a:solidFill>
-                      <a:srgbClr val="FFFFFF"/>
-                    </a:solidFill>
-                  </a:tcPr>
-                </a:tc>
-                <a:tc>
-                  <a:txBody>
-                    <a:bodyPr wrap="none"/>
-                    <a:lstStyle/>
-                    <a:p>
-                      <a:pPr algn="r"/>
-                      <a:r>
-                        <a:rPr sz="840" b="0">
-                          <a:solidFill>
-                            <a:srgbClr val="9FB0A8"/>
-                          </a:solidFill>
-                          <a:latin typeface="Segoe UI"/>
-                        </a:rPr>
-                        <a:t>603</a:t>
-                      </a:r>
-                    </a:p>
-                  </a:txBody>
-                  <a:tcPr anchor="ctr" marL="54864" marR="54864" marT="9144" marB="9144">
-                    <a:lnL w="9525" cap="flat">
-                      <a:solidFill>
-                        <a:srgbClr val="EAF1ED"/>
-                      </a:solidFill>
-                    </a:lnL>
-                    <a:lnR w="9525" cap="flat">
-                      <a:solidFill>
-                        <a:srgbClr val="EAF1ED"/>
-                      </a:solidFill>
-                    </a:lnR>
-                    <a:lnT w="9525" cap="flat">
-                      <a:solidFill>
-                        <a:srgbClr val="EAF1ED"/>
-                      </a:solidFill>
-                    </a:lnT>
-                    <a:lnB w="9525" cap="flat">
-                      <a:solidFill>
-                        <a:srgbClr val="EAF1ED"/>
-                      </a:solidFill>
-                    </a:lnB>
-                    <a:solidFill>
-                      <a:srgbClr val="FFFFFF"/>
-                    </a:solidFill>
-                  </a:tcPr>
-                </a:tc>
-              </a:tr>
-              <a:tr h="242316">
-                <a:tc>
-                  <a:txBody>
-                    <a:bodyPr wrap="none"/>
-                    <a:lstStyle/>
-                    <a:p>
-                      <a:pPr algn="ctr"/>
-                      <a:r>
-                        <a:rPr sz="840" b="1">
-                          <a:solidFill>
-                            <a:srgbClr val="112233"/>
-                          </a:solidFill>
-                          <a:latin typeface="Segoe UI"/>
-                        </a:rPr>
-                        <a:t>B6</a:t>
-                      </a:r>
-                    </a:p>
-                  </a:txBody>
-                  <a:tcPr anchor="ctr" marL="54864" marR="54864" marT="9144" marB="9144">
-                    <a:lnL w="9525" cap="flat">
-                      <a:solidFill>
-                        <a:srgbClr val="EAF1ED"/>
-                      </a:solidFill>
-                    </a:lnL>
-                    <a:lnR w="9525" cap="flat">
-                      <a:solidFill>
-                        <a:srgbClr val="EAF1ED"/>
-                      </a:solidFill>
-                    </a:lnR>
-                    <a:lnT w="9525" cap="flat">
-                      <a:solidFill>
-                        <a:srgbClr val="EAF1ED"/>
-                      </a:solidFill>
-                    </a:lnT>
-                    <a:lnB w="9525" cap="flat">
-                      <a:solidFill>
-                        <a:srgbClr val="EAF1ED"/>
-                      </a:solidFill>
-                    </a:lnB>
-                    <a:solidFill>
-                      <a:srgbClr val="DFEAAD"/>
-                    </a:solidFill>
-                  </a:tcPr>
-                </a:tc>
-                <a:tc>
-                  <a:txBody>
-                    <a:bodyPr wrap="none"/>
-                    <a:lstStyle/>
-                    <a:p>
-                      <a:pPr algn="r"/>
-                      <a:r>
-                        <a:rPr sz="840" b="0">
-                          <a:solidFill>
-                            <a:srgbClr val="9FB0A8"/>
-                          </a:solidFill>
-                          <a:latin typeface="Segoe UI"/>
-                        </a:rPr>
-                        <a:t>39.8%</a:t>
-                      </a:r>
-                    </a:p>
-                  </a:txBody>
-                  <a:tcPr anchor="ctr" marL="54864" marR="54864" marT="9144" marB="9144">
-                    <a:lnL w="9525" cap="flat">
-                      <a:solidFill>
-                        <a:srgbClr val="EAF1ED"/>
-                      </a:solidFill>
-                    </a:lnL>
-                    <a:lnR w="9525" cap="flat">
-                      <a:solidFill>
-                        <a:srgbClr val="EAF1ED"/>
-                      </a:solidFill>
-                    </a:lnR>
-                    <a:lnT w="9525" cap="flat">
-                      <a:solidFill>
-                        <a:srgbClr val="EAF1ED"/>
-                      </a:solidFill>
-                    </a:lnT>
-                    <a:lnB w="9525" cap="flat">
-                      <a:solidFill>
-                        <a:srgbClr val="EAF1ED"/>
-                      </a:solidFill>
-                    </a:lnB>
-                    <a:solidFill>
-                      <a:srgbClr val="FFFFFF"/>
-                    </a:solidFill>
-                  </a:tcPr>
-                </a:tc>
-                <a:tc>
-                  <a:txBody>
-                    <a:bodyPr wrap="none"/>
-                    <a:lstStyle/>
-                    <a:p>
-                      <a:pPr algn="r"/>
-                      <a:r>
-                        <a:rPr sz="840" b="0">
-                          <a:solidFill>
-                            <a:srgbClr val="9FB0A8"/>
-                          </a:solidFill>
-                          <a:latin typeface="Segoe UI"/>
-                        </a:rPr>
-                        <a:t>13.5%</a:t>
-                      </a:r>
-                    </a:p>
-                  </a:txBody>
-                  <a:tcPr anchor="ctr" marL="54864" marR="54864" marT="9144" marB="9144">
-                    <a:lnL w="9525" cap="flat">
-                      <a:solidFill>
-                        <a:srgbClr val="EAF1ED"/>
-                      </a:solidFill>
-                    </a:lnL>
-                    <a:lnR w="9525" cap="flat">
-                      <a:solidFill>
-                        <a:srgbClr val="EAF1ED"/>
-                      </a:solidFill>
-                    </a:lnR>
-                    <a:lnT w="9525" cap="flat">
-                      <a:solidFill>
-                        <a:srgbClr val="EAF1ED"/>
-                      </a:solidFill>
-                    </a:lnT>
-                    <a:lnB w="9525" cap="flat">
-                      <a:solidFill>
-                        <a:srgbClr val="EAF1ED"/>
-                      </a:solidFill>
-                    </a:lnB>
-                    <a:solidFill>
-                      <a:srgbClr val="FFFFFF"/>
-                    </a:solidFill>
-                  </a:tcPr>
-                </a:tc>
-                <a:tc>
-                  <a:txBody>
-                    <a:bodyPr wrap="none"/>
-                    <a:lstStyle/>
-                    <a:p>
-                      <a:pPr algn="r"/>
-                      <a:r>
-                        <a:rPr sz="840" b="0">
-                          <a:solidFill>
-                            <a:srgbClr val="9FB0A8"/>
-                          </a:solidFill>
-                          <a:latin typeface="Segoe UI"/>
-                        </a:rPr>
-                        <a:t>289,713</a:t>
-                      </a:r>
-                    </a:p>
-                  </a:txBody>
-                  <a:tcPr anchor="ctr" marL="54864" marR="54864" marT="9144" marB="9144">
-                    <a:lnL w="9525" cap="flat">
-                      <a:solidFill>
-                        <a:srgbClr val="EAF1ED"/>
-                      </a:solidFill>
-                    </a:lnL>
-                    <a:lnR w="9525" cap="flat">
-                      <a:solidFill>
-                        <a:srgbClr val="EAF1ED"/>
-                      </a:solidFill>
-                    </a:lnR>
-                    <a:lnT w="9525" cap="flat">
-                      <a:solidFill>
-                        <a:srgbClr val="EAF1ED"/>
-                      </a:solidFill>
-                    </a:lnT>
-                    <a:lnB w="9525" cap="flat">
-                      <a:solidFill>
-                        <a:srgbClr val="EAF1ED"/>
-                      </a:solidFill>
-                    </a:lnB>
-                    <a:solidFill>
-                      <a:srgbClr val="FFFFFF"/>
-                    </a:solidFill>
-                  </a:tcPr>
-                </a:tc>
-                <a:tc>
-                  <a:txBody>
-                    <a:bodyPr wrap="none"/>
-                    <a:lstStyle/>
-                    <a:p>
-                      <a:pPr algn="r"/>
-                      <a:r>
-                        <a:rPr sz="840" b="0">
-                          <a:solidFill>
-                            <a:srgbClr val="9FB0A8"/>
-                          </a:solidFill>
-                          <a:latin typeface="Segoe UI"/>
-                        </a:rPr>
-                        <a:t>17.1%</a:t>
-                      </a:r>
-                    </a:p>
-                  </a:txBody>
-                  <a:tcPr anchor="ctr" marL="54864" marR="54864" marT="9144" marB="9144">
-                    <a:lnL w="9525" cap="flat">
-                      <a:solidFill>
-                        <a:srgbClr val="EAF1ED"/>
-                      </a:solidFill>
-                    </a:lnL>
-                    <a:lnR w="9525" cap="flat">
-                      <a:solidFill>
-                        <a:srgbClr val="EAF1ED"/>
-                      </a:solidFill>
-                    </a:lnR>
-                    <a:lnT w="9525" cap="flat">
-                      <a:solidFill>
-                        <a:srgbClr val="EAF1ED"/>
-                      </a:solidFill>
-                    </a:lnT>
-                    <a:lnB w="9525" cap="flat">
-                      <a:solidFill>
-                        <a:srgbClr val="EAF1ED"/>
-                      </a:solidFill>
-                    </a:lnB>
-                    <a:solidFill>
-                      <a:srgbClr val="FFFFFF"/>
-                    </a:solidFill>
-                  </a:tcPr>
-                </a:tc>
-                <a:tc>
-                  <a:txBody>
-                    <a:bodyPr wrap="none"/>
-                    <a:lstStyle/>
-                    <a:p>
-                      <a:pPr algn="r"/>
-                      <a:r>
-                        <a:rPr sz="840" b="0">
-                          <a:solidFill>
-                            <a:srgbClr val="9FB0A8"/>
-                          </a:solidFill>
-                          <a:latin typeface="Segoe UI"/>
-                        </a:rPr>
-                        <a:t>285,437</a:t>
-                      </a:r>
-                    </a:p>
-                  </a:txBody>
-                  <a:tcPr anchor="ctr" marL="54864" marR="54864" marT="9144" marB="9144">
-                    <a:lnL w="9525" cap="flat">
-                      <a:solidFill>
-                        <a:srgbClr val="EAF1ED"/>
-                      </a:solidFill>
-                    </a:lnL>
-                    <a:lnR w="9525" cap="flat">
-                      <a:solidFill>
-                        <a:srgbClr val="EAF1ED"/>
-                      </a:solidFill>
-                    </a:lnR>
-                    <a:lnT w="9525" cap="flat">
-                      <a:solidFill>
-                        <a:srgbClr val="EAF1ED"/>
-                      </a:solidFill>
-                    </a:lnT>
-                    <a:lnB w="9525" cap="flat">
-                      <a:solidFill>
-                        <a:srgbClr val="EAF1ED"/>
-                      </a:solidFill>
-                    </a:lnB>
-                    <a:solidFill>
-                      <a:srgbClr val="FFFFFF"/>
-                    </a:solidFill>
-                  </a:tcPr>
-                </a:tc>
-                <a:tc>
-                  <a:txBody>
-                    <a:bodyPr wrap="none"/>
-                    <a:lstStyle/>
-                    <a:p>
-                      <a:pPr algn="r"/>
-                      <a:r>
-                        <a:rPr sz="840" b="0">
-                          <a:solidFill>
-                            <a:srgbClr val="9FB0A8"/>
-                          </a:solidFill>
-                          <a:latin typeface="Segoe UI"/>
-                        </a:rPr>
-                        <a:t>3,483</a:t>
-                      </a:r>
-                    </a:p>
-                  </a:txBody>
-                  <a:tcPr anchor="ctr" marL="54864" marR="54864" marT="9144" marB="9144">
-                    <a:lnL w="9525" cap="flat">
-                      <a:solidFill>
-                        <a:srgbClr val="EAF1ED"/>
-                      </a:solidFill>
-                    </a:lnL>
-                    <a:lnR w="9525" cap="flat">
-                      <a:solidFill>
-                        <a:srgbClr val="EAF1ED"/>
-                      </a:solidFill>
-                    </a:lnR>
-                    <a:lnT w="9525" cap="flat">
-                      <a:solidFill>
-                        <a:srgbClr val="EAF1ED"/>
-                      </a:solidFill>
-                    </a:lnT>
-                    <a:lnB w="9525" cap="flat">
-                      <a:solidFill>
-                        <a:srgbClr val="EAF1ED"/>
-                      </a:solidFill>
-                    </a:lnB>
-                    <a:solidFill>
-                      <a:srgbClr val="FFFFFF"/>
-                    </a:solidFill>
-                  </a:tcPr>
-                </a:tc>
-                <a:tc>
-                  <a:txBody>
-                    <a:bodyPr wrap="none"/>
-                    <a:lstStyle/>
-                    <a:p>
-                      <a:pPr algn="r"/>
-                      <a:r>
-                        <a:rPr sz="840" b="0">
-                          <a:solidFill>
-                            <a:srgbClr val="9FB0A8"/>
-                          </a:solidFill>
-                          <a:latin typeface="Segoe UI"/>
-                        </a:rPr>
-                        <a:t>602</a:t>
-                      </a:r>
-                    </a:p>
-                  </a:txBody>
-                  <a:tcPr anchor="ctr" marL="54864" marR="54864" marT="9144" marB="9144">
-                    <a:lnL w="9525" cap="flat">
-                      <a:solidFill>
-                        <a:srgbClr val="EAF1ED"/>
-                      </a:solidFill>
-                    </a:lnL>
-                    <a:lnR w="9525" cap="flat">
-                      <a:solidFill>
-                        <a:srgbClr val="EAF1ED"/>
-                      </a:solidFill>
-                    </a:lnR>
-                    <a:lnT w="9525" cap="flat">
-                      <a:solidFill>
-                        <a:srgbClr val="EAF1ED"/>
-                      </a:solidFill>
-                    </a:lnT>
-                    <a:lnB w="9525" cap="flat">
-                      <a:solidFill>
-                        <a:srgbClr val="EAF1ED"/>
-                      </a:solidFill>
-                    </a:lnB>
-                    <a:solidFill>
-                      <a:srgbClr val="FFFFFF"/>
-                    </a:solidFill>
-                  </a:tcPr>
-                </a:tc>
-              </a:tr>
-              <a:tr h="242316">
-                <a:tc>
-                  <a:txBody>
-                    <a:bodyPr wrap="none"/>
-                    <a:lstStyle/>
-                    <a:p>
-                      <a:pPr algn="ctr"/>
-                      <a:r>
-                        <a:rPr sz="840" b="1">
-                          <a:solidFill>
-                            <a:srgbClr val="112233"/>
-                          </a:solidFill>
-                          <a:latin typeface="Segoe UI"/>
-                        </a:rPr>
-                        <a:t>B7</a:t>
-                      </a:r>
-                    </a:p>
-                  </a:txBody>
-                  <a:tcPr anchor="ctr" marL="54864" marR="54864" marT="9144" marB="9144">
-                    <a:lnL w="9525" cap="flat">
-                      <a:solidFill>
-                        <a:srgbClr val="EAF1ED"/>
-                      </a:solidFill>
-                    </a:lnL>
-                    <a:lnR w="9525" cap="flat">
-                      <a:solidFill>
-                        <a:srgbClr val="EAF1ED"/>
-                      </a:solidFill>
-                    </a:lnR>
-                    <a:lnT w="9525" cap="flat">
-                      <a:solidFill>
-                        <a:srgbClr val="EAF1ED"/>
-                      </a:solidFill>
-                    </a:lnT>
-                    <a:lnB w="9525" cap="flat">
-                      <a:solidFill>
-                        <a:srgbClr val="EAF1ED"/>
-                      </a:solidFill>
-                    </a:lnB>
-                    <a:solidFill>
-                      <a:srgbClr val="EAE9AD"/>
-                    </a:solidFill>
-                  </a:tcPr>
-                </a:tc>
-                <a:tc>
-                  <a:txBody>
-                    <a:bodyPr wrap="none"/>
-                    <a:lstStyle/>
-                    <a:p>
-                      <a:pPr algn="r"/>
-                      <a:r>
-                        <a:rPr sz="840" b="0">
-                          <a:solidFill>
-                            <a:srgbClr val="9FB0A8"/>
-                          </a:solidFill>
-                          <a:latin typeface="Segoe UI"/>
-                        </a:rPr>
-                        <a:t>40.1%</a:t>
-                      </a:r>
-                    </a:p>
-                  </a:txBody>
-                  <a:tcPr anchor="ctr" marL="54864" marR="54864" marT="9144" marB="9144">
-                    <a:lnL w="9525" cap="flat">
-                      <a:solidFill>
-                        <a:srgbClr val="EAF1ED"/>
-                      </a:solidFill>
-                    </a:lnL>
-                    <a:lnR w="9525" cap="flat">
-                      <a:solidFill>
-                        <a:srgbClr val="EAF1ED"/>
-                      </a:solidFill>
-                    </a:lnR>
-                    <a:lnT w="9525" cap="flat">
-                      <a:solidFill>
-                        <a:srgbClr val="EAF1ED"/>
-                      </a:solidFill>
-                    </a:lnT>
-                    <a:lnB w="9525" cap="flat">
-                      <a:solidFill>
-                        <a:srgbClr val="EAF1ED"/>
-                      </a:solidFill>
-                    </a:lnB>
-                    <a:solidFill>
-                      <a:srgbClr val="FFFFFF"/>
-                    </a:solidFill>
-                  </a:tcPr>
-                </a:tc>
-                <a:tc>
-                  <a:txBody>
-                    <a:bodyPr wrap="none"/>
-                    <a:lstStyle/>
-                    <a:p>
-                      <a:pPr algn="r"/>
-                      <a:r>
-                        <a:rPr sz="840" b="0">
-                          <a:solidFill>
-                            <a:srgbClr val="9FB0A8"/>
-                          </a:solidFill>
-                          <a:latin typeface="Segoe UI"/>
-                        </a:rPr>
-                        <a:t>13.2%</a:t>
-                      </a:r>
-                    </a:p>
-                  </a:txBody>
-                  <a:tcPr anchor="ctr" marL="54864" marR="54864" marT="9144" marB="9144">
-                    <a:lnL w="9525" cap="flat">
-                      <a:solidFill>
-                        <a:srgbClr val="EAF1ED"/>
-                      </a:solidFill>
-                    </a:lnL>
-                    <a:lnR w="9525" cap="flat">
-                      <a:solidFill>
-                        <a:srgbClr val="EAF1ED"/>
-                      </a:solidFill>
-                    </a:lnR>
-                    <a:lnT w="9525" cap="flat">
-                      <a:solidFill>
-                        <a:srgbClr val="EAF1ED"/>
-                      </a:solidFill>
-                    </a:lnT>
-                    <a:lnB w="9525" cap="flat">
-                      <a:solidFill>
-                        <a:srgbClr val="EAF1ED"/>
-                      </a:solidFill>
-                    </a:lnB>
-                    <a:solidFill>
-                      <a:srgbClr val="FFFFFF"/>
-                    </a:solidFill>
-                  </a:tcPr>
-                </a:tc>
-                <a:tc>
-                  <a:txBody>
-                    <a:bodyPr wrap="none"/>
-                    <a:lstStyle/>
-                    <a:p>
-                      <a:pPr algn="r"/>
-                      <a:r>
-                        <a:rPr sz="840" b="0">
-                          <a:solidFill>
-                            <a:srgbClr val="9FB0A8"/>
-                          </a:solidFill>
-                          <a:latin typeface="Segoe UI"/>
-                        </a:rPr>
-                        <a:t>278,690</a:t>
-                      </a:r>
-                    </a:p>
-                  </a:txBody>
-                  <a:tcPr anchor="ctr" marL="54864" marR="54864" marT="9144" marB="9144">
-                    <a:lnL w="9525" cap="flat">
-                      <a:solidFill>
-                        <a:srgbClr val="EAF1ED"/>
-                      </a:solidFill>
-                    </a:lnL>
-                    <a:lnR w="9525" cap="flat">
-                      <a:solidFill>
-                        <a:srgbClr val="EAF1ED"/>
-                      </a:solidFill>
-                    </a:lnR>
-                    <a:lnT w="9525" cap="flat">
-                      <a:solidFill>
-                        <a:srgbClr val="EAF1ED"/>
-                      </a:solidFill>
-                    </a:lnT>
-                    <a:lnB w="9525" cap="flat">
-                      <a:solidFill>
-                        <a:srgbClr val="EAF1ED"/>
-                      </a:solidFill>
-                    </a:lnB>
-                    <a:solidFill>
-                      <a:srgbClr val="FFFFFF"/>
-                    </a:solidFill>
-                  </a:tcPr>
-                </a:tc>
-                <a:tc>
-                  <a:txBody>
-                    <a:bodyPr wrap="none"/>
-                    <a:lstStyle/>
-                    <a:p>
-                      <a:pPr algn="r"/>
-                      <a:r>
-                        <a:rPr sz="840" b="0">
-                          <a:solidFill>
-                            <a:srgbClr val="9FB0A8"/>
-                          </a:solidFill>
-                          <a:latin typeface="Segoe UI"/>
-                        </a:rPr>
-                        <a:t>16.4%</a:t>
-                      </a:r>
-                    </a:p>
-                  </a:txBody>
-                  <a:tcPr anchor="ctr" marL="54864" marR="54864" marT="9144" marB="9144">
-                    <a:lnL w="9525" cap="flat">
-                      <a:solidFill>
-                        <a:srgbClr val="EAF1ED"/>
-                      </a:solidFill>
-                    </a:lnL>
-                    <a:lnR w="9525" cap="flat">
-                      <a:solidFill>
-                        <a:srgbClr val="EAF1ED"/>
-                      </a:solidFill>
-                    </a:lnR>
-                    <a:lnT w="9525" cap="flat">
-                      <a:solidFill>
-                        <a:srgbClr val="EAF1ED"/>
-                      </a:solidFill>
-                    </a:lnT>
-                    <a:lnB w="9525" cap="flat">
-                      <a:solidFill>
-                        <a:srgbClr val="EAF1ED"/>
-                      </a:solidFill>
-                    </a:lnB>
-                    <a:solidFill>
-                      <a:srgbClr val="FFFFFF"/>
-                    </a:solidFill>
-                  </a:tcPr>
-                </a:tc>
-                <a:tc>
-                  <a:txBody>
-                    <a:bodyPr wrap="none"/>
-                    <a:lstStyle/>
-                    <a:p>
-                      <a:pPr algn="r"/>
-                      <a:r>
-                        <a:rPr sz="840" b="0">
-                          <a:solidFill>
-                            <a:srgbClr val="9FB0A8"/>
-                          </a:solidFill>
-                          <a:latin typeface="Segoe UI"/>
-                        </a:rPr>
-                        <a:t>276,720</a:t>
-                      </a:r>
-                    </a:p>
-                  </a:txBody>
-                  <a:tcPr anchor="ctr" marL="54864" marR="54864" marT="9144" marB="9144">
-                    <a:lnL w="9525" cap="flat">
-                      <a:solidFill>
-                        <a:srgbClr val="EAF1ED"/>
-                      </a:solidFill>
-                    </a:lnL>
-                    <a:lnR w="9525" cap="flat">
-                      <a:solidFill>
-                        <a:srgbClr val="EAF1ED"/>
-                      </a:solidFill>
-                    </a:lnR>
-                    <a:lnT w="9525" cap="flat">
-                      <a:solidFill>
-                        <a:srgbClr val="EAF1ED"/>
-                      </a:solidFill>
-                    </a:lnT>
-                    <a:lnB w="9525" cap="flat">
-                      <a:solidFill>
-                        <a:srgbClr val="EAF1ED"/>
-                      </a:solidFill>
-                    </a:lnB>
-                    <a:solidFill>
-                      <a:srgbClr val="FFFFFF"/>
-                    </a:solidFill>
-                  </a:tcPr>
-                </a:tc>
-                <a:tc>
-                  <a:txBody>
-                    <a:bodyPr wrap="none"/>
-                    <a:lstStyle/>
-                    <a:p>
-                      <a:pPr algn="r"/>
-                      <a:r>
-                        <a:rPr sz="840" b="0">
-                          <a:solidFill>
-                            <a:srgbClr val="9FB0A8"/>
-                          </a:solidFill>
-                          <a:latin typeface="Segoe UI"/>
-                        </a:rPr>
-                        <a:t>1,306</a:t>
-                      </a:r>
-                    </a:p>
-                  </a:txBody>
-                  <a:tcPr anchor="ctr" marL="54864" marR="54864" marT="9144" marB="9144">
-                    <a:lnL w="9525" cap="flat">
-                      <a:solidFill>
-                        <a:srgbClr val="EAF1ED"/>
-                      </a:solidFill>
-                    </a:lnL>
-                    <a:lnR w="9525" cap="flat">
-                      <a:solidFill>
-                        <a:srgbClr val="EAF1ED"/>
-                      </a:solidFill>
-                    </a:lnR>
-                    <a:lnT w="9525" cap="flat">
-                      <a:solidFill>
-                        <a:srgbClr val="EAF1ED"/>
-                      </a:solidFill>
-                    </a:lnT>
-                    <a:lnB w="9525" cap="flat">
-                      <a:solidFill>
-                        <a:srgbClr val="EAF1ED"/>
-                      </a:solidFill>
-                    </a:lnB>
-                    <a:solidFill>
-                      <a:srgbClr val="FFFFFF"/>
-                    </a:solidFill>
-                  </a:tcPr>
-                </a:tc>
-                <a:tc>
-                  <a:txBody>
-                    <a:bodyPr wrap="none"/>
-                    <a:lstStyle/>
-                    <a:p>
-                      <a:pPr algn="r"/>
-                      <a:r>
-                        <a:rPr sz="840" b="0">
-                          <a:solidFill>
-                            <a:srgbClr val="9FB0A8"/>
-                          </a:solidFill>
-                          <a:latin typeface="Segoe UI"/>
-                        </a:rPr>
-                        <a:t>598</a:t>
-                      </a:r>
-                    </a:p>
-                  </a:txBody>
-                  <a:tcPr anchor="ctr" marL="54864" marR="54864" marT="9144" marB="9144">
-                    <a:lnL w="9525" cap="flat">
-                      <a:solidFill>
-                        <a:srgbClr val="EAF1ED"/>
-                      </a:solidFill>
-                    </a:lnL>
-                    <a:lnR w="9525" cap="flat">
-                      <a:solidFill>
-                        <a:srgbClr val="EAF1ED"/>
-                      </a:solidFill>
-                    </a:lnR>
-                    <a:lnT w="9525" cap="flat">
-                      <a:solidFill>
-                        <a:srgbClr val="EAF1ED"/>
-                      </a:solidFill>
-                    </a:lnT>
-                    <a:lnB w="9525" cap="flat">
-                      <a:solidFill>
-                        <a:srgbClr val="EAF1ED"/>
-                      </a:solidFill>
-                    </a:lnB>
-                    <a:solidFill>
-                      <a:srgbClr val="FFFFFF"/>
-                    </a:solidFill>
-                  </a:tcPr>
-                </a:tc>
-              </a:tr>
-              <a:tr h="242316">
-                <a:tc>
-                  <a:txBody>
-                    <a:bodyPr wrap="none"/>
-                    <a:lstStyle/>
-                    <a:p>
-                      <a:pPr algn="ctr"/>
-                      <a:r>
-                        <a:rPr sz="840" b="1">
-                          <a:solidFill>
-                            <a:srgbClr val="112233"/>
-                          </a:solidFill>
-                          <a:latin typeface="Segoe UI"/>
-                        </a:rPr>
-                        <a:t>B8</a:t>
-                      </a:r>
-                    </a:p>
-                  </a:txBody>
-                  <a:tcPr anchor="ctr" marL="54864" marR="54864" marT="9144" marB="9144">
-                    <a:lnL w="9525" cap="flat">
-                      <a:solidFill>
-                        <a:srgbClr val="EAF1ED"/>
-                      </a:solidFill>
-                    </a:lnL>
-                    <a:lnR w="9525" cap="flat">
-                      <a:solidFill>
-                        <a:srgbClr val="EAF1ED"/>
-                      </a:solidFill>
-                    </a:lnR>
-                    <a:lnT w="9525" cap="flat">
-                      <a:solidFill>
-                        <a:srgbClr val="EAF1ED"/>
-                      </a:solidFill>
-                    </a:lnT>
-                    <a:lnB w="9525" cap="flat">
-                      <a:solidFill>
-                        <a:srgbClr val="EAF1ED"/>
-                      </a:solidFill>
-                    </a:lnB>
-                    <a:solidFill>
-                      <a:srgbClr val="EADDAD"/>
-                    </a:solidFill>
-                  </a:tcPr>
-                </a:tc>
-                <a:tc>
-                  <a:txBody>
-                    <a:bodyPr wrap="none"/>
-                    <a:lstStyle/>
-                    <a:p>
-                      <a:pPr algn="r"/>
-                      <a:r>
-                        <a:rPr sz="840" b="0">
-                          <a:solidFill>
-                            <a:srgbClr val="9FB0A8"/>
-                          </a:solidFill>
-                          <a:latin typeface="Segoe UI"/>
-                        </a:rPr>
-                        <a:t>42.1%</a:t>
-                      </a:r>
-                    </a:p>
-                  </a:txBody>
-                  <a:tcPr anchor="ctr" marL="54864" marR="54864" marT="9144" marB="9144">
-                    <a:lnL w="9525" cap="flat">
-                      <a:solidFill>
-                        <a:srgbClr val="EAF1ED"/>
-                      </a:solidFill>
-                    </a:lnL>
-                    <a:lnR w="9525" cap="flat">
-                      <a:solidFill>
-                        <a:srgbClr val="EAF1ED"/>
-                      </a:solidFill>
-                    </a:lnR>
-                    <a:lnT w="9525" cap="flat">
-                      <a:solidFill>
-                        <a:srgbClr val="EAF1ED"/>
-                      </a:solidFill>
-                    </a:lnT>
-                    <a:lnB w="9525" cap="flat">
-                      <a:solidFill>
-                        <a:srgbClr val="EAF1ED"/>
-                      </a:solidFill>
-                    </a:lnB>
-                    <a:solidFill>
-                      <a:srgbClr val="FFFFFF"/>
-                    </a:solidFill>
-                  </a:tcPr>
-                </a:tc>
-                <a:tc>
-                  <a:txBody>
-                    <a:bodyPr wrap="none"/>
-                    <a:lstStyle/>
-                    <a:p>
-                      <a:pPr algn="r"/>
-                      <a:r>
-                        <a:rPr sz="840" b="0">
-                          <a:solidFill>
-                            <a:srgbClr val="9FB0A8"/>
-                          </a:solidFill>
-                          <a:latin typeface="Segoe UI"/>
-                        </a:rPr>
-                        <a:t>17.1%</a:t>
-                      </a:r>
-                    </a:p>
-                  </a:txBody>
-                  <a:tcPr anchor="ctr" marL="54864" marR="54864" marT="9144" marB="9144">
-                    <a:lnL w="9525" cap="flat">
-                      <a:solidFill>
-                        <a:srgbClr val="EAF1ED"/>
-                      </a:solidFill>
-                    </a:lnL>
-                    <a:lnR w="9525" cap="flat">
-                      <a:solidFill>
-                        <a:srgbClr val="EAF1ED"/>
-                      </a:solidFill>
-                    </a:lnR>
-                    <a:lnT w="9525" cap="flat">
-                      <a:solidFill>
-                        <a:srgbClr val="EAF1ED"/>
-                      </a:solidFill>
-                    </a:lnT>
-                    <a:lnB w="9525" cap="flat">
-                      <a:solidFill>
-                        <a:srgbClr val="EAF1ED"/>
-                      </a:solidFill>
-                    </a:lnB>
-                    <a:solidFill>
-                      <a:srgbClr val="FFFFFF"/>
-                    </a:solidFill>
-                  </a:tcPr>
-                </a:tc>
-                <a:tc>
-                  <a:txBody>
-                    <a:bodyPr wrap="none"/>
-                    <a:lstStyle/>
-                    <a:p>
-                      <a:pPr algn="r"/>
-                      <a:r>
-                        <a:rPr sz="840" b="0">
-                          <a:solidFill>
-                            <a:srgbClr val="9FB0A8"/>
-                          </a:solidFill>
-                          <a:latin typeface="Segoe UI"/>
-                        </a:rPr>
-                        <a:t>86,512</a:t>
-                      </a:r>
-                    </a:p>
-                  </a:txBody>
-                  <a:tcPr anchor="ctr" marL="54864" marR="54864" marT="9144" marB="9144">
-                    <a:lnL w="9525" cap="flat">
-                      <a:solidFill>
-                        <a:srgbClr val="EAF1ED"/>
-                      </a:solidFill>
-                    </a:lnL>
-                    <a:lnR w="9525" cap="flat">
-                      <a:solidFill>
-                        <a:srgbClr val="EAF1ED"/>
-                      </a:solidFill>
-                    </a:lnR>
-                    <a:lnT w="9525" cap="flat">
-                      <a:solidFill>
-                        <a:srgbClr val="EAF1ED"/>
-                      </a:solidFill>
-                    </a:lnT>
-                    <a:lnB w="9525" cap="flat">
-                      <a:solidFill>
-                        <a:srgbClr val="EAF1ED"/>
-                      </a:solidFill>
-                    </a:lnB>
-                    <a:solidFill>
-                      <a:srgbClr val="FFFFFF"/>
-                    </a:solidFill>
-                  </a:tcPr>
-                </a:tc>
-                <a:tc>
-                  <a:txBody>
-                    <a:bodyPr wrap="none"/>
-                    <a:lstStyle/>
-                    <a:p>
-                      <a:pPr algn="r"/>
-                      <a:r>
-                        <a:rPr sz="840" b="0">
-                          <a:solidFill>
-                            <a:srgbClr val="9FB0A8"/>
-                          </a:solidFill>
-                          <a:latin typeface="Segoe UI"/>
-                        </a:rPr>
-                        <a:t>5.1%</a:t>
-                      </a:r>
-                    </a:p>
-                  </a:txBody>
-                  <a:tcPr anchor="ctr" marL="54864" marR="54864" marT="9144" marB="9144">
-                    <a:lnL w="9525" cap="flat">
-                      <a:solidFill>
-                        <a:srgbClr val="EAF1ED"/>
-                      </a:solidFill>
-                    </a:lnL>
-                    <a:lnR w="9525" cap="flat">
-                      <a:solidFill>
-                        <a:srgbClr val="EAF1ED"/>
-                      </a:solidFill>
-                    </a:lnR>
-                    <a:lnT w="9525" cap="flat">
-                      <a:solidFill>
-                        <a:srgbClr val="EAF1ED"/>
-                      </a:solidFill>
-                    </a:lnT>
-                    <a:lnB w="9525" cap="flat">
-                      <a:solidFill>
-                        <a:srgbClr val="EAF1ED"/>
-                      </a:solidFill>
-                    </a:lnB>
-                    <a:solidFill>
-                      <a:srgbClr val="FFFFFF"/>
-                    </a:solidFill>
-                  </a:tcPr>
-                </a:tc>
-                <a:tc>
-                  <a:txBody>
-                    <a:bodyPr wrap="none"/>
-                    <a:lstStyle/>
-                    <a:p>
-                      <a:pPr algn="r"/>
-                      <a:r>
-                        <a:rPr sz="840" b="0">
-                          <a:solidFill>
-                            <a:srgbClr val="9FB0A8"/>
-                          </a:solidFill>
-                          <a:latin typeface="Segoe UI"/>
-                        </a:rPr>
-                        <a:t>85,882</a:t>
-                      </a:r>
-                    </a:p>
-                  </a:txBody>
-                  <a:tcPr anchor="ctr" marL="54864" marR="54864" marT="9144" marB="9144">
-                    <a:lnL w="9525" cap="flat">
-                      <a:solidFill>
-                        <a:srgbClr val="EAF1ED"/>
-                      </a:solidFill>
-                    </a:lnL>
-                    <a:lnR w="9525" cap="flat">
-                      <a:solidFill>
-                        <a:srgbClr val="EAF1ED"/>
-                      </a:solidFill>
-                    </a:lnR>
-                    <a:lnT w="9525" cap="flat">
-                      <a:solidFill>
-                        <a:srgbClr val="EAF1ED"/>
-                      </a:solidFill>
-                    </a:lnT>
-                    <a:lnB w="9525" cap="flat">
-                      <a:solidFill>
-                        <a:srgbClr val="EAF1ED"/>
-                      </a:solidFill>
-                    </a:lnB>
-                    <a:solidFill>
-                      <a:srgbClr val="FFFFFF"/>
-                    </a:solidFill>
-                  </a:tcPr>
-                </a:tc>
-                <a:tc>
-                  <a:txBody>
-                    <a:bodyPr wrap="none"/>
-                    <a:lstStyle/>
-                    <a:p>
-                      <a:pPr algn="r"/>
-                      <a:r>
-                        <a:rPr sz="840" b="0">
-                          <a:solidFill>
-                            <a:srgbClr val="9FB0A8"/>
-                          </a:solidFill>
-                          <a:latin typeface="Segoe UI"/>
-                        </a:rPr>
-                        <a:t>1,798</a:t>
-                      </a:r>
-                    </a:p>
-                  </a:txBody>
-                  <a:tcPr anchor="ctr" marL="54864" marR="54864" marT="9144" marB="9144">
-                    <a:lnL w="9525" cap="flat">
-                      <a:solidFill>
-                        <a:srgbClr val="EAF1ED"/>
-                      </a:solidFill>
-                    </a:lnL>
-                    <a:lnR w="9525" cap="flat">
-                      <a:solidFill>
-                        <a:srgbClr val="EAF1ED"/>
-                      </a:solidFill>
-                    </a:lnR>
-                    <a:lnT w="9525" cap="flat">
-                      <a:solidFill>
-                        <a:srgbClr val="EAF1ED"/>
-                      </a:solidFill>
-                    </a:lnT>
-                    <a:lnB w="9525" cap="flat">
-                      <a:solidFill>
-                        <a:srgbClr val="EAF1ED"/>
-                      </a:solidFill>
-                    </a:lnB>
-                    <a:solidFill>
-                      <a:srgbClr val="FFFFFF"/>
-                    </a:solidFill>
-                  </a:tcPr>
-                </a:tc>
-                <a:tc>
-                  <a:txBody>
-                    <a:bodyPr wrap="none"/>
-                    <a:lstStyle/>
-                    <a:p>
-                      <a:pPr algn="r"/>
-                      <a:r>
-                        <a:rPr sz="840" b="0">
-                          <a:solidFill>
-                            <a:srgbClr val="9FB0A8"/>
-                          </a:solidFill>
-                          <a:latin typeface="Segoe UI"/>
-                        </a:rPr>
-                        <a:t>579</a:t>
-                      </a:r>
-                    </a:p>
-                  </a:txBody>
-                  <a:tcPr anchor="ctr" marL="54864" marR="54864" marT="9144" marB="9144">
-                    <a:lnL w="9525" cap="flat">
-                      <a:solidFill>
-                        <a:srgbClr val="EAF1ED"/>
-                      </a:solidFill>
-                    </a:lnL>
-                    <a:lnR w="9525" cap="flat">
-                      <a:solidFill>
-                        <a:srgbClr val="EAF1ED"/>
-                      </a:solidFill>
-                    </a:lnR>
-                    <a:lnT w="9525" cap="flat">
-                      <a:solidFill>
-                        <a:srgbClr val="EAF1ED"/>
-                      </a:solidFill>
-                    </a:lnT>
-                    <a:lnB w="9525" cap="flat">
-                      <a:solidFill>
-                        <a:srgbClr val="EAF1ED"/>
-                      </a:solidFill>
-                    </a:lnB>
-                    <a:solidFill>
-                      <a:srgbClr val="FFFFFF"/>
-                    </a:solidFill>
-                  </a:tcPr>
-                </a:tc>
-              </a:tr>
-              <a:tr h="242316">
-                <a:tc>
-                  <a:txBody>
-                    <a:bodyPr wrap="none"/>
-                    <a:lstStyle/>
-                    <a:p>
-                      <a:pPr algn="ctr"/>
-                      <a:r>
-                        <a:rPr sz="840" b="1">
-                          <a:solidFill>
-                            <a:srgbClr val="112233"/>
-                          </a:solidFill>
-                          <a:latin typeface="Segoe UI"/>
-                        </a:rPr>
-                        <a:t>B9</a:t>
-                      </a:r>
-                    </a:p>
-                  </a:txBody>
-                  <a:tcPr anchor="ctr" marL="54864" marR="54864" marT="9144" marB="9144">
-                    <a:lnL w="9525" cap="flat">
-                      <a:solidFill>
-                        <a:srgbClr val="EAF1ED"/>
-                      </a:solidFill>
-                    </a:lnL>
-                    <a:lnR w="9525" cap="flat">
-                      <a:solidFill>
-                        <a:srgbClr val="EAF1ED"/>
-                      </a:solidFill>
-                    </a:lnR>
-                    <a:lnT w="9525" cap="flat">
-                      <a:solidFill>
-                        <a:srgbClr val="EAF1ED"/>
-                      </a:solidFill>
-                    </a:lnT>
-                    <a:lnB w="9525" cap="flat">
-                      <a:solidFill>
-                        <a:srgbClr val="EAF1ED"/>
-                      </a:solidFill>
-                    </a:lnB>
-                    <a:solidFill>
-                      <a:srgbClr val="EAD1AD"/>
-                    </a:solidFill>
-                  </a:tcPr>
-                </a:tc>
-                <a:tc>
-                  <a:txBody>
-                    <a:bodyPr wrap="none"/>
-                    <a:lstStyle/>
-                    <a:p>
-                      <a:pPr algn="r"/>
-                      <a:r>
-                        <a:rPr sz="840" b="0">
-                          <a:solidFill>
-                            <a:srgbClr val="9FB0A8"/>
-                          </a:solidFill>
-                          <a:latin typeface="Segoe UI"/>
-                        </a:rPr>
-                        <a:t>44.9%</a:t>
-                      </a:r>
-                    </a:p>
-                  </a:txBody>
-                  <a:tcPr anchor="ctr" marL="54864" marR="54864" marT="9144" marB="9144">
-                    <a:lnL w="9525" cap="flat">
-                      <a:solidFill>
-                        <a:srgbClr val="EAF1ED"/>
-                      </a:solidFill>
-                    </a:lnL>
-                    <a:lnR w="9525" cap="flat">
-                      <a:solidFill>
-                        <a:srgbClr val="EAF1ED"/>
-                      </a:solidFill>
-                    </a:lnR>
-                    <a:lnT w="9525" cap="flat">
-                      <a:solidFill>
-                        <a:srgbClr val="EAF1ED"/>
-                      </a:solidFill>
-                    </a:lnT>
-                    <a:lnB w="9525" cap="flat">
-                      <a:solidFill>
-                        <a:srgbClr val="EAF1ED"/>
-                      </a:solidFill>
-                    </a:lnB>
-                    <a:solidFill>
-                      <a:srgbClr val="FFFFFF"/>
-                    </a:solidFill>
-                  </a:tcPr>
-                </a:tc>
-                <a:tc>
-                  <a:txBody>
-                    <a:bodyPr wrap="none"/>
-                    <a:lstStyle/>
-                    <a:p>
-                      <a:pPr algn="r"/>
-                      <a:r>
-                        <a:rPr sz="840" b="0">
-                          <a:solidFill>
-                            <a:srgbClr val="9FB0A8"/>
-                          </a:solidFill>
-                          <a:latin typeface="Segoe UI"/>
-                        </a:rPr>
-                        <a:t>18.1%</a:t>
-                      </a:r>
-                    </a:p>
-                  </a:txBody>
-                  <a:tcPr anchor="ctr" marL="54864" marR="54864" marT="9144" marB="9144">
-                    <a:lnL w="9525" cap="flat">
-                      <a:solidFill>
-                        <a:srgbClr val="EAF1ED"/>
-                      </a:solidFill>
-                    </a:lnL>
-                    <a:lnR w="9525" cap="flat">
-                      <a:solidFill>
-                        <a:srgbClr val="EAF1ED"/>
-                      </a:solidFill>
-                    </a:lnR>
-                    <a:lnT w="9525" cap="flat">
-                      <a:solidFill>
-                        <a:srgbClr val="EAF1ED"/>
-                      </a:solidFill>
-                    </a:lnT>
-                    <a:lnB w="9525" cap="flat">
-                      <a:solidFill>
-                        <a:srgbClr val="EAF1ED"/>
-                      </a:solidFill>
-                    </a:lnB>
-                    <a:solidFill>
-                      <a:srgbClr val="FFFFFF"/>
-                    </a:solidFill>
-                  </a:tcPr>
-                </a:tc>
-                <a:tc>
-                  <a:txBody>
-                    <a:bodyPr wrap="none"/>
-                    <a:lstStyle/>
-                    <a:p>
-                      <a:pPr algn="r"/>
-                      <a:r>
-                        <a:rPr sz="840" b="0">
-                          <a:solidFill>
-                            <a:srgbClr val="9FB0A8"/>
-                          </a:solidFill>
-                          <a:latin typeface="Segoe UI"/>
-                        </a:rPr>
-                        <a:t>111,032</a:t>
-                      </a:r>
-                    </a:p>
-                  </a:txBody>
-                  <a:tcPr anchor="ctr" marL="54864" marR="54864" marT="9144" marB="9144">
-                    <a:lnL w="9525" cap="flat">
-                      <a:solidFill>
-                        <a:srgbClr val="EAF1ED"/>
-                      </a:solidFill>
-                    </a:lnL>
-                    <a:lnR w="9525" cap="flat">
-                      <a:solidFill>
-                        <a:srgbClr val="EAF1ED"/>
-                      </a:solidFill>
-                    </a:lnR>
-                    <a:lnT w="9525" cap="flat">
-                      <a:solidFill>
-                        <a:srgbClr val="EAF1ED"/>
-                      </a:solidFill>
-                    </a:lnT>
-                    <a:lnB w="9525" cap="flat">
-                      <a:solidFill>
-                        <a:srgbClr val="EAF1ED"/>
-                      </a:solidFill>
-                    </a:lnB>
-                    <a:solidFill>
-                      <a:srgbClr val="FFFFFF"/>
-                    </a:solidFill>
-                  </a:tcPr>
-                </a:tc>
-                <a:tc>
-                  <a:txBody>
-                    <a:bodyPr wrap="none"/>
-                    <a:lstStyle/>
-                    <a:p>
-                      <a:pPr algn="r"/>
-                      <a:r>
-                        <a:rPr sz="840" b="0">
-                          <a:solidFill>
-                            <a:srgbClr val="9FB0A8"/>
-                          </a:solidFill>
-                          <a:latin typeface="Segoe UI"/>
-                        </a:rPr>
-                        <a:t>6.5%</a:t>
-                      </a:r>
-                    </a:p>
-                  </a:txBody>
-                  <a:tcPr anchor="ctr" marL="54864" marR="54864" marT="9144" marB="9144">
-                    <a:lnL w="9525" cap="flat">
-                      <a:solidFill>
-                        <a:srgbClr val="EAF1ED"/>
-                      </a:solidFill>
-                    </a:lnL>
-                    <a:lnR w="9525" cap="flat">
-                      <a:solidFill>
-                        <a:srgbClr val="EAF1ED"/>
-                      </a:solidFill>
-                    </a:lnR>
-                    <a:lnT w="9525" cap="flat">
-                      <a:solidFill>
-                        <a:srgbClr val="EAF1ED"/>
-                      </a:solidFill>
-                    </a:lnT>
-                    <a:lnB w="9525" cap="flat">
-                      <a:solidFill>
-                        <a:srgbClr val="EAF1ED"/>
-                      </a:solidFill>
-                    </a:lnB>
-                    <a:solidFill>
-                      <a:srgbClr val="FFFFFF"/>
-                    </a:solidFill>
-                  </a:tcPr>
-                </a:tc>
-                <a:tc>
-                  <a:txBody>
-                    <a:bodyPr wrap="none"/>
-                    <a:lstStyle/>
-                    <a:p>
-                      <a:pPr algn="r"/>
-                      <a:r>
-                        <a:rPr sz="840" b="0">
-                          <a:solidFill>
-                            <a:srgbClr val="9FB0A8"/>
-                          </a:solidFill>
-                          <a:latin typeface="Segoe UI"/>
-                        </a:rPr>
-                        <a:t>110,728</a:t>
-                      </a:r>
-                    </a:p>
-                  </a:txBody>
-                  <a:tcPr anchor="ctr" marL="54864" marR="54864" marT="9144" marB="9144">
-                    <a:lnL w="9525" cap="flat">
-                      <a:solidFill>
-                        <a:srgbClr val="EAF1ED"/>
-                      </a:solidFill>
-                    </a:lnL>
-                    <a:lnR w="9525" cap="flat">
-                      <a:solidFill>
-                        <a:srgbClr val="EAF1ED"/>
-                      </a:solidFill>
-                    </a:lnR>
-                    <a:lnT w="9525" cap="flat">
-                      <a:solidFill>
-                        <a:srgbClr val="EAF1ED"/>
-                      </a:solidFill>
-                    </a:lnT>
-                    <a:lnB w="9525" cap="flat">
-                      <a:solidFill>
-                        <a:srgbClr val="EAF1ED"/>
-                      </a:solidFill>
-                    </a:lnB>
-                    <a:solidFill>
-                      <a:srgbClr val="FFFFFF"/>
-                    </a:solidFill>
-                  </a:tcPr>
-                </a:tc>
-                <a:tc>
-                  <a:txBody>
-                    <a:bodyPr wrap="none"/>
-                    <a:lstStyle/>
-                    <a:p>
-                      <a:pPr algn="r"/>
-                      <a:r>
-                        <a:rPr sz="840" b="0">
-                          <a:solidFill>
-                            <a:srgbClr val="9FB0A8"/>
-                          </a:solidFill>
-                          <a:latin typeface="Segoe UI"/>
-                        </a:rPr>
-                        <a:t>1,049</a:t>
-                      </a:r>
-                    </a:p>
-                  </a:txBody>
-                  <a:tcPr anchor="ctr" marL="54864" marR="54864" marT="9144" marB="9144">
-                    <a:lnL w="9525" cap="flat">
-                      <a:solidFill>
-                        <a:srgbClr val="EAF1ED"/>
-                      </a:solidFill>
-                    </a:lnL>
-                    <a:lnR w="9525" cap="flat">
-                      <a:solidFill>
-                        <a:srgbClr val="EAF1ED"/>
-                      </a:solidFill>
-                    </a:lnR>
-                    <a:lnT w="9525" cap="flat">
-                      <a:solidFill>
-                        <a:srgbClr val="EAF1ED"/>
-                      </a:solidFill>
-                    </a:lnT>
-                    <a:lnB w="9525" cap="flat">
-                      <a:solidFill>
-                        <a:srgbClr val="EAF1ED"/>
-                      </a:solidFill>
-                    </a:lnB>
-                    <a:solidFill>
-                      <a:srgbClr val="FFFFFF"/>
-                    </a:solidFill>
-                  </a:tcPr>
-                </a:tc>
-                <a:tc>
-                  <a:txBody>
-                    <a:bodyPr wrap="none"/>
-                    <a:lstStyle/>
-                    <a:p>
-                      <a:pPr algn="r"/>
-                      <a:r>
-                        <a:rPr sz="840" b="0">
-                          <a:solidFill>
-                            <a:srgbClr val="9FB0A8"/>
-                          </a:solidFill>
-                          <a:latin typeface="Segoe UI"/>
-                        </a:rPr>
-                        <a:t>550</a:t>
-                      </a:r>
-                    </a:p>
-                  </a:txBody>
-                  <a:tcPr anchor="ctr" marL="54864" marR="54864" marT="9144" marB="9144">
-                    <a:lnL w="9525" cap="flat">
-                      <a:solidFill>
-                        <a:srgbClr val="EAF1ED"/>
-                      </a:solidFill>
-                    </a:lnL>
-                    <a:lnR w="9525" cap="flat">
-                      <a:solidFill>
-                        <a:srgbClr val="EAF1ED"/>
-                      </a:solidFill>
-                    </a:lnR>
-                    <a:lnT w="9525" cap="flat">
-                      <a:solidFill>
-                        <a:srgbClr val="EAF1ED"/>
-                      </a:solidFill>
-                    </a:lnT>
-                    <a:lnB w="9525" cap="flat">
-                      <a:solidFill>
-                        <a:srgbClr val="EAF1ED"/>
-                      </a:solidFill>
-                    </a:lnB>
-                    <a:solidFill>
-                      <a:srgbClr val="FFFFFF"/>
-                    </a:solidFill>
-                  </a:tcPr>
-                </a:tc>
-              </a:tr>
-              <a:tr h="242316">
-                <a:tc>
-                  <a:txBody>
-                    <a:bodyPr wrap="none"/>
-                    <a:lstStyle/>
-                    <a:p>
-                      <a:pPr algn="ctr"/>
-                      <a:r>
-                        <a:rPr sz="840" b="1">
-                          <a:solidFill>
-                            <a:srgbClr val="112233"/>
-                          </a:solidFill>
-                          <a:latin typeface="Segoe UI"/>
-                        </a:rPr>
-                        <a:t>B10</a:t>
-                      </a:r>
-                    </a:p>
-                  </a:txBody>
-                  <a:tcPr anchor="ctr" marL="54864" marR="54864" marT="9144" marB="9144">
-                    <a:lnL w="9525" cap="flat">
-                      <a:solidFill>
-                        <a:srgbClr val="EAF1ED"/>
-                      </a:solidFill>
-                    </a:lnL>
-                    <a:lnR w="9525" cap="flat">
-                      <a:solidFill>
-                        <a:srgbClr val="EAF1ED"/>
-                      </a:solidFill>
-                    </a:lnR>
-                    <a:lnT w="9525" cap="flat">
-                      <a:solidFill>
-                        <a:srgbClr val="EAF1ED"/>
-                      </a:solidFill>
-                    </a:lnT>
-                    <a:lnB w="9525" cap="flat">
-                      <a:solidFill>
-                        <a:srgbClr val="EAF1ED"/>
-                      </a:solidFill>
-                    </a:lnB>
-                    <a:solidFill>
-                      <a:srgbClr val="EAC5AD"/>
-                    </a:solidFill>
-                  </a:tcPr>
-                </a:tc>
-                <a:tc>
-                  <a:txBody>
-                    <a:bodyPr wrap="none"/>
-                    <a:lstStyle/>
-                    <a:p>
-                      <a:pPr algn="r"/>
-                      <a:r>
-                        <a:rPr sz="840" b="0">
-                          <a:solidFill>
-                            <a:srgbClr val="9FB0A8"/>
-                          </a:solidFill>
-                          <a:latin typeface="Segoe UI"/>
-                        </a:rPr>
-                        <a:t>45.0%</a:t>
-                      </a:r>
-                    </a:p>
-                  </a:txBody>
-                  <a:tcPr anchor="ctr" marL="54864" marR="54864" marT="9144" marB="9144">
-                    <a:lnL w="9525" cap="flat">
-                      <a:solidFill>
-                        <a:srgbClr val="EAF1ED"/>
-                      </a:solidFill>
-                    </a:lnL>
-                    <a:lnR w="9525" cap="flat">
-                      <a:solidFill>
-                        <a:srgbClr val="EAF1ED"/>
-                      </a:solidFill>
-                    </a:lnR>
-                    <a:lnT w="9525" cap="flat">
-                      <a:solidFill>
-                        <a:srgbClr val="EAF1ED"/>
-                      </a:solidFill>
-                    </a:lnT>
-                    <a:lnB w="9525" cap="flat">
-                      <a:solidFill>
-                        <a:srgbClr val="EAF1ED"/>
-                      </a:solidFill>
-                    </a:lnB>
-                    <a:solidFill>
-                      <a:srgbClr val="FFFFFF"/>
-                    </a:solidFill>
-                  </a:tcPr>
-                </a:tc>
-                <a:tc>
-                  <a:txBody>
-                    <a:bodyPr wrap="none"/>
-                    <a:lstStyle/>
-                    <a:p>
-                      <a:pPr algn="r"/>
-                      <a:r>
-                        <a:rPr sz="840" b="0">
-                          <a:solidFill>
-                            <a:srgbClr val="9FB0A8"/>
-                          </a:solidFill>
-                          <a:latin typeface="Segoe UI"/>
-                        </a:rPr>
-                        <a:t>19.1%</a:t>
-                      </a:r>
-                    </a:p>
-                  </a:txBody>
-                  <a:tcPr anchor="ctr" marL="54864" marR="54864" marT="9144" marB="9144">
-                    <a:lnL w="9525" cap="flat">
-                      <a:solidFill>
-                        <a:srgbClr val="EAF1ED"/>
-                      </a:solidFill>
-                    </a:lnL>
-                    <a:lnR w="9525" cap="flat">
-                      <a:solidFill>
-                        <a:srgbClr val="EAF1ED"/>
-                      </a:solidFill>
-                    </a:lnR>
-                    <a:lnT w="9525" cap="flat">
-                      <a:solidFill>
-                        <a:srgbClr val="EAF1ED"/>
-                      </a:solidFill>
-                    </a:lnT>
-                    <a:lnB w="9525" cap="flat">
-                      <a:solidFill>
-                        <a:srgbClr val="EAF1ED"/>
-                      </a:solidFill>
-                    </a:lnB>
-                    <a:solidFill>
-                      <a:srgbClr val="FFFFFF"/>
-                    </a:solidFill>
-                  </a:tcPr>
-                </a:tc>
-                <a:tc>
-                  <a:txBody>
-                    <a:bodyPr wrap="none"/>
-                    <a:lstStyle/>
-                    <a:p>
-                      <a:pPr algn="r"/>
-                      <a:r>
-                        <a:rPr sz="840" b="0">
-                          <a:solidFill>
-                            <a:srgbClr val="9FB0A8"/>
-                          </a:solidFill>
-                          <a:latin typeface="Segoe UI"/>
-                        </a:rPr>
-                        <a:t>147,087</a:t>
-                      </a:r>
-                    </a:p>
-                  </a:txBody>
-                  <a:tcPr anchor="ctr" marL="54864" marR="54864" marT="9144" marB="9144">
-                    <a:lnL w="9525" cap="flat">
-                      <a:solidFill>
-                        <a:srgbClr val="EAF1ED"/>
-                      </a:solidFill>
-                    </a:lnL>
-                    <a:lnR w="9525" cap="flat">
-                      <a:solidFill>
-                        <a:srgbClr val="EAF1ED"/>
-                      </a:solidFill>
-                    </a:lnR>
-                    <a:lnT w="9525" cap="flat">
-                      <a:solidFill>
-                        <a:srgbClr val="EAF1ED"/>
-                      </a:solidFill>
-                    </a:lnT>
-                    <a:lnB w="9525" cap="flat">
-                      <a:solidFill>
-                        <a:srgbClr val="EAF1ED"/>
-                      </a:solidFill>
-                    </a:lnB>
-                    <a:solidFill>
-                      <a:srgbClr val="FFFFFF"/>
-                    </a:solidFill>
-                  </a:tcPr>
-                </a:tc>
-                <a:tc>
-                  <a:txBody>
-                    <a:bodyPr wrap="none"/>
-                    <a:lstStyle/>
-                    <a:p>
-                      <a:pPr algn="r"/>
-                      <a:r>
-                        <a:rPr sz="840" b="0">
-                          <a:solidFill>
-                            <a:srgbClr val="9FB0A8"/>
-                          </a:solidFill>
-                          <a:latin typeface="Segoe UI"/>
-                        </a:rPr>
-                        <a:t>8.7%</a:t>
-                      </a:r>
-                    </a:p>
-                  </a:txBody>
-                  <a:tcPr anchor="ctr" marL="54864" marR="54864" marT="9144" marB="9144">
-                    <a:lnL w="9525" cap="flat">
-                      <a:solidFill>
-                        <a:srgbClr val="EAF1ED"/>
-                      </a:solidFill>
-                    </a:lnL>
-                    <a:lnR w="9525" cap="flat">
-                      <a:solidFill>
-                        <a:srgbClr val="EAF1ED"/>
-                      </a:solidFill>
-                    </a:lnR>
-                    <a:lnT w="9525" cap="flat">
-                      <a:solidFill>
-                        <a:srgbClr val="EAF1ED"/>
-                      </a:solidFill>
-                    </a:lnT>
-                    <a:lnB w="9525" cap="flat">
-                      <a:solidFill>
-                        <a:srgbClr val="EAF1ED"/>
-                      </a:solidFill>
-                    </a:lnB>
-                    <a:solidFill>
-                      <a:srgbClr val="FFFFFF"/>
-                    </a:solidFill>
-                  </a:tcPr>
-                </a:tc>
-                <a:tc>
-                  <a:txBody>
-                    <a:bodyPr wrap="none"/>
-                    <a:lstStyle/>
-                    <a:p>
-                      <a:pPr algn="r"/>
-                      <a:r>
-                        <a:rPr sz="840" b="0">
-                          <a:solidFill>
-                            <a:srgbClr val="9FB0A8"/>
-                          </a:solidFill>
-                          <a:latin typeface="Segoe UI"/>
-                        </a:rPr>
-                        <a:t>146,876</a:t>
-                      </a:r>
-                    </a:p>
-                  </a:txBody>
-                  <a:tcPr anchor="ctr" marL="54864" marR="54864" marT="9144" marB="9144">
-                    <a:lnL w="9525" cap="flat">
-                      <a:solidFill>
-                        <a:srgbClr val="EAF1ED"/>
-                      </a:solidFill>
-                    </a:lnL>
-                    <a:lnR w="9525" cap="flat">
-                      <a:solidFill>
-                        <a:srgbClr val="EAF1ED"/>
-                      </a:solidFill>
-                    </a:lnR>
-                    <a:lnT w="9525" cap="flat">
-                      <a:solidFill>
-                        <a:srgbClr val="EAF1ED"/>
-                      </a:solidFill>
-                    </a:lnT>
-                    <a:lnB w="9525" cap="flat">
-                      <a:solidFill>
-                        <a:srgbClr val="EAF1ED"/>
-                      </a:solidFill>
-                    </a:lnB>
-                    <a:solidFill>
-                      <a:srgbClr val="FFFFFF"/>
-                    </a:solidFill>
-                  </a:tcPr>
-                </a:tc>
-                <a:tc>
-                  <a:txBody>
-                    <a:bodyPr wrap="none"/>
-                    <a:lstStyle/>
-                    <a:p>
-                      <a:pPr algn="r"/>
-                      <a:r>
-                        <a:rPr sz="840" b="0">
-                          <a:solidFill>
-                            <a:srgbClr val="9FB0A8"/>
-                          </a:solidFill>
-                          <a:latin typeface="Segoe UI"/>
-                        </a:rPr>
-                        <a:t>420</a:t>
-                      </a:r>
-                    </a:p>
-                  </a:txBody>
-                  <a:tcPr anchor="ctr" marL="54864" marR="54864" marT="9144" marB="9144">
-                    <a:lnL w="9525" cap="flat">
-                      <a:solidFill>
-                        <a:srgbClr val="EAF1ED"/>
-                      </a:solidFill>
-                    </a:lnL>
-                    <a:lnR w="9525" cap="flat">
-                      <a:solidFill>
-                        <a:srgbClr val="EAF1ED"/>
-                      </a:solidFill>
-                    </a:lnR>
-                    <a:lnT w="9525" cap="flat">
-                      <a:solidFill>
-                        <a:srgbClr val="EAF1ED"/>
-                      </a:solidFill>
-                    </a:lnT>
-                    <a:lnB w="9525" cap="flat">
-                      <a:solidFill>
-                        <a:srgbClr val="EAF1ED"/>
-                      </a:solidFill>
-                    </a:lnB>
-                    <a:solidFill>
-                      <a:srgbClr val="FFFFFF"/>
-                    </a:solidFill>
-                  </a:tcPr>
-                </a:tc>
-                <a:tc>
-                  <a:txBody>
-                    <a:bodyPr wrap="none"/>
-                    <a:lstStyle/>
-                    <a:p>
-                      <a:pPr algn="r"/>
-                      <a:r>
-                        <a:rPr sz="840" b="0">
-                          <a:solidFill>
-                            <a:srgbClr val="9FB0A8"/>
-                          </a:solidFill>
-                          <a:latin typeface="Segoe UI"/>
-                        </a:rPr>
-                        <a:t>549</a:t>
-                      </a:r>
-                    </a:p>
-                  </a:txBody>
-                  <a:tcPr anchor="ctr" marL="54864" marR="54864" marT="9144" marB="9144">
-                    <a:lnL w="9525" cap="flat">
-                      <a:solidFill>
-                        <a:srgbClr val="EAF1ED"/>
-                      </a:solidFill>
-                    </a:lnL>
-                    <a:lnR w="9525" cap="flat">
-                      <a:solidFill>
-                        <a:srgbClr val="EAF1ED"/>
-                      </a:solidFill>
-                    </a:lnR>
-                    <a:lnT w="9525" cap="flat">
-                      <a:solidFill>
-                        <a:srgbClr val="EAF1ED"/>
-                      </a:solidFill>
-                    </a:lnT>
-                    <a:lnB w="9525" cap="flat">
-                      <a:solidFill>
-                        <a:srgbClr val="EAF1ED"/>
-                      </a:solidFill>
-                    </a:lnB>
-                    <a:solidFill>
-                      <a:srgbClr val="FFFFFF"/>
-                    </a:solidFill>
-                  </a:tcPr>
-                </a:tc>
-              </a:tr>
-              <a:tr h="242316">
-                <a:tc>
-                  <a:txBody>
-                    <a:bodyPr wrap="none"/>
-                    <a:lstStyle/>
-                    <a:p>
-                      <a:pPr algn="ctr"/>
-                      <a:r>
-                        <a:rPr sz="840" b="1">
-                          <a:solidFill>
-                            <a:srgbClr val="112233"/>
-                          </a:solidFill>
-                          <a:latin typeface="Segoe UI"/>
-                        </a:rPr>
-                        <a:t>B11</a:t>
-                      </a:r>
-                    </a:p>
-                  </a:txBody>
-                  <a:tcPr anchor="ctr" marL="54864" marR="54864" marT="9144" marB="9144">
-                    <a:lnL w="9525" cap="flat">
-                      <a:solidFill>
-                        <a:srgbClr val="EAF1ED"/>
-                      </a:solidFill>
-                    </a:lnL>
-                    <a:lnR w="9525" cap="flat">
-                      <a:solidFill>
-                        <a:srgbClr val="EAF1ED"/>
-                      </a:solidFill>
-                    </a:lnR>
-                    <a:lnT w="9525" cap="flat">
-                      <a:solidFill>
-                        <a:srgbClr val="EAF1ED"/>
-                      </a:solidFill>
-                    </a:lnT>
-                    <a:lnB w="9525" cap="flat">
-                      <a:solidFill>
-                        <a:srgbClr val="EAF1ED"/>
-                      </a:solidFill>
-                    </a:lnB>
-                    <a:solidFill>
-                      <a:srgbClr val="EAB9AD"/>
-                    </a:solidFill>
-                  </a:tcPr>
-                </a:tc>
-                <a:tc>
-                  <a:txBody>
-                    <a:bodyPr wrap="none"/>
-                    <a:lstStyle/>
-                    <a:p>
-                      <a:pPr algn="r"/>
-                      <a:r>
-                        <a:rPr sz="840" b="0">
-                          <a:solidFill>
-                            <a:srgbClr val="9FB0A8"/>
-                          </a:solidFill>
-                          <a:latin typeface="Segoe UI"/>
-                        </a:rPr>
-                        <a:t>47.8%</a:t>
-                      </a:r>
-                    </a:p>
-                  </a:txBody>
-                  <a:tcPr anchor="ctr" marL="54864" marR="54864" marT="9144" marB="9144">
-                    <a:lnL w="9525" cap="flat">
-                      <a:solidFill>
-                        <a:srgbClr val="EAF1ED"/>
-                      </a:solidFill>
-                    </a:lnL>
-                    <a:lnR w="9525" cap="flat">
-                      <a:solidFill>
-                        <a:srgbClr val="EAF1ED"/>
-                      </a:solidFill>
-                    </a:lnR>
-                    <a:lnT w="9525" cap="flat">
-                      <a:solidFill>
-                        <a:srgbClr val="EAF1ED"/>
-                      </a:solidFill>
-                    </a:lnT>
-                    <a:lnB w="9525" cap="flat">
-                      <a:solidFill>
-                        <a:srgbClr val="EAF1ED"/>
-                      </a:solidFill>
-                    </a:lnB>
-                    <a:solidFill>
-                      <a:srgbClr val="FFFFFF"/>
-                    </a:solidFill>
-                  </a:tcPr>
-                </a:tc>
-                <a:tc>
-                  <a:txBody>
-                    <a:bodyPr wrap="none"/>
-                    <a:lstStyle/>
-                    <a:p>
-                      <a:pPr algn="r"/>
-                      <a:r>
-                        <a:rPr sz="840" b="0">
-                          <a:solidFill>
-                            <a:srgbClr val="9FB0A8"/>
-                          </a:solidFill>
-                          <a:latin typeface="Segoe UI"/>
-                        </a:rPr>
-                        <a:t>36.9%</a:t>
-                      </a:r>
-                    </a:p>
-                  </a:txBody>
-                  <a:tcPr anchor="ctr" marL="54864" marR="54864" marT="9144" marB="9144">
-                    <a:lnL w="9525" cap="flat">
-                      <a:solidFill>
-                        <a:srgbClr val="EAF1ED"/>
-                      </a:solidFill>
-                    </a:lnL>
-                    <a:lnR w="9525" cap="flat">
-                      <a:solidFill>
-                        <a:srgbClr val="EAF1ED"/>
-                      </a:solidFill>
-                    </a:lnR>
-                    <a:lnT w="9525" cap="flat">
-                      <a:solidFill>
-                        <a:srgbClr val="EAF1ED"/>
-                      </a:solidFill>
-                    </a:lnT>
-                    <a:lnB w="9525" cap="flat">
-                      <a:solidFill>
-                        <a:srgbClr val="EAF1ED"/>
-                      </a:solidFill>
-                    </a:lnB>
-                    <a:solidFill>
-                      <a:srgbClr val="FFFFFF"/>
-                    </a:solidFill>
-                  </a:tcPr>
-                </a:tc>
-                <a:tc>
-                  <a:txBody>
-                    <a:bodyPr wrap="none"/>
-                    <a:lstStyle/>
-                    <a:p>
-                      <a:pPr algn="r"/>
-                      <a:r>
-                        <a:rPr sz="840" b="0">
-                          <a:solidFill>
-                            <a:srgbClr val="9FB0A8"/>
-                          </a:solidFill>
-                          <a:latin typeface="Segoe UI"/>
-                        </a:rPr>
-                        <a:t>70,579</a:t>
-                      </a:r>
-                    </a:p>
-                  </a:txBody>
-                  <a:tcPr anchor="ctr" marL="54864" marR="54864" marT="9144" marB="9144">
-                    <a:lnL w="9525" cap="flat">
-                      <a:solidFill>
-                        <a:srgbClr val="EAF1ED"/>
-                      </a:solidFill>
-                    </a:lnL>
-                    <a:lnR w="9525" cap="flat">
-                      <a:solidFill>
-                        <a:srgbClr val="EAF1ED"/>
-                      </a:solidFill>
-                    </a:lnR>
-                    <a:lnT w="9525" cap="flat">
-                      <a:solidFill>
-                        <a:srgbClr val="EAF1ED"/>
-                      </a:solidFill>
-                    </a:lnT>
-                    <a:lnB w="9525" cap="flat">
-                      <a:solidFill>
-                        <a:srgbClr val="EAF1ED"/>
-                      </a:solidFill>
-                    </a:lnB>
-                    <a:solidFill>
-                      <a:srgbClr val="FFFFFF"/>
-                    </a:solidFill>
-                  </a:tcPr>
-                </a:tc>
-                <a:tc>
-                  <a:txBody>
-                    <a:bodyPr wrap="none"/>
-                    <a:lstStyle/>
-                    <a:p>
-                      <a:pPr algn="r"/>
-                      <a:r>
-                        <a:rPr sz="840" b="0">
-                          <a:solidFill>
-                            <a:srgbClr val="9FB0A8"/>
-                          </a:solidFill>
-                          <a:latin typeface="Segoe UI"/>
-                        </a:rPr>
-                        <a:t>4.2%</a:t>
-                      </a:r>
-                    </a:p>
-                  </a:txBody>
-                  <a:tcPr anchor="ctr" marL="54864" marR="54864" marT="9144" marB="9144">
-                    <a:lnL w="9525" cap="flat">
-                      <a:solidFill>
-                        <a:srgbClr val="EAF1ED"/>
-                      </a:solidFill>
-                    </a:lnL>
-                    <a:lnR w="9525" cap="flat">
-                      <a:solidFill>
-                        <a:srgbClr val="EAF1ED"/>
-                      </a:solidFill>
-                    </a:lnR>
-                    <a:lnT w="9525" cap="flat">
-                      <a:solidFill>
-                        <a:srgbClr val="EAF1ED"/>
-                      </a:solidFill>
-                    </a:lnT>
-                    <a:lnB w="9525" cap="flat">
-                      <a:solidFill>
-                        <a:srgbClr val="EAF1ED"/>
-                      </a:solidFill>
-                    </a:lnB>
-                    <a:solidFill>
-                      <a:srgbClr val="FFFFFF"/>
-                    </a:solidFill>
-                  </a:tcPr>
-                </a:tc>
-                <a:tc>
-                  <a:txBody>
-                    <a:bodyPr wrap="none"/>
-                    <a:lstStyle/>
-                    <a:p>
-                      <a:pPr algn="r"/>
-                      <a:r>
-                        <a:rPr sz="840" b="0">
-                          <a:solidFill>
-                            <a:srgbClr val="9FB0A8"/>
-                          </a:solidFill>
-                          <a:latin typeface="Segoe UI"/>
-                        </a:rPr>
-                        <a:t>70,510</a:t>
-                      </a:r>
-                    </a:p>
-                  </a:txBody>
-                  <a:tcPr anchor="ctr" marL="54864" marR="54864" marT="9144" marB="9144">
-                    <a:lnL w="9525" cap="flat">
-                      <a:solidFill>
-                        <a:srgbClr val="EAF1ED"/>
-                      </a:solidFill>
-                    </a:lnL>
-                    <a:lnR w="9525" cap="flat">
-                      <a:solidFill>
-                        <a:srgbClr val="EAF1ED"/>
-                      </a:solidFill>
-                    </a:lnR>
-                    <a:lnT w="9525" cap="flat">
-                      <a:solidFill>
-                        <a:srgbClr val="EAF1ED"/>
-                      </a:solidFill>
-                    </a:lnT>
-                    <a:lnB w="9525" cap="flat">
-                      <a:solidFill>
-                        <a:srgbClr val="EAF1ED"/>
-                      </a:solidFill>
-                    </a:lnB>
-                    <a:solidFill>
-                      <a:srgbClr val="FFFFFF"/>
-                    </a:solidFill>
-                  </a:tcPr>
-                </a:tc>
-                <a:tc>
-                  <a:txBody>
-                    <a:bodyPr wrap="none"/>
-                    <a:lstStyle/>
-                    <a:p>
-                      <a:pPr algn="r"/>
-                      <a:r>
-                        <a:rPr sz="840" b="0">
-                          <a:solidFill>
-                            <a:srgbClr val="9FB0A8"/>
-                          </a:solidFill>
-                          <a:latin typeface="Segoe UI"/>
-                        </a:rPr>
-                        <a:t>3,300</a:t>
-                      </a:r>
-                    </a:p>
-                  </a:txBody>
-                  <a:tcPr anchor="ctr" marL="54864" marR="54864" marT="9144" marB="9144">
-                    <a:lnL w="9525" cap="flat">
-                      <a:solidFill>
-                        <a:srgbClr val="EAF1ED"/>
-                      </a:solidFill>
-                    </a:lnL>
-                    <a:lnR w="9525" cap="flat">
-                      <a:solidFill>
-                        <a:srgbClr val="EAF1ED"/>
-                      </a:solidFill>
-                    </a:lnR>
-                    <a:lnT w="9525" cap="flat">
-                      <a:solidFill>
-                        <a:srgbClr val="EAF1ED"/>
-                      </a:solidFill>
-                    </a:lnT>
-                    <a:lnB w="9525" cap="flat">
-                      <a:solidFill>
-                        <a:srgbClr val="EAF1ED"/>
-                      </a:solidFill>
-                    </a:lnB>
-                    <a:solidFill>
-                      <a:srgbClr val="FFFFFF"/>
-                    </a:solidFill>
-                  </a:tcPr>
-                </a:tc>
-                <a:tc>
-                  <a:txBody>
-                    <a:bodyPr wrap="none"/>
-                    <a:lstStyle/>
-                    <a:p>
-                      <a:pPr algn="r"/>
-                      <a:r>
-                        <a:rPr sz="840" b="0">
-                          <a:solidFill>
-                            <a:srgbClr val="9FB0A8"/>
-                          </a:solidFill>
-                          <a:latin typeface="Segoe UI"/>
-                        </a:rPr>
-                        <a:t>522</a:t>
-                      </a:r>
-                    </a:p>
-                  </a:txBody>
-                  <a:tcPr anchor="ctr" marL="54864" marR="54864" marT="9144" marB="9144">
-                    <a:lnL w="9525" cap="flat">
-                      <a:solidFill>
-                        <a:srgbClr val="EAF1ED"/>
-                      </a:solidFill>
-                    </a:lnL>
-                    <a:lnR w="9525" cap="flat">
-                      <a:solidFill>
-                        <a:srgbClr val="EAF1ED"/>
-                      </a:solidFill>
-                    </a:lnR>
-                    <a:lnT w="9525" cap="flat">
-                      <a:solidFill>
-                        <a:srgbClr val="EAF1ED"/>
-                      </a:solidFill>
-                    </a:lnT>
-                    <a:lnB w="9525" cap="flat">
-                      <a:solidFill>
-                        <a:srgbClr val="EAF1ED"/>
-                      </a:solidFill>
-                    </a:lnB>
-                    <a:solidFill>
-                      <a:srgbClr val="FFFFFF"/>
-                    </a:solidFill>
-                  </a:tcPr>
-                </a:tc>
-              </a:tr>
-              <a:tr h="242316">
-                <a:tc>
-                  <a:txBody>
-                    <a:bodyPr wrap="none"/>
-                    <a:lstStyle/>
-                    <a:p>
-                      <a:pPr algn="ctr"/>
-                      <a:r>
-                        <a:rPr sz="840" b="1">
-                          <a:solidFill>
-                            <a:srgbClr val="112233"/>
-                          </a:solidFill>
-                          <a:latin typeface="Segoe UI"/>
-                        </a:rPr>
-                        <a:t>B12</a:t>
-                      </a:r>
-                    </a:p>
-                  </a:txBody>
-                  <a:tcPr anchor="ctr" marL="54864" marR="54864" marT="9144" marB="9144">
-                    <a:lnL w="9525" cap="flat">
-                      <a:solidFill>
-                        <a:srgbClr val="EAF1ED"/>
-                      </a:solidFill>
-                    </a:lnL>
-                    <a:lnR w="9525" cap="flat">
-                      <a:solidFill>
-                        <a:srgbClr val="EAF1ED"/>
-                      </a:solidFill>
-                    </a:lnR>
-                    <a:lnT w="9525" cap="flat">
-                      <a:solidFill>
-                        <a:srgbClr val="EAF1ED"/>
-                      </a:solidFill>
-                    </a:lnT>
-                    <a:lnB w="9525" cap="flat">
-                      <a:solidFill>
-                        <a:srgbClr val="EAF1ED"/>
-                      </a:solidFill>
-                    </a:lnB>
-                    <a:solidFill>
-                      <a:srgbClr val="EAADAD"/>
-                    </a:solidFill>
-                  </a:tcPr>
-                </a:tc>
-                <a:tc>
-                  <a:txBody>
-                    <a:bodyPr wrap="none"/>
-                    <a:lstStyle/>
-                    <a:p>
-                      <a:pPr algn="r"/>
-                      <a:r>
-                        <a:rPr sz="840" b="0">
-                          <a:solidFill>
-                            <a:srgbClr val="9FB0A8"/>
-                          </a:solidFill>
-                          <a:latin typeface="Segoe UI"/>
-                        </a:rPr>
-                        <a:t>52.2%</a:t>
-                      </a:r>
-                    </a:p>
-                  </a:txBody>
-                  <a:tcPr anchor="ctr" marL="54864" marR="54864" marT="9144" marB="9144">
-                    <a:lnL w="9525" cap="flat">
-                      <a:solidFill>
-                        <a:srgbClr val="EAF1ED"/>
-                      </a:solidFill>
-                    </a:lnL>
-                    <a:lnR w="9525" cap="flat">
-                      <a:solidFill>
-                        <a:srgbClr val="EAF1ED"/>
-                      </a:solidFill>
-                    </a:lnR>
-                    <a:lnT w="9525" cap="flat">
-                      <a:solidFill>
-                        <a:srgbClr val="EAF1ED"/>
-                      </a:solidFill>
-                    </a:lnT>
-                    <a:lnB w="9525" cap="flat">
-                      <a:solidFill>
-                        <a:srgbClr val="EAF1ED"/>
-                      </a:solidFill>
-                    </a:lnB>
-                    <a:solidFill>
-                      <a:srgbClr val="FFFFFF"/>
-                    </a:solidFill>
-                  </a:tcPr>
-                </a:tc>
-                <a:tc>
-                  <a:txBody>
-                    <a:bodyPr wrap="none"/>
-                    <a:lstStyle/>
-                    <a:p>
-                      <a:pPr algn="r"/>
-                      <a:r>
-                        <a:rPr sz="840" b="0">
-                          <a:solidFill>
-                            <a:srgbClr val="9FB0A8"/>
-                          </a:solidFill>
-                          <a:latin typeface="Segoe UI"/>
-                        </a:rPr>
-                        <a:t>39.7%</a:t>
-                      </a:r>
-                    </a:p>
-                  </a:txBody>
-                  <a:tcPr anchor="ctr" marL="54864" marR="54864" marT="9144" marB="9144">
-                    <a:lnL w="9525" cap="flat">
-                      <a:solidFill>
-                        <a:srgbClr val="EAF1ED"/>
-                      </a:solidFill>
-                    </a:lnL>
-                    <a:lnR w="9525" cap="flat">
-                      <a:solidFill>
-                        <a:srgbClr val="EAF1ED"/>
-                      </a:solidFill>
-                    </a:lnR>
-                    <a:lnT w="9525" cap="flat">
-                      <a:solidFill>
-                        <a:srgbClr val="EAF1ED"/>
-                      </a:solidFill>
-                    </a:lnT>
-                    <a:lnB w="9525" cap="flat">
-                      <a:solidFill>
-                        <a:srgbClr val="EAF1ED"/>
-                      </a:solidFill>
-                    </a:lnB>
-                    <a:solidFill>
-                      <a:srgbClr val="FFFFFF"/>
-                    </a:solidFill>
-                  </a:tcPr>
-                </a:tc>
-                <a:tc>
-                  <a:txBody>
-                    <a:bodyPr wrap="none"/>
-                    <a:lstStyle/>
-                    <a:p>
-                      <a:pPr algn="r"/>
-                      <a:r>
-                        <a:rPr sz="840" b="0">
-                          <a:solidFill>
-                            <a:srgbClr val="9FB0A8"/>
-                          </a:solidFill>
-                          <a:latin typeface="Segoe UI"/>
-                        </a:rPr>
-                        <a:t>223,194</a:t>
-                      </a:r>
-                    </a:p>
-                  </a:txBody>
-                  <a:tcPr anchor="ctr" marL="54864" marR="54864" marT="9144" marB="9144">
-                    <a:lnL w="9525" cap="flat">
-                      <a:solidFill>
-                        <a:srgbClr val="EAF1ED"/>
-                      </a:solidFill>
-                    </a:lnL>
-                    <a:lnR w="9525" cap="flat">
-                      <a:solidFill>
-                        <a:srgbClr val="EAF1ED"/>
-                      </a:solidFill>
-                    </a:lnR>
-                    <a:lnT w="9525" cap="flat">
-                      <a:solidFill>
-                        <a:srgbClr val="EAF1ED"/>
-                      </a:solidFill>
-                    </a:lnT>
-                    <a:lnB w="9525" cap="flat">
-                      <a:solidFill>
-                        <a:srgbClr val="EAF1ED"/>
-                      </a:solidFill>
-                    </a:lnB>
-                    <a:solidFill>
-                      <a:srgbClr val="FFFFFF"/>
-                    </a:solidFill>
-                  </a:tcPr>
-                </a:tc>
-                <a:tc>
-                  <a:txBody>
-                    <a:bodyPr wrap="none"/>
-                    <a:lstStyle/>
-                    <a:p>
-                      <a:pPr algn="r"/>
-                      <a:r>
-                        <a:rPr sz="840" b="0">
-                          <a:solidFill>
-                            <a:srgbClr val="9FB0A8"/>
-                          </a:solidFill>
-                          <a:latin typeface="Segoe UI"/>
-                        </a:rPr>
-                        <a:t>13.1%</a:t>
-                      </a:r>
-                    </a:p>
-                  </a:txBody>
-                  <a:tcPr anchor="ctr" marL="54864" marR="54864" marT="9144" marB="9144">
-                    <a:lnL w="9525" cap="flat">
-                      <a:solidFill>
-                        <a:srgbClr val="EAF1ED"/>
-                      </a:solidFill>
-                    </a:lnL>
-                    <a:lnR w="9525" cap="flat">
-                      <a:solidFill>
-                        <a:srgbClr val="EAF1ED"/>
-                      </a:solidFill>
-                    </a:lnR>
-                    <a:lnT w="9525" cap="flat">
-                      <a:solidFill>
-                        <a:srgbClr val="EAF1ED"/>
-                      </a:solidFill>
-                    </a:lnT>
-                    <a:lnB w="9525" cap="flat">
-                      <a:solidFill>
-                        <a:srgbClr val="EAF1ED"/>
-                      </a:solidFill>
-                    </a:lnB>
-                    <a:solidFill>
-                      <a:srgbClr val="FFFFFF"/>
-                    </a:solidFill>
-                  </a:tcPr>
-                </a:tc>
-                <a:tc>
-                  <a:txBody>
-                    <a:bodyPr wrap="none"/>
-                    <a:lstStyle/>
-                    <a:p>
-                      <a:pPr algn="r"/>
-                      <a:r>
-                        <a:rPr sz="840" b="0">
-                          <a:solidFill>
-                            <a:srgbClr val="9FB0A8"/>
-                          </a:solidFill>
-                          <a:latin typeface="Segoe UI"/>
-                        </a:rPr>
-                        <a:t>223,102</a:t>
-                      </a:r>
-                    </a:p>
-                  </a:txBody>
-                  <a:tcPr anchor="ctr" marL="54864" marR="54864" marT="9144" marB="9144">
-                    <a:lnL w="9525" cap="flat">
-                      <a:solidFill>
-                        <a:srgbClr val="EAF1ED"/>
-                      </a:solidFill>
-                    </a:lnL>
-                    <a:lnR w="9525" cap="flat">
-                      <a:solidFill>
-                        <a:srgbClr val="EAF1ED"/>
-                      </a:solidFill>
-                    </a:lnR>
-                    <a:lnT w="9525" cap="flat">
-                      <a:solidFill>
-                        <a:srgbClr val="EAF1ED"/>
-                      </a:solidFill>
-                    </a:lnT>
-                    <a:lnB w="9525" cap="flat">
-                      <a:solidFill>
-                        <a:srgbClr val="EAF1ED"/>
-                      </a:solidFill>
-                    </a:lnB>
-                    <a:solidFill>
-                      <a:srgbClr val="FFFFFF"/>
-                    </a:solidFill>
-                  </a:tcPr>
-                </a:tc>
-                <a:tc>
-                  <a:txBody>
-                    <a:bodyPr wrap="none"/>
-                    <a:lstStyle/>
-                    <a:p>
-                      <a:pPr algn="r"/>
-                      <a:r>
-                        <a:rPr sz="840" b="0">
-                          <a:solidFill>
-                            <a:srgbClr val="9FB0A8"/>
-                          </a:solidFill>
-                          <a:latin typeface="Segoe UI"/>
-                        </a:rPr>
-                        <a:t>3,642</a:t>
+                        <a:t>4,592</a:t>
                       </a:r>
                     </a:p>
                   </a:txBody>
@@ -9021,7 +9367,7 @@
                           </a:solidFill>
                           <a:latin typeface="Segoe UI"/>
                         </a:rPr>
-                        <a:t>32.6%</a:t>
+                        <a:t>29.7%</a:t>
                       </a:r>
                     </a:p>
                   </a:txBody>
@@ -9064,7 +9410,7 @@
                           </a:solidFill>
                           <a:latin typeface="Segoe UI"/>
                         </a:rPr>
-                        <a:t>8.4%</a:t>
+                        <a:t>7.4%</a:t>
                       </a:r>
                     </a:p>
                   </a:txBody>
@@ -9107,7 +9453,7 @@
                           </a:solidFill>
                           <a:latin typeface="Segoe UI"/>
                         </a:rPr>
-                        <a:t>188,869</a:t>
+                        <a:t>83,873</a:t>
                       </a:r>
                     </a:p>
                   </a:txBody>
@@ -9150,7 +9496,7 @@
                           </a:solidFill>
                           <a:latin typeface="Segoe UI"/>
                         </a:rPr>
-                        <a:t>11.1%</a:t>
+                        <a:t>4.9%</a:t>
                       </a:r>
                     </a:p>
                   </a:txBody>
@@ -9193,7 +9539,7 @@
                           </a:solidFill>
                           <a:latin typeface="Segoe UI"/>
                         </a:rPr>
-                        <a:t>162,671</a:t>
+                        <a:t>62,412</a:t>
                       </a:r>
                     </a:p>
                   </a:txBody>
@@ -9236,7 +9582,7 @@
                           </a:solidFill>
                           <a:latin typeface="Segoe UI"/>
                         </a:rPr>
-                        <a:t>16,937</a:t>
+                        <a:t>17,755</a:t>
                       </a:r>
                     </a:p>
                   </a:txBody>
@@ -9279,7 +9625,7 @@
                           </a:solidFill>
                           <a:latin typeface="Segoe UI"/>
                         </a:rPr>
-                        <a:t>673</a:t>
+                        <a:t>703</a:t>
                       </a:r>
                     </a:p>
                   </a:txBody>
@@ -9322,7 +9668,7 @@
         </p:nvCxnSpPr>
         <p:spPr>
           <a:xfrm>
-            <a:off x="384048" y="3268980"/>
+            <a:off x="384048" y="3214116"/>
             <a:ext cx="11420856" cy="0"/>
           </a:xfrm>
           <a:prstGeom prst="line">
